--- a/decks/is-this-a-good-friend-lesson-v2.pptx
+++ b/decks/is-this-a-good-friend-lesson-v2.pptx
@@ -19,6 +19,7 @@
     <p:sldId id="267" r:id="rId19"/>
     <p:sldId id="268" r:id="rId20"/>
     <p:sldId id="269" r:id="rId21"/>
+    <p:sldId id="270" r:id="rId22"/>
   </p:sldIdLst>
   <p:sldSz cx="12192000" cy="6858000" type="screen4x3"/>
   <p:notesSz cx="6858000" cy="9144000"/>
@@ -515,7 +516,7 @@
           <a:lstStyle/>
           <a:p>
             <a:r>
-              <a:t>This page and the next three are hidden. They stay in the deck for you and are skipped when you present.</a:t>
+              <a:t>This page is hidden and skipped when you present. The full plan, care notes and research are on the hidden pages at the end of the deck, if you want them.</a:t>
             </a:r>
           </a:p>
         </p:txBody>
@@ -656,6 +657,76 @@
           <a:p>
             <a:r>
               <a:t>3 MINUTES. Students keep the card. The second option is for students who don't have a friendship to fix right now. Share the take-home link (post it on your class page too). It has the flags, the adjust steps, the online moves, a private check-in, and who to talk to. Remind students: a friend who threatens to share secrets or photos, threatens to hurt anyone, pressures them into unsafe things, or gets others to gang up on them is not a friendship problem to fix alone. Tell an adult right away.</a:t>
+            </a:r>
+          </a:p>
+        </p:txBody>
+      </p:sp>
+      <p:sp>
+        <p:nvSpPr>
+          <p:cNvPr id="4" name="Slide Number Placeholder 3"/>
+          <p:cNvSpPr>
+            <a:spLocks noGrp="1"/>
+          </p:cNvSpPr>
+          <p:nvPr>
+            <p:ph type="sldNum" idx="5" sz="quarter"/>
+          </p:nvPr>
+        </p:nvSpPr>
+        <p:spPr/>
+      </p:sp>
+    </p:spTree>
+  </p:cSld>
+  <p:clrMapOvr>
+    <a:masterClrMapping/>
+  </p:clrMapOvr>
+</p:notes>
+</file>
+
+<file path=ppt/notesSlides/notesSlide12.xml><?xml version="1.0" encoding="utf-8"?>
+<p:notes xmlns:a="http://schemas.openxmlformats.org/drawingml/2006/main" xmlns:p="http://schemas.openxmlformats.org/presentationml/2006/main" xmlns:r="http://schemas.openxmlformats.org/officeDocument/2006/relationships">
+  <p:cSld>
+    <p:spTree>
+      <p:nvGrpSpPr>
+        <p:cNvPr id="1" name=""/>
+        <p:cNvGrpSpPr/>
+        <p:nvPr/>
+      </p:nvGrpSpPr>
+      <p:grpSpPr>
+        <a:xfrm>
+          <a:off x="0" y="0"/>
+          <a:ext cx="0" cy="0"/>
+          <a:chOff x="0" y="0"/>
+          <a:chExt cx="0" cy="0"/>
+        </a:xfrm>
+      </p:grpSpPr>
+      <p:sp>
+        <p:nvSpPr>
+          <p:cNvPr id="2" name="Slide Image Placeholder 1"/>
+          <p:cNvSpPr>
+            <a:spLocks noGrp="1"/>
+          </p:cNvSpPr>
+          <p:nvPr>
+            <p:ph type="sldImg" idx="2"/>
+          </p:nvPr>
+        </p:nvSpPr>
+        <p:spPr/>
+      </p:sp>
+      <p:sp>
+        <p:nvSpPr>
+          <p:cNvPr id="3" name="Notes Placeholder 2"/>
+          <p:cNvSpPr>
+            <a:spLocks noGrp="1"/>
+          </p:cNvSpPr>
+          <p:nvPr>
+            <p:ph type="body" idx="3" sz="quarter"/>
+          </p:nvPr>
+        </p:nvSpPr>
+        <p:spPr/>
+        <p:txBody>
+          <a:bodyPr/>
+          <a:lstStyle/>
+          <a:p>
+            <a:r>
+              <a:t>If you want more: this page and the next three are hidden and skipped when you present.</a:t>
             </a:r>
           </a:p>
         </p:txBody>
@@ -4307,7 +4378,7 @@
                 </a:solidFill>
                 <a:latin typeface="Inter Tight"/>
               </a:rPr>
-              <a:t>TEACHER PAGE  ·  skipped when you present  ·  Lesson plan</a:t>
+              <a:t>TEACHER PAGE  ·  skipped when you present  ·  Before you start</a:t>
             </a:r>
           </a:p>
         </p:txBody>
@@ -4398,8 +4469,8 @@
         </p:nvSpPr>
         <p:spPr>
           <a:xfrm>
-            <a:off x="548640" y="1828800"/>
-            <a:ext cx="5120640" cy="4389120"/>
+            <a:off x="548640" y="2011680"/>
+            <a:ext cx="11064240" cy="4206240"/>
           </a:xfrm>
           <a:prstGeom prst="rect">
             <a:avLst/>
@@ -4414,43 +4485,43 @@
           <a:p>
             <a:pPr algn="l">
               <a:spcAft>
-                <a:spcPts val="675"/>
-              </a:spcAft>
-            </a:pPr>
-            <a:r>
-              <a:rPr sz="1100" b="1" i="0">
+                <a:spcPts val="810"/>
+              </a:spcAft>
+            </a:pPr>
+            <a:r>
+              <a:rPr sz="1200" b="1" i="0">
                 <a:solidFill>
                   <a:srgbClr val="0B2D5B"/>
                 </a:solidFill>
                 <a:latin typeface="Inter Tight"/>
               </a:rPr>
-              <a:t>GOAL</a:t>
-            </a:r>
-          </a:p>
-          <a:p>
-            <a:pPr algn="l">
-              <a:spcAft>
-                <a:spcPts val="675"/>
-              </a:spcAft>
-            </a:pPr>
-            <a:r>
-              <a:rPr sz="1500" b="0" i="0">
+              <a:t>BEFORE YOU START</a:t>
+            </a:r>
+          </a:p>
+          <a:p>
+            <a:pPr algn="l">
+              <a:spcAft>
+                <a:spcPts val="810"/>
+              </a:spcAft>
+            </a:pPr>
+            <a:r>
+              <a:rPr sz="1800" b="0" i="0">
                 <a:solidFill>
                   <a:srgbClr val="1C1B19"/>
                 </a:solidFill>
                 <a:latin typeface="Source Serif 4"/>
               </a:rPr>
-              <a:t>Students can use the good-news test and the green and red flags to judge a friendship by its pattern over months, recognize the gray areas (talking problems to death, risk with friends watching), and name one way to change a friendship without ending it. Nobody names or describes a real friend out loud.</a:t>
-            </a:r>
-          </a:p>
-          <a:p>
-            <a:pPr algn="l">
-              <a:spcAft>
-                <a:spcPts val="675"/>
-              </a:spcAft>
-            </a:pPr>
-            <a:r>
-              <a:rPr sz="1500" b="0" i="0">
+              <a:t>Students learn to judge a friendship by its pattern over months, using the good-news test and green and red flags, and how to change a friendship without ending it. Bring index cards, keep real friends unnamed since they may be two desks away, and steer away from "toxic" and "cut them off."</a:t>
+            </a:r>
+          </a:p>
+          <a:p>
+            <a:pPr algn="l">
+              <a:spcAft>
+                <a:spcPts val="810"/>
+              </a:spcAft>
+            </a:pPr>
+            <a:r>
+              <a:rPr sz="1800" b="0" i="0">
                 <a:solidFill>
                   <a:srgbClr val="1C1B19"/>
                 </a:solidFill>
@@ -4462,321 +4533,75 @@
           <a:p>
             <a:pPr algn="l">
               <a:spcAft>
-                <a:spcPts val="675"/>
-              </a:spcAft>
-            </a:pPr>
-            <a:r>
-              <a:rPr sz="1100" b="1" i="0">
+                <a:spcPts val="810"/>
+              </a:spcAft>
+            </a:pPr>
+            <a:r>
+              <a:rPr sz="1200" b="1" i="0">
                 <a:solidFill>
                   <a:srgbClr val="0B2D5B"/>
                 </a:solidFill>
                 <a:latin typeface="Inter Tight"/>
               </a:rPr>
-              <a:t>MATERIALS</a:t>
-            </a:r>
-          </a:p>
-          <a:p>
-            <a:pPr algn="l">
-              <a:spcAft>
-                <a:spcPts val="675"/>
-              </a:spcAft>
-            </a:pPr>
-            <a:r>
-              <a:rPr sz="1500" b="0" i="0">
+              <a:t>EVERY STUDENT IN THE ROOM</a:t>
+            </a:r>
+          </a:p>
+          <a:p>
+            <a:pPr algn="l">
+              <a:spcAft>
+                <a:spcPts val="810"/>
+              </a:spcAft>
+            </a:pPr>
+            <a:r>
+              <a:rPr sz="1800" b="0" i="0">
                 <a:solidFill>
                   <a:srgbClr val="1C1B19"/>
                 </a:solidFill>
                 <a:latin typeface="Source Serif 4"/>
               </a:rPr>
-              <a:t>Index cards for the private flag check and the exit card</a:t>
-            </a:r>
-          </a:p>
-          <a:p>
-            <a:pPr algn="l">
-              <a:spcAft>
-                <a:spcPts val="675"/>
-              </a:spcAft>
-            </a:pPr>
-            <a:r>
-              <a:rPr sz="1500" b="0" i="0">
+              <a:t>When the Imani card comes up, treat accent jokes as a real red flag, and say "an adult you trust" since a parent or older sibling isn't there for everyone.</a:t>
+            </a:r>
+          </a:p>
+          <a:p>
+            <a:pPr algn="l">
+              <a:spcAft>
+                <a:spcPts val="810"/>
+              </a:spcAft>
+            </a:pPr>
+            <a:r>
+              <a:rPr sz="1800" b="0" i="0">
                 <a:solidFill>
                   <a:srgbClr val="1C1B19"/>
                 </a:solidFill>
                 <a:latin typeface="Source Serif 4"/>
               </a:rPr>
-              <a:t>Small slips with a piece of "good news" for the pair practice (or let students make one up)</a:t>
-            </a:r>
-          </a:p>
-          <a:p>
-            <a:pPr algn="l">
-              <a:spcAft>
-                <a:spcPts val="675"/>
-              </a:spcAft>
-            </a:pPr>
-            <a:r>
-              <a:rPr sz="1500" b="0" i="0">
-                <a:solidFill>
-                  <a:srgbClr val="1C1B19"/>
-                </a:solidFill>
-                <a:latin typeface="Source Serif 4"/>
-              </a:rPr>
-              <a:t>The take-home link (last slide) to share after class</a:t>
-            </a:r>
-          </a:p>
-        </p:txBody>
-      </p:sp>
-      <p:sp>
-        <p:nvSpPr>
-          <p:cNvPr id="7" name="TextBox 6"/>
-          <p:cNvSpPr txBox="1"/>
-          <p:nvPr/>
-        </p:nvSpPr>
-        <p:spPr>
-          <a:xfrm>
-            <a:off x="6126480" y="1828800"/>
-            <a:ext cx="5486400" cy="4389120"/>
-          </a:xfrm>
-          <a:prstGeom prst="rect">
-            <a:avLst/>
-          </a:prstGeom>
-          <a:noFill/>
-        </p:spPr>
-        <p:txBody>
-          <a:bodyPr wrap="square" anchor="t" lIns="0" rIns="0" tIns="0" bIns="0">
-            <a:spAutoFit/>
-          </a:bodyPr>
-          <a:lstStyle/>
-          <a:p>
-            <a:pPr algn="l">
-              <a:spcAft>
-                <a:spcPts val="630"/>
-              </a:spcAft>
-            </a:pPr>
-            <a:r>
-              <a:rPr sz="1100" b="1" i="0">
+              <a:t/>
+            </a:r>
+          </a:p>
+          <a:p>
+            <a:pPr algn="l">
+              <a:spcAft>
+                <a:spcPts val="810"/>
+              </a:spcAft>
+            </a:pPr>
+            <a:r>
+              <a:rPr sz="1200" b="1" i="0">
                 <a:solidFill>
                   <a:srgbClr val="0B2D5B"/>
                 </a:solidFill>
                 <a:latin typeface="Inter Tight"/>
               </a:rPr>
-              <a:t>FLOW</a:t>
-            </a:r>
-          </a:p>
-          <a:p>
-            <a:pPr algn="l">
-              <a:spcAft>
-                <a:spcPts val="630"/>
-              </a:spcAft>
-            </a:pPr>
-            <a:r>
-              <a:rPr sz="1300" b="1" i="0">
-                <a:solidFill>
-                  <a:srgbClr val="F47B20"/>
-                </a:solidFill>
-                <a:latin typeface="Inter Tight"/>
-              </a:rPr>
-              <a:t>5 min   </a:t>
-            </a:r>
-            <a:r>
-              <a:rPr sz="1400" b="0" i="0">
-                <a:solidFill>
-                  <a:srgbClr val="1C1B19"/>
-                </a:solidFill>
-                <a:latin typeface="Source Serif 4"/>
-              </a:rPr>
-              <a:t>Myth or fact (stand up, sit down)</a:t>
-            </a:r>
-          </a:p>
-          <a:p>
-            <a:pPr algn="l">
-              <a:spcAft>
-                <a:spcPts val="630"/>
-              </a:spcAft>
-            </a:pPr>
-            <a:r>
-              <a:rPr sz="1300" b="1" i="0">
-                <a:solidFill>
-                  <a:srgbClr val="F47B20"/>
-                </a:solidFill>
-                <a:latin typeface="Inter Tight"/>
-              </a:rPr>
-              <a:t>8 min   </a:t>
-            </a:r>
-            <a:r>
-              <a:rPr sz="1400" b="0" i="0">
-                <a:solidFill>
-                  <a:srgbClr val="1C1B19"/>
-                </a:solidFill>
-                <a:latin typeface="Source Serif 4"/>
-              </a:rPr>
-              <a:t>The good-news test (pair practice)</a:t>
-            </a:r>
-          </a:p>
-          <a:p>
-            <a:pPr algn="l">
-              <a:spcAft>
-                <a:spcPts val="630"/>
-              </a:spcAft>
-            </a:pPr>
-            <a:r>
-              <a:rPr sz="1300" b="1" i="0">
-                <a:solidFill>
-                  <a:srgbClr val="F47B20"/>
-                </a:solidFill>
-                <a:latin typeface="Inter Tight"/>
-              </a:rPr>
-              <a:t>7 min   </a:t>
-            </a:r>
-            <a:r>
-              <a:rPr sz="1400" b="0" i="0">
-                <a:solidFill>
-                  <a:srgbClr val="1C1B19"/>
-                </a:solidFill>
-                <a:latin typeface="Source Serif 4"/>
-              </a:rPr>
-              <a:t>Gray areas and patterns that wear you down</a:t>
-            </a:r>
-          </a:p>
-          <a:p>
-            <a:pPr algn="l">
-              <a:spcAft>
-                <a:spcPts val="630"/>
-              </a:spcAft>
-            </a:pPr>
-            <a:r>
-              <a:rPr sz="1300" b="1" i="0">
-                <a:solidFill>
-                  <a:srgbClr val="F47B20"/>
-                </a:solidFill>
-                <a:latin typeface="Inter Tight"/>
-              </a:rPr>
-              <a:t>7 min   </a:t>
-            </a:r>
-            <a:r>
-              <a:rPr sz="1400" b="0" i="0">
-                <a:solidFill>
-                  <a:srgbClr val="1C1B19"/>
-                </a:solidFill>
-                <a:latin typeface="Source Serif 4"/>
-              </a:rPr>
-              <a:t>Green flags, red flags (private card)</a:t>
-            </a:r>
-          </a:p>
-          <a:p>
-            <a:pPr algn="l">
-              <a:spcAft>
-                <a:spcPts val="630"/>
-              </a:spcAft>
-            </a:pPr>
-            <a:r>
-              <a:rPr sz="1300" b="1" i="0">
-                <a:solidFill>
-                  <a:srgbClr val="F47B20"/>
-                </a:solidFill>
-                <a:latin typeface="Inter Tight"/>
-              </a:rPr>
-              <a:t>10 min   </a:t>
-            </a:r>
-            <a:r>
-              <a:rPr sz="1400" b="0" i="0">
-                <a:solidFill>
-                  <a:srgbClr val="1C1B19"/>
-                </a:solidFill>
-                <a:latin typeface="Source Serif 4"/>
-              </a:rPr>
-              <a:t>Green, red, or gray? (small groups)</a:t>
-            </a:r>
-          </a:p>
-          <a:p>
-            <a:pPr algn="l">
-              <a:spcAft>
-                <a:spcPts val="630"/>
-              </a:spcAft>
-            </a:pPr>
-            <a:r>
-              <a:rPr sz="1300" b="1" i="0">
-                <a:solidFill>
-                  <a:srgbClr val="F47B20"/>
-                </a:solidFill>
-                <a:latin typeface="Inter Tight"/>
-              </a:rPr>
-              <a:t>5 min   </a:t>
-            </a:r>
-            <a:r>
-              <a:rPr sz="1400" b="0" i="0">
-                <a:solidFill>
-                  <a:srgbClr val="1C1B19"/>
-                </a:solidFill>
-                <a:latin typeface="Source Serif 4"/>
-              </a:rPr>
-              <a:t>Change it without ending it</a:t>
-            </a:r>
-          </a:p>
-          <a:p>
-            <a:pPr algn="l">
-              <a:spcAft>
-                <a:spcPts val="630"/>
-              </a:spcAft>
-            </a:pPr>
-            <a:r>
-              <a:rPr sz="1300" b="1" i="0">
-                <a:solidFill>
-                  <a:srgbClr val="F47B20"/>
-                </a:solidFill>
-                <a:latin typeface="Inter Tight"/>
-              </a:rPr>
-              <a:t>3 min   </a:t>
-            </a:r>
-            <a:r>
-              <a:rPr sz="1400" b="0" i="0">
-                <a:solidFill>
-                  <a:srgbClr val="1C1B19"/>
-                </a:solidFill>
-                <a:latin typeface="Source Serif 4"/>
-              </a:rPr>
-              <a:t>Exit card and take-home link</a:t>
-            </a:r>
-          </a:p>
-          <a:p>
-            <a:pPr algn="l">
-              <a:spcAft>
-                <a:spcPts val="630"/>
-              </a:spcAft>
-            </a:pPr>
-            <a:r>
-              <a:rPr sz="1400" b="0" i="0">
-                <a:solidFill>
-                  <a:srgbClr val="1C1B19"/>
-                </a:solidFill>
-                <a:latin typeface="Source Serif 4"/>
-              </a:rPr>
-              <a:t/>
-            </a:r>
-          </a:p>
-          <a:p>
-            <a:pPr algn="l">
-              <a:spcAft>
-                <a:spcPts val="630"/>
-              </a:spcAft>
-            </a:pPr>
-            <a:r>
-              <a:rPr sz="1100" b="1" i="0">
-                <a:solidFill>
-                  <a:srgbClr val="0B2D5B"/>
-                </a:solidFill>
-                <a:latin typeface="Inter Tight"/>
-              </a:rPr>
               <a:t>SHORT ON TIME (20-MINUTE ADVISORY)</a:t>
             </a:r>
           </a:p>
           <a:p>
             <a:pPr algn="l">
               <a:spcAft>
-                <a:spcPts val="630"/>
-              </a:spcAft>
-            </a:pPr>
-            <a:r>
-              <a:rPr sz="1400" b="0" i="0">
+                <a:spcPts val="810"/>
+              </a:spcAft>
+            </a:pPr>
+            <a:r>
+              <a:rPr sz="1800" b="0" i="0">
                 <a:solidFill>
                   <a:srgbClr val="1C1B19"/>
                 </a:solidFill>
@@ -4891,7 +4716,7 @@
                 </a:solidFill>
                 <a:latin typeface="Inter Tight"/>
               </a:rPr>
-              <a:t>GRAY AREAS</a:t>
+              <a:t>WHAT HELPS</a:t>
             </a:r>
           </a:p>
         </p:txBody>
@@ -4969,7 +4794,7 @@
                 </a:solidFill>
                 <a:latin typeface="Source Serif 4"/>
               </a:rPr>
-              <a:t>Close isn't automatically healthy.</a:t>
+              <a:t>Change a friendship without ending it.</a:t>
             </a:r>
           </a:p>
         </p:txBody>
@@ -4982,8 +4807,8 @@
         </p:nvSpPr>
         <p:spPr>
           <a:xfrm>
-            <a:off x="822960" y="2194560"/>
-            <a:ext cx="548640" cy="1005840"/>
+            <a:off x="822960" y="2057400"/>
+            <a:ext cx="548640" cy="804672"/>
           </a:xfrm>
           <a:prstGeom prst="rect">
             <a:avLst/>
@@ -5021,8 +4846,8 @@
         </p:nvSpPr>
         <p:spPr>
           <a:xfrm>
-            <a:off x="1463040" y="2231136"/>
-            <a:ext cx="9875520" cy="1005840"/>
+            <a:off x="1463040" y="2093976"/>
+            <a:ext cx="9875520" cy="804672"/>
           </a:xfrm>
           <a:prstGeom prst="rect">
             <a:avLst/>
@@ -5047,7 +4872,7 @@
                 </a:solidFill>
                 <a:latin typeface="Source Serif 4"/>
               </a:rPr>
-              <a:t>Talking it to death.</a:t>
+              <a:t>Say it once, clearly.</a:t>
             </a:r>
           </a:p>
           <a:p>
@@ -5063,7 +4888,7 @@
                 </a:solidFill>
                 <a:latin typeface="Source Serif 4"/>
               </a:rPr>
-              <a:t>Same problem, every night. Closer and more anxious.</a:t>
+              <a:t>"When you joke about my grades, it gets to me."</a:t>
             </a:r>
           </a:p>
         </p:txBody>
@@ -5076,8 +4901,8 @@
         </p:nvSpPr>
         <p:spPr>
           <a:xfrm>
-            <a:off x="822960" y="3200400"/>
-            <a:ext cx="548640" cy="1005840"/>
+            <a:off x="822960" y="2862072"/>
+            <a:ext cx="548640" cy="804672"/>
           </a:xfrm>
           <a:prstGeom prst="rect">
             <a:avLst/>
@@ -5115,8 +4940,8 @@
         </p:nvSpPr>
         <p:spPr>
           <a:xfrm>
-            <a:off x="1463040" y="3236976"/>
-            <a:ext cx="9875520" cy="1005840"/>
+            <a:off x="1463040" y="2898648"/>
+            <a:ext cx="9875520" cy="804672"/>
           </a:xfrm>
           <a:prstGeom prst="rect">
             <a:avLst/>
@@ -5141,7 +4966,7 @@
                 </a:solidFill>
                 <a:latin typeface="Source Serif 4"/>
               </a:rPr>
-              <a:t>The rollercoaster.</a:t>
+              <a:t>Set a boundary you control.</a:t>
             </a:r>
           </a:p>
           <a:p>
@@ -5157,7 +4982,7 @@
                 </a:solidFill>
                 <a:latin typeface="Source Serif 4"/>
               </a:rPr>
-              <a:t>Warm one week, cold the next. You keep earning it back.</a:t>
+              <a:t>What you'll do: "I'm turning location off."</a:t>
             </a:r>
           </a:p>
         </p:txBody>
@@ -5170,8 +4995,8 @@
         </p:nvSpPr>
         <p:spPr>
           <a:xfrm>
-            <a:off x="822960" y="4206240"/>
-            <a:ext cx="548640" cy="1005840"/>
+            <a:off x="822960" y="3666744"/>
+            <a:ext cx="548640" cy="804672"/>
           </a:xfrm>
           <a:prstGeom prst="rect">
             <a:avLst/>
@@ -5209,8 +5034,8 @@
         </p:nvSpPr>
         <p:spPr>
           <a:xfrm>
-            <a:off x="1463040" y="4242816"/>
-            <a:ext cx="9875520" cy="1005840"/>
+            <a:off x="1463040" y="3703320"/>
+            <a:ext cx="9875520" cy="804672"/>
           </a:xfrm>
           <a:prstGeom prst="rect">
             <a:avLst/>
@@ -5235,7 +5060,7 @@
                 </a:solidFill>
                 <a:latin typeface="Source Serif 4"/>
               </a:rPr>
-              <a:t>The put-down.</a:t>
+              <a:t>Change the loop.</a:t>
             </a:r>
           </a:p>
           <a:p>
@@ -5251,7 +5076,7 @@
                 </a:solidFill>
                 <a:latin typeface="Source Serif 4"/>
               </a:rPr>
-              <a:t>Same sore spots, then "relax, it's a joke."</a:t>
+              <a:t>"Ten minutes on it, then let's go do something."</a:t>
             </a:r>
           </a:p>
         </p:txBody>
@@ -5264,8 +5089,8 @@
         </p:nvSpPr>
         <p:spPr>
           <a:xfrm>
-            <a:off x="822960" y="5212080"/>
-            <a:ext cx="548640" cy="1005840"/>
+            <a:off x="822960" y="4471416"/>
+            <a:ext cx="548640" cy="804672"/>
           </a:xfrm>
           <a:prstGeom prst="rect">
             <a:avLst/>
@@ -5303,8 +5128,8 @@
         </p:nvSpPr>
         <p:spPr>
           <a:xfrm>
-            <a:off x="1463040" y="5248656"/>
-            <a:ext cx="9875520" cy="1005840"/>
+            <a:off x="1463040" y="4507992"/>
+            <a:ext cx="9875520" cy="804672"/>
           </a:xfrm>
           <a:prstGeom prst="rect">
             <a:avLst/>
@@ -5329,7 +5154,7 @@
                 </a:solidFill>
                 <a:latin typeface="Source Serif 4"/>
               </a:rPr>
-              <a:t>The controller.</a:t>
+              <a:t>Turn the volume down.</a:t>
             </a:r>
           </a:p>
           <a:p>
@@ -5345,7 +5170,101 @@
                 </a:solidFill>
                 <a:latin typeface="Source Serif 4"/>
               </a:rPr>
-              <a:t>Jealous of other friends, tracks you, holds screenshots.</a:t>
+              <a:t>See them less, share less.</a:t>
+            </a:r>
+          </a:p>
+        </p:txBody>
+      </p:sp>
+      <p:sp>
+        <p:nvSpPr>
+          <p:cNvPr id="14" name="TextBox 13"/>
+          <p:cNvSpPr txBox="1"/>
+          <p:nvPr/>
+        </p:nvSpPr>
+        <p:spPr>
+          <a:xfrm>
+            <a:off x="822960" y="5276088"/>
+            <a:ext cx="548640" cy="804672"/>
+          </a:xfrm>
+          <a:prstGeom prst="rect">
+            <a:avLst/>
+          </a:prstGeom>
+          <a:noFill/>
+        </p:spPr>
+        <p:txBody>
+          <a:bodyPr wrap="square" anchor="t" lIns="0" rIns="0" tIns="0" bIns="0">
+            <a:spAutoFit/>
+          </a:bodyPr>
+          <a:lstStyle/>
+          <a:p>
+            <a:pPr algn="l">
+              <a:spcAft>
+                <a:spcPts val="1170"/>
+              </a:spcAft>
+            </a:pPr>
+            <a:r>
+              <a:rPr sz="2600" b="1" i="0">
+                <a:solidFill>
+                  <a:srgbClr val="F47B20"/>
+                </a:solidFill>
+                <a:latin typeface="Source Serif 4"/>
+              </a:rPr>
+              <a:t>5</a:t>
+            </a:r>
+          </a:p>
+        </p:txBody>
+      </p:sp>
+      <p:sp>
+        <p:nvSpPr>
+          <p:cNvPr id="15" name="TextBox 14"/>
+          <p:cNvSpPr txBox="1"/>
+          <p:nvPr/>
+        </p:nvSpPr>
+        <p:spPr>
+          <a:xfrm>
+            <a:off x="1463040" y="5312664"/>
+            <a:ext cx="9875520" cy="804672"/>
+          </a:xfrm>
+          <a:prstGeom prst="rect">
+            <a:avLst/>
+          </a:prstGeom>
+          <a:noFill/>
+        </p:spPr>
+        <p:txBody>
+          <a:bodyPr wrap="square" anchor="t" lIns="0" rIns="0" tIns="0" bIns="0">
+            <a:spAutoFit/>
+          </a:bodyPr>
+          <a:lstStyle/>
+          <a:p>
+            <a:pPr algn="l">
+              <a:spcAft>
+                <a:spcPts val="945"/>
+              </a:spcAft>
+            </a:pPr>
+            <a:r>
+              <a:rPr sz="2100" b="1" i="0">
+                <a:solidFill>
+                  <a:srgbClr val="1C1B19"/>
+                </a:solidFill>
+                <a:latin typeface="Source Serif 4"/>
+              </a:rPr>
+              <a:t>Get an outside view.</a:t>
+            </a:r>
+          </a:p>
+          <a:p>
+            <a:pPr algn="l">
+              <a:spcAft>
+                <a:spcPts val="945"/>
+              </a:spcAft>
+            </a:pPr>
+            <a:r>
+              <a:rPr sz="1600" b="0" i="0">
+                <a:solidFill>
+                  <a:srgbClr val="5D5A54"/>
+                </a:solidFill>
+                <a:latin typeface="Source Serif 4"/>
+              </a:rPr>
+              <a:t>An adult you trust, or a friend outside the group.</a:t>
             </a:r>
           </a:p>
         </p:txBody>
@@ -5454,7 +5373,7 @@
                 </a:solidFill>
                 <a:latin typeface="Inter Tight"/>
               </a:rPr>
-              <a:t>PRIVATE FLAG CHECK</a:t>
+              <a:t>BEFORE YOU GO</a:t>
             </a:r>
           </a:p>
         </p:txBody>
@@ -5506,7 +5425,7 @@
         </p:nvSpPr>
         <p:spPr>
           <a:xfrm>
-            <a:off x="822960" y="1005840"/>
+            <a:off x="822960" y="1188720"/>
             <a:ext cx="10515600" cy="914400"/>
           </a:xfrm>
           <a:prstGeom prst="rect">
@@ -5522,31 +5441,70 @@
           <a:p>
             <a:pPr algn="l">
               <a:spcAft>
-                <a:spcPts val="1530"/>
-              </a:spcAft>
-            </a:pPr>
-            <a:r>
-              <a:rPr sz="3400" b="1" i="0">
+                <a:spcPts val="1620"/>
+              </a:spcAft>
+            </a:pPr>
+            <a:r>
+              <a:rPr sz="3600" b="1" i="0">
                 <a:solidFill>
                   <a:srgbClr val="1C1B19"/>
                 </a:solidFill>
                 <a:latin typeface="Source Serif 4"/>
               </a:rPr>
-              <a:t>Think of one friend over the last few months.</a:t>
-            </a:r>
-          </a:p>
-        </p:txBody>
-      </p:sp>
-      <p:sp>
-        <p:nvSpPr>
-          <p:cNvPr id="6" name="Rectangle 5"/>
+              <a:t>Exit card</a:t>
+            </a:r>
+          </a:p>
+        </p:txBody>
+      </p:sp>
+      <p:sp>
+        <p:nvSpPr>
+          <p:cNvPr id="6" name="TextBox 5"/>
+          <p:cNvSpPr txBox="1"/>
+          <p:nvPr/>
+        </p:nvSpPr>
+        <p:spPr>
+          <a:xfrm>
+            <a:off x="822960" y="2286000"/>
+            <a:ext cx="10515600" cy="1463040"/>
+          </a:xfrm>
+          <a:prstGeom prst="rect">
+            <a:avLst/>
+          </a:prstGeom>
+          <a:noFill/>
+        </p:spPr>
+        <p:txBody>
+          <a:bodyPr wrap="square" anchor="t" lIns="0" rIns="0" tIns="0" bIns="0">
+            <a:spAutoFit/>
+          </a:bodyPr>
+          <a:lstStyle/>
+          <a:p>
+            <a:pPr algn="l">
+              <a:spcAft>
+                <a:spcPts val="1080"/>
+              </a:spcAft>
+            </a:pPr>
+            <a:r>
+              <a:rPr sz="2400" b="0" i="0">
+                <a:solidFill>
+                  <a:srgbClr val="1C1B19"/>
+                </a:solidFill>
+                <a:latin typeface="Source Serif 4"/>
+              </a:rPr>
+              <a:t>One thing you'll say, or one boundary you'll set. Or: one friend you'll pass the good-news test for this week.</a:t>
+            </a:r>
+          </a:p>
+        </p:txBody>
+      </p:sp>
+      <p:sp>
+        <p:nvSpPr>
+          <p:cNvPr id="7" name="Rectangle 6"/>
           <p:cNvSpPr/>
           <p:nvPr/>
         </p:nvSpPr>
         <p:spPr>
           <a:xfrm>
-            <a:off x="822960" y="2103120"/>
-            <a:ext cx="5120640" cy="3931920"/>
+            <a:off x="822960" y="4023360"/>
+            <a:ext cx="10515600" cy="1371600"/>
           </a:xfrm>
           <a:prstGeom prst="rect">
             <a:avLst/>
@@ -5556,7 +5514,7 @@
           </a:solidFill>
           <a:ln w="15875">
             <a:solidFill>
-              <a:srgbClr val="D8D2C6"/>
+              <a:srgbClr val="1C1B19"/>
             </a:solidFill>
           </a:ln>
           <a:effectLst/>
@@ -5585,14 +5543,14 @@
       </p:sp>
       <p:sp>
         <p:nvSpPr>
-          <p:cNvPr id="7" name="TextBox 6"/>
+          <p:cNvPr id="8" name="TextBox 7"/>
           <p:cNvSpPr txBox="1"/>
           <p:nvPr/>
         </p:nvSpPr>
         <p:spPr>
           <a:xfrm>
-            <a:off x="1097280" y="2286000"/>
-            <a:ext cx="4572000" cy="457200"/>
+            <a:off x="1097280" y="4206240"/>
+            <a:ext cx="10058400" cy="365760"/>
           </a:xfrm>
           <a:prstGeom prst="rect">
             <a:avLst/>
@@ -5607,31 +5565,31 @@
           <a:p>
             <a:pPr algn="l">
               <a:spcAft>
-                <a:spcPts val="585"/>
-              </a:spcAft>
-            </a:pPr>
-            <a:r>
-              <a:rPr sz="1300" b="1" i="0">
+                <a:spcPts val="540"/>
+              </a:spcAft>
+            </a:pPr>
+            <a:r>
+              <a:rPr sz="1200" b="1" i="0">
                 <a:solidFill>
                   <a:srgbClr val="0B2D5B"/>
                 </a:solidFill>
                 <a:latin typeface="Inter Tight"/>
               </a:rPr>
-              <a:t>GREEN FLAGS</a:t>
-            </a:r>
-          </a:p>
-        </p:txBody>
-      </p:sp>
-      <p:sp>
-        <p:nvSpPr>
-          <p:cNvPr id="8" name="TextBox 7"/>
+              <a:t>ON THE BVR DINER MENU</a:t>
+            </a:r>
+          </a:p>
+        </p:txBody>
+      </p:sp>
+      <p:sp>
+        <p:nvSpPr>
+          <p:cNvPr id="9" name="TextBox 8"/>
           <p:cNvSpPr txBox="1"/>
           <p:nvPr/>
         </p:nvSpPr>
         <p:spPr>
           <a:xfrm>
-            <a:off x="1097280" y="2788920"/>
-            <a:ext cx="4572000" cy="3108960"/>
+            <a:off x="1097280" y="4617720"/>
+            <a:ext cx="10058400" cy="640080"/>
           </a:xfrm>
           <a:prstGeom prst="rect">
             <a:avLst/>
@@ -5646,90 +5604,66 @@
           <a:p>
             <a:pPr algn="l">
               <a:spcAft>
-                <a:spcPts val="855"/>
-              </a:spcAft>
-            </a:pPr>
-            <a:r>
-              <a:rPr sz="1900" b="0" i="0">
+                <a:spcPts val="900"/>
+              </a:spcAft>
+            </a:pPr>
+            <a:r>
+              <a:rPr sz="2000" b="0" i="0">
                 <a:solidFill>
                   <a:srgbClr val="1C1B19"/>
                 </a:solidFill>
-                <a:latin typeface="Source Serif 4"/>
-              </a:rPr>
-              <a:t>I can be myself with them</a:t>
-            </a:r>
-          </a:p>
-          <a:p>
-            <a:pPr algn="l">
-              <a:spcAft>
-                <a:spcPts val="855"/>
-              </a:spcAft>
-            </a:pPr>
-            <a:r>
-              <a:rPr sz="1900" b="0" i="0">
-                <a:solidFill>
-                  <a:srgbClr val="1C1B19"/>
-                </a:solidFill>
-                <a:latin typeface="Source Serif 4"/>
-              </a:rPr>
-              <a:t>Glad for my good news, and they ask</a:t>
-            </a:r>
-          </a:p>
-          <a:p>
-            <a:pPr algn="l">
-              <a:spcAft>
-                <a:spcPts val="855"/>
-              </a:spcAft>
-            </a:pPr>
-            <a:r>
-              <a:rPr sz="1900" b="0" i="0">
-                <a:solidFill>
-                  <a:srgbClr val="1C1B19"/>
-                </a:solidFill>
-                <a:latin typeface="Source Serif 4"/>
-              </a:rPr>
-              <a:t>We disagree and are fine the next day</a:t>
-            </a:r>
-          </a:p>
-          <a:p>
-            <a:pPr algn="l">
-              <a:spcAft>
-                <a:spcPts val="855"/>
-              </a:spcAft>
-            </a:pPr>
-            <a:r>
-              <a:rPr sz="1900" b="0" i="0">
-                <a:solidFill>
-                  <a:srgbClr val="1C1B19"/>
-                </a:solidFill>
-                <a:latin typeface="Source Serif 4"/>
-              </a:rPr>
-              <a:t>When they mess up, something changes</a:t>
-            </a:r>
-          </a:p>
-        </p:txBody>
-      </p:sp>
-      <p:sp>
-        <p:nvSpPr>
-          <p:cNvPr id="9" name="Rectangle 8"/>
+                <a:latin typeface="Inter Tight"/>
+              </a:rPr>
+              <a:t>https://rmwtoolkit.github.io/bcds-toolkit/is-this-a-good-friend-high-school.html</a:t>
+            </a:r>
+          </a:p>
+        </p:txBody>
+      </p:sp>
+    </p:spTree>
+  </p:cSld>
+  <p:clrMapOvr>
+    <a:masterClrMapping/>
+  </p:clrMapOvr>
+</p:sld>
+</file>
+
+<file path=ppt/slides/slide12.xml><?xml version="1.0" encoding="utf-8"?>
+<p:sld xmlns:a="http://schemas.openxmlformats.org/drawingml/2006/main" xmlns:p="http://schemas.openxmlformats.org/presentationml/2006/main" xmlns:r="http://schemas.openxmlformats.org/officeDocument/2006/relationships" show="0">
+  <p:cSld>
+    <p:bg>
+      <p:bgPr>
+        <a:solidFill>
+          <a:srgbClr val="EEEBE4"/>
+        </a:solidFill>
+        <a:effectLst/>
+      </p:bgPr>
+    </p:bg>
+    <p:spTree>
+      <p:nvGrpSpPr>
+        <p:cNvPr id="1" name=""/>
+        <p:cNvGrpSpPr/>
+        <p:nvPr/>
+      </p:nvGrpSpPr>
+      <p:grpSpPr/>
+      <p:sp>
+        <p:nvSpPr>
+          <p:cNvPr id="2" name="Rectangle 1"/>
           <p:cNvSpPr/>
           <p:nvPr/>
         </p:nvSpPr>
         <p:spPr>
           <a:xfrm>
-            <a:off x="6309360" y="2103120"/>
-            <a:ext cx="5120640" cy="3931920"/>
+            <a:off x="0" y="0"/>
+            <a:ext cx="12191695" cy="384048"/>
           </a:xfrm>
           <a:prstGeom prst="rect">
             <a:avLst/>
           </a:prstGeom>
           <a:solidFill>
-            <a:srgbClr val="FFFFFF"/>
+            <a:srgbClr val="0B2D5B"/>
           </a:solidFill>
-          <a:ln w="15875">
-            <a:solidFill>
-              <a:srgbClr val="D8D2C6"/>
-            </a:solidFill>
+          <a:ln>
+            <a:noFill/>
           </a:ln>
           <a:effectLst/>
         </p:spPr>
@@ -5757,14 +5691,14 @@
       </p:sp>
       <p:sp>
         <p:nvSpPr>
-          <p:cNvPr id="10" name="TextBox 9"/>
+          <p:cNvPr id="3" name="TextBox 2"/>
           <p:cNvSpPr txBox="1"/>
           <p:nvPr/>
         </p:nvSpPr>
         <p:spPr>
           <a:xfrm>
-            <a:off x="6583680" y="2286000"/>
-            <a:ext cx="4572000" cy="457200"/>
+            <a:off x="548640" y="100584"/>
+            <a:ext cx="10972800" cy="274320"/>
           </a:xfrm>
           <a:prstGeom prst="rect">
             <a:avLst/>
@@ -5779,31 +5713,31 @@
           <a:p>
             <a:pPr algn="l">
               <a:spcAft>
-                <a:spcPts val="585"/>
-              </a:spcAft>
-            </a:pPr>
-            <a:r>
-              <a:rPr sz="1300" b="1" i="0">
-                <a:solidFill>
-                  <a:srgbClr val="0B2D5B"/>
+                <a:spcPts val="495"/>
+              </a:spcAft>
+            </a:pPr>
+            <a:r>
+              <a:rPr sz="1100" b="1" i="0">
+                <a:solidFill>
+                  <a:srgbClr val="FFFFFF"/>
                 </a:solidFill>
                 <a:latin typeface="Inter Tight"/>
               </a:rPr>
-              <a:t>RED FLAGS</a:t>
-            </a:r>
-          </a:p>
-        </p:txBody>
-      </p:sp>
-      <p:sp>
-        <p:nvSpPr>
-          <p:cNvPr id="11" name="TextBox 10"/>
+              <a:t>TEACHER PAGE  ·  skipped when you present  ·  Lesson plan</a:t>
+            </a:r>
+          </a:p>
+        </p:txBody>
+      </p:sp>
+      <p:sp>
+        <p:nvSpPr>
+          <p:cNvPr id="4" name="TextBox 3"/>
           <p:cNvSpPr txBox="1"/>
           <p:nvPr/>
         </p:nvSpPr>
         <p:spPr>
           <a:xfrm>
-            <a:off x="6583680" y="2788920"/>
-            <a:ext cx="4572000" cy="3108960"/>
+            <a:off x="548640" y="685800"/>
+            <a:ext cx="10972800" cy="731520"/>
           </a:xfrm>
           <a:prstGeom prst="rect">
             <a:avLst/>
@@ -5818,65 +5752,453 @@
           <a:p>
             <a:pPr algn="l">
               <a:spcAft>
-                <a:spcPts val="855"/>
-              </a:spcAft>
-            </a:pPr>
-            <a:r>
-              <a:rPr sz="1900" b="0" i="0">
+                <a:spcPts val="1530"/>
+              </a:spcAft>
+            </a:pPr>
+            <a:r>
+              <a:rPr sz="3400" b="1" i="0">
                 <a:solidFill>
                   <a:srgbClr val="1C1B19"/>
                 </a:solidFill>
                 <a:latin typeface="Source Serif 4"/>
               </a:rPr>
-              <a:t>I feel worse about myself after</a:t>
-            </a:r>
-          </a:p>
-          <a:p>
-            <a:pPr algn="l">
-              <a:spcAft>
-                <a:spcPts val="855"/>
-              </a:spcAft>
-            </a:pPr>
-            <a:r>
-              <a:rPr sz="1900" b="0" i="0">
+              <a:t>Is This a Good Friend?</a:t>
+            </a:r>
+          </a:p>
+        </p:txBody>
+      </p:sp>
+      <p:sp>
+        <p:nvSpPr>
+          <p:cNvPr id="5" name="TextBox 4"/>
+          <p:cNvSpPr txBox="1"/>
+          <p:nvPr/>
+        </p:nvSpPr>
+        <p:spPr>
+          <a:xfrm>
+            <a:off x="548640" y="1325880"/>
+            <a:ext cx="10972800" cy="365760"/>
+          </a:xfrm>
+          <a:prstGeom prst="rect">
+            <a:avLst/>
+          </a:prstGeom>
+          <a:noFill/>
+        </p:spPr>
+        <p:txBody>
+          <a:bodyPr wrap="square" anchor="t" lIns="0" rIns="0" tIns="0" bIns="0">
+            <a:spAutoFit/>
+          </a:bodyPr>
+          <a:lstStyle/>
+          <a:p>
+            <a:pPr algn="l">
+              <a:spcAft>
+                <a:spcPts val="630"/>
+              </a:spcAft>
+            </a:pPr>
+            <a:r>
+              <a:rPr sz="1400" b="0" i="0">
+                <a:solidFill>
+                  <a:srgbClr val="5D5A54"/>
+                </a:solidFill>
+                <a:latin typeface="Inter Tight"/>
+              </a:rPr>
+              <a:t>Upper School  ·  45 minutes (20-minute advisory version below)  ·  9th grade advisory, health class, or a counselor-led group</a:t>
+            </a:r>
+          </a:p>
+        </p:txBody>
+      </p:sp>
+      <p:sp>
+        <p:nvSpPr>
+          <p:cNvPr id="6" name="TextBox 5"/>
+          <p:cNvSpPr txBox="1"/>
+          <p:nvPr/>
+        </p:nvSpPr>
+        <p:spPr>
+          <a:xfrm>
+            <a:off x="548640" y="1828800"/>
+            <a:ext cx="5120640" cy="4389120"/>
+          </a:xfrm>
+          <a:prstGeom prst="rect">
+            <a:avLst/>
+          </a:prstGeom>
+          <a:noFill/>
+        </p:spPr>
+        <p:txBody>
+          <a:bodyPr wrap="square" anchor="t" lIns="0" rIns="0" tIns="0" bIns="0">
+            <a:spAutoFit/>
+          </a:bodyPr>
+          <a:lstStyle/>
+          <a:p>
+            <a:pPr algn="l">
+              <a:spcAft>
+                <a:spcPts val="675"/>
+              </a:spcAft>
+            </a:pPr>
+            <a:r>
+              <a:rPr sz="1100" b="1" i="0">
+                <a:solidFill>
+                  <a:srgbClr val="0B2D5B"/>
+                </a:solidFill>
+                <a:latin typeface="Inter Tight"/>
+              </a:rPr>
+              <a:t>GOAL</a:t>
+            </a:r>
+          </a:p>
+          <a:p>
+            <a:pPr algn="l">
+              <a:spcAft>
+                <a:spcPts val="675"/>
+              </a:spcAft>
+            </a:pPr>
+            <a:r>
+              <a:rPr sz="1500" b="0" i="0">
                 <a:solidFill>
                   <a:srgbClr val="1C1B19"/>
                 </a:solidFill>
                 <a:latin typeface="Source Serif 4"/>
               </a:rPr>
-              <a:t>I edit what I say so they won't get mad</a:t>
-            </a:r>
-          </a:p>
-          <a:p>
-            <a:pPr algn="l">
-              <a:spcAft>
-                <a:spcPts val="855"/>
-              </a:spcAft>
-            </a:pPr>
-            <a:r>
-              <a:rPr sz="1900" b="0" i="0">
+              <a:t>Students can use the good-news test and the green and red flags to judge a friendship by its pattern over months, recognize the gray areas (talking problems to death, risk with friends watching), and name one way to change a friendship without ending it. Nobody names or describes a real friend out loud.</a:t>
+            </a:r>
+          </a:p>
+          <a:p>
+            <a:pPr algn="l">
+              <a:spcAft>
+                <a:spcPts val="675"/>
+              </a:spcAft>
+            </a:pPr>
+            <a:r>
+              <a:rPr sz="1500" b="0" i="0">
                 <a:solidFill>
                   <a:srgbClr val="1C1B19"/>
                 </a:solidFill>
                 <a:latin typeface="Source Serif 4"/>
               </a:rPr>
-              <a:t>Cold when I'm with other friends</a:t>
-            </a:r>
-          </a:p>
-          <a:p>
-            <a:pPr algn="l">
-              <a:spcAft>
-                <a:spcPts val="855"/>
-              </a:spcAft>
-            </a:pPr>
-            <a:r>
-              <a:rPr sz="1900" b="0" i="0">
+              <a:t/>
+            </a:r>
+          </a:p>
+          <a:p>
+            <a:pPr algn="l">
+              <a:spcAft>
+                <a:spcPts val="675"/>
+              </a:spcAft>
+            </a:pPr>
+            <a:r>
+              <a:rPr sz="1100" b="1" i="0">
+                <a:solidFill>
+                  <a:srgbClr val="0B2D5B"/>
+                </a:solidFill>
+                <a:latin typeface="Inter Tight"/>
+              </a:rPr>
+              <a:t>MATERIALS</a:t>
+            </a:r>
+          </a:p>
+          <a:p>
+            <a:pPr algn="l">
+              <a:spcAft>
+                <a:spcPts val="675"/>
+              </a:spcAft>
+            </a:pPr>
+            <a:r>
+              <a:rPr sz="1500" b="0" i="0">
                 <a:solidFill>
                   <a:srgbClr val="1C1B19"/>
                 </a:solidFill>
                 <a:latin typeface="Source Serif 4"/>
               </a:rPr>
-              <a:t>I do things I wouldn't choose alone</a:t>
+              <a:t>Index cards for the private flag check and the exit card</a:t>
+            </a:r>
+          </a:p>
+          <a:p>
+            <a:pPr algn="l">
+              <a:spcAft>
+                <a:spcPts val="675"/>
+              </a:spcAft>
+            </a:pPr>
+            <a:r>
+              <a:rPr sz="1500" b="0" i="0">
+                <a:solidFill>
+                  <a:srgbClr val="1C1B19"/>
+                </a:solidFill>
+                <a:latin typeface="Source Serif 4"/>
+              </a:rPr>
+              <a:t>Small slips with a piece of "good news" for the pair practice (or let students make one up)</a:t>
+            </a:r>
+          </a:p>
+          <a:p>
+            <a:pPr algn="l">
+              <a:spcAft>
+                <a:spcPts val="675"/>
+              </a:spcAft>
+            </a:pPr>
+            <a:r>
+              <a:rPr sz="1500" b="0" i="0">
+                <a:solidFill>
+                  <a:srgbClr val="1C1B19"/>
+                </a:solidFill>
+                <a:latin typeface="Source Serif 4"/>
+              </a:rPr>
+              <a:t>The take-home link (last slide) to share after class</a:t>
+            </a:r>
+          </a:p>
+        </p:txBody>
+      </p:sp>
+      <p:sp>
+        <p:nvSpPr>
+          <p:cNvPr id="7" name="TextBox 6"/>
+          <p:cNvSpPr txBox="1"/>
+          <p:nvPr/>
+        </p:nvSpPr>
+        <p:spPr>
+          <a:xfrm>
+            <a:off x="6126480" y="1828800"/>
+            <a:ext cx="5486400" cy="4389120"/>
+          </a:xfrm>
+          <a:prstGeom prst="rect">
+            <a:avLst/>
+          </a:prstGeom>
+          <a:noFill/>
+        </p:spPr>
+        <p:txBody>
+          <a:bodyPr wrap="square" anchor="t" lIns="0" rIns="0" tIns="0" bIns="0">
+            <a:spAutoFit/>
+          </a:bodyPr>
+          <a:lstStyle/>
+          <a:p>
+            <a:pPr algn="l">
+              <a:spcAft>
+                <a:spcPts val="630"/>
+              </a:spcAft>
+            </a:pPr>
+            <a:r>
+              <a:rPr sz="1100" b="1" i="0">
+                <a:solidFill>
+                  <a:srgbClr val="0B2D5B"/>
+                </a:solidFill>
+                <a:latin typeface="Inter Tight"/>
+              </a:rPr>
+              <a:t>FLOW</a:t>
+            </a:r>
+          </a:p>
+          <a:p>
+            <a:pPr algn="l">
+              <a:spcAft>
+                <a:spcPts val="630"/>
+              </a:spcAft>
+            </a:pPr>
+            <a:r>
+              <a:rPr sz="1300" b="1" i="0">
+                <a:solidFill>
+                  <a:srgbClr val="F47B20"/>
+                </a:solidFill>
+                <a:latin typeface="Inter Tight"/>
+              </a:rPr>
+              <a:t>5 min   </a:t>
+            </a:r>
+            <a:r>
+              <a:rPr sz="1400" b="0" i="0">
+                <a:solidFill>
+                  <a:srgbClr val="1C1B19"/>
+                </a:solidFill>
+                <a:latin typeface="Source Serif 4"/>
+              </a:rPr>
+              <a:t>Myth or fact (stand up, sit down)</a:t>
+            </a:r>
+          </a:p>
+          <a:p>
+            <a:pPr algn="l">
+              <a:spcAft>
+                <a:spcPts val="630"/>
+              </a:spcAft>
+            </a:pPr>
+            <a:r>
+              <a:rPr sz="1300" b="1" i="0">
+                <a:solidFill>
+                  <a:srgbClr val="F47B20"/>
+                </a:solidFill>
+                <a:latin typeface="Inter Tight"/>
+              </a:rPr>
+              <a:t>8 min   </a:t>
+            </a:r>
+            <a:r>
+              <a:rPr sz="1400" b="0" i="0">
+                <a:solidFill>
+                  <a:srgbClr val="1C1B19"/>
+                </a:solidFill>
+                <a:latin typeface="Source Serif 4"/>
+              </a:rPr>
+              <a:t>The good-news test (pair practice)</a:t>
+            </a:r>
+          </a:p>
+          <a:p>
+            <a:pPr algn="l">
+              <a:spcAft>
+                <a:spcPts val="630"/>
+              </a:spcAft>
+            </a:pPr>
+            <a:r>
+              <a:rPr sz="1300" b="1" i="0">
+                <a:solidFill>
+                  <a:srgbClr val="F47B20"/>
+                </a:solidFill>
+                <a:latin typeface="Inter Tight"/>
+              </a:rPr>
+              <a:t>7 min   </a:t>
+            </a:r>
+            <a:r>
+              <a:rPr sz="1400" b="0" i="0">
+                <a:solidFill>
+                  <a:srgbClr val="1C1B19"/>
+                </a:solidFill>
+                <a:latin typeface="Source Serif 4"/>
+              </a:rPr>
+              <a:t>Gray areas and patterns that wear you down</a:t>
+            </a:r>
+          </a:p>
+          <a:p>
+            <a:pPr algn="l">
+              <a:spcAft>
+                <a:spcPts val="630"/>
+              </a:spcAft>
+            </a:pPr>
+            <a:r>
+              <a:rPr sz="1300" b="1" i="0">
+                <a:solidFill>
+                  <a:srgbClr val="F47B20"/>
+                </a:solidFill>
+                <a:latin typeface="Inter Tight"/>
+              </a:rPr>
+              <a:t>7 min   </a:t>
+            </a:r>
+            <a:r>
+              <a:rPr sz="1400" b="0" i="0">
+                <a:solidFill>
+                  <a:srgbClr val="1C1B19"/>
+                </a:solidFill>
+                <a:latin typeface="Source Serif 4"/>
+              </a:rPr>
+              <a:t>Green flags, red flags (private card)</a:t>
+            </a:r>
+          </a:p>
+          <a:p>
+            <a:pPr algn="l">
+              <a:spcAft>
+                <a:spcPts val="630"/>
+              </a:spcAft>
+            </a:pPr>
+            <a:r>
+              <a:rPr sz="1300" b="1" i="0">
+                <a:solidFill>
+                  <a:srgbClr val="F47B20"/>
+                </a:solidFill>
+                <a:latin typeface="Inter Tight"/>
+              </a:rPr>
+              <a:t>10 min   </a:t>
+            </a:r>
+            <a:r>
+              <a:rPr sz="1400" b="0" i="0">
+                <a:solidFill>
+                  <a:srgbClr val="1C1B19"/>
+                </a:solidFill>
+                <a:latin typeface="Source Serif 4"/>
+              </a:rPr>
+              <a:t>Green, red, or gray? (small groups)</a:t>
+            </a:r>
+          </a:p>
+          <a:p>
+            <a:pPr algn="l">
+              <a:spcAft>
+                <a:spcPts val="630"/>
+              </a:spcAft>
+            </a:pPr>
+            <a:r>
+              <a:rPr sz="1300" b="1" i="0">
+                <a:solidFill>
+                  <a:srgbClr val="F47B20"/>
+                </a:solidFill>
+                <a:latin typeface="Inter Tight"/>
+              </a:rPr>
+              <a:t>5 min   </a:t>
+            </a:r>
+            <a:r>
+              <a:rPr sz="1400" b="0" i="0">
+                <a:solidFill>
+                  <a:srgbClr val="1C1B19"/>
+                </a:solidFill>
+                <a:latin typeface="Source Serif 4"/>
+              </a:rPr>
+              <a:t>Change it without ending it</a:t>
+            </a:r>
+          </a:p>
+          <a:p>
+            <a:pPr algn="l">
+              <a:spcAft>
+                <a:spcPts val="630"/>
+              </a:spcAft>
+            </a:pPr>
+            <a:r>
+              <a:rPr sz="1300" b="1" i="0">
+                <a:solidFill>
+                  <a:srgbClr val="F47B20"/>
+                </a:solidFill>
+                <a:latin typeface="Inter Tight"/>
+              </a:rPr>
+              <a:t>3 min   </a:t>
+            </a:r>
+            <a:r>
+              <a:rPr sz="1400" b="0" i="0">
+                <a:solidFill>
+                  <a:srgbClr val="1C1B19"/>
+                </a:solidFill>
+                <a:latin typeface="Source Serif 4"/>
+              </a:rPr>
+              <a:t>Exit card and take-home link</a:t>
+            </a:r>
+          </a:p>
+          <a:p>
+            <a:pPr algn="l">
+              <a:spcAft>
+                <a:spcPts val="630"/>
+              </a:spcAft>
+            </a:pPr>
+            <a:r>
+              <a:rPr sz="1400" b="0" i="0">
+                <a:solidFill>
+                  <a:srgbClr val="1C1B19"/>
+                </a:solidFill>
+                <a:latin typeface="Source Serif 4"/>
+              </a:rPr>
+              <a:t/>
+            </a:r>
+          </a:p>
+          <a:p>
+            <a:pPr algn="l">
+              <a:spcAft>
+                <a:spcPts val="630"/>
+              </a:spcAft>
+            </a:pPr>
+            <a:r>
+              <a:rPr sz="1100" b="1" i="0">
+                <a:solidFill>
+                  <a:srgbClr val="0B2D5B"/>
+                </a:solidFill>
+                <a:latin typeface="Inter Tight"/>
+              </a:rPr>
+              <a:t>SHORT ON TIME (20-MINUTE ADVISORY)</a:t>
+            </a:r>
+          </a:p>
+          <a:p>
+            <a:pPr algn="l">
+              <a:spcAft>
+                <a:spcPts val="630"/>
+              </a:spcAft>
+            </a:pPr>
+            <a:r>
+              <a:rPr sz="1400" b="0" i="0">
+                <a:solidFill>
+                  <a:srgbClr val="1C1B19"/>
+                </a:solidFill>
+                <a:latin typeface="Source Serif 4"/>
+              </a:rPr>
+              <a:t>Myth or fact (5), the good-news test (5), green and red flags (5), one adjust step and the link (5). The take-home sheet has the full flag check and the online moves.</a:t>
             </a:r>
           </a:p>
         </p:txBody>
@@ -5889,7 +6211,1661 @@
 </p:sld>
 </file>
 
-<file path=ppt/slides/slide12.xml><?xml version="1.0" encoding="utf-8"?>
+<file path=ppt/slides/slide13.xml><?xml version="1.0" encoding="utf-8"?>
+<p:sld xmlns:a="http://schemas.openxmlformats.org/drawingml/2006/main" xmlns:p="http://schemas.openxmlformats.org/presentationml/2006/main" xmlns:r="http://schemas.openxmlformats.org/officeDocument/2006/relationships" show="0">
+  <p:cSld>
+    <p:bg>
+      <p:bgPr>
+        <a:solidFill>
+          <a:srgbClr val="EEEBE4"/>
+        </a:solidFill>
+        <a:effectLst/>
+      </p:bgPr>
+    </p:bg>
+    <p:spTree>
+      <p:nvGrpSpPr>
+        <p:cNvPr id="1" name=""/>
+        <p:cNvGrpSpPr/>
+        <p:nvPr/>
+      </p:nvGrpSpPr>
+      <p:grpSpPr/>
+      <p:sp>
+        <p:nvSpPr>
+          <p:cNvPr id="2" name="Rectangle 1"/>
+          <p:cNvSpPr/>
+          <p:nvPr/>
+        </p:nvSpPr>
+        <p:spPr>
+          <a:xfrm>
+            <a:off x="0" y="0"/>
+            <a:ext cx="12191695" cy="384048"/>
+          </a:xfrm>
+          <a:prstGeom prst="rect">
+            <a:avLst/>
+          </a:prstGeom>
+          <a:solidFill>
+            <a:srgbClr val="0B2D5B"/>
+          </a:solidFill>
+          <a:ln>
+            <a:noFill/>
+          </a:ln>
+          <a:effectLst/>
+        </p:spPr>
+        <p:style>
+          <a:lnRef idx="1">
+            <a:schemeClr val="accent1"/>
+          </a:lnRef>
+          <a:fillRef idx="3">
+            <a:schemeClr val="accent1"/>
+          </a:fillRef>
+          <a:effectRef idx="2">
+            <a:schemeClr val="accent1"/>
+          </a:effectRef>
+          <a:fontRef idx="minor">
+            <a:schemeClr val="lt1"/>
+          </a:fontRef>
+        </p:style>
+        <p:txBody>
+          <a:bodyPr rtlCol="0" anchor="ctr"/>
+          <a:lstStyle/>
+          <a:p>
+            <a:pPr algn="ctr"/>
+          </a:p>
+        </p:txBody>
+      </p:sp>
+      <p:sp>
+        <p:nvSpPr>
+          <p:cNvPr id="3" name="TextBox 2"/>
+          <p:cNvSpPr txBox="1"/>
+          <p:nvPr/>
+        </p:nvSpPr>
+        <p:spPr>
+          <a:xfrm>
+            <a:off x="548640" y="100584"/>
+            <a:ext cx="10972800" cy="274320"/>
+          </a:xfrm>
+          <a:prstGeom prst="rect">
+            <a:avLst/>
+          </a:prstGeom>
+          <a:noFill/>
+        </p:spPr>
+        <p:txBody>
+          <a:bodyPr wrap="square" anchor="t" lIns="0" rIns="0" tIns="0" bIns="0">
+            <a:spAutoFit/>
+          </a:bodyPr>
+          <a:lstStyle/>
+          <a:p>
+            <a:pPr algn="l">
+              <a:spcAft>
+                <a:spcPts val="495"/>
+              </a:spcAft>
+            </a:pPr>
+            <a:r>
+              <a:rPr sz="1100" b="1" i="0">
+                <a:solidFill>
+                  <a:srgbClr val="FFFFFF"/>
+                </a:solidFill>
+                <a:latin typeface="Inter Tight"/>
+              </a:rPr>
+              <a:t>TEACHER PAGE  ·  skipped when you present  ·  Before you teach</a:t>
+            </a:r>
+          </a:p>
+        </p:txBody>
+      </p:sp>
+      <p:sp>
+        <p:nvSpPr>
+          <p:cNvPr id="4" name="TextBox 3"/>
+          <p:cNvSpPr txBox="1"/>
+          <p:nvPr/>
+        </p:nvSpPr>
+        <p:spPr>
+          <a:xfrm>
+            <a:off x="548640" y="685800"/>
+            <a:ext cx="10972800" cy="640080"/>
+          </a:xfrm>
+          <a:prstGeom prst="rect">
+            <a:avLst/>
+          </a:prstGeom>
+          <a:noFill/>
+        </p:spPr>
+        <p:txBody>
+          <a:bodyPr wrap="square" anchor="t" lIns="0" rIns="0" tIns="0" bIns="0">
+            <a:spAutoFit/>
+          </a:bodyPr>
+          <a:lstStyle/>
+          <a:p>
+            <a:pPr algn="l">
+              <a:spcAft>
+                <a:spcPts val="1350"/>
+              </a:spcAft>
+            </a:pPr>
+            <a:r>
+              <a:rPr sz="3000" b="1" i="0">
+                <a:solidFill>
+                  <a:srgbClr val="1C1B19"/>
+                </a:solidFill>
+                <a:latin typeface="Source Serif 4"/>
+              </a:rPr>
+              <a:t>Before you teach</a:t>
+            </a:r>
+          </a:p>
+        </p:txBody>
+      </p:sp>
+      <p:sp>
+        <p:nvSpPr>
+          <p:cNvPr id="5" name="TextBox 4"/>
+          <p:cNvSpPr txBox="1"/>
+          <p:nvPr/>
+        </p:nvSpPr>
+        <p:spPr>
+          <a:xfrm>
+            <a:off x="548640" y="1463040"/>
+            <a:ext cx="5394960" cy="4937760"/>
+          </a:xfrm>
+          <a:prstGeom prst="rect">
+            <a:avLst/>
+          </a:prstGeom>
+          <a:noFill/>
+        </p:spPr>
+        <p:txBody>
+          <a:bodyPr wrap="square" anchor="t" lIns="0" rIns="0" tIns="0" bIns="0">
+            <a:spAutoFit/>
+          </a:bodyPr>
+          <a:lstStyle/>
+          <a:p>
+            <a:pPr algn="l">
+              <a:spcAft>
+                <a:spcPts val="585"/>
+              </a:spcAft>
+            </a:pPr>
+            <a:r>
+              <a:rPr sz="1500" b="1" i="0">
+                <a:solidFill>
+                  <a:srgbClr val="1C1B19"/>
+                </a:solidFill>
+                <a:latin typeface="Source Serif 4"/>
+              </a:rPr>
+              <a:t>Friends are sitting in the same room.</a:t>
+            </a:r>
+          </a:p>
+          <a:p>
+            <a:pPr algn="l">
+              <a:spcAft>
+                <a:spcPts val="585"/>
+              </a:spcAft>
+            </a:pPr>
+            <a:r>
+              <a:rPr sz="1300" b="0" i="0">
+                <a:solidFill>
+                  <a:srgbClr val="1C1B19"/>
+                </a:solidFill>
+                <a:latin typeface="Source Serif 4"/>
+              </a:rPr>
+              <a:t>The friend a student is thinking about may be two desks away. No names, initials, or stories about real friendships, in pairs or out loud. The flag check stays on a card that goes home.</a:t>
+            </a:r>
+          </a:p>
+          <a:p>
+            <a:pPr algn="l">
+              <a:spcAft>
+                <a:spcPts val="585"/>
+              </a:spcAft>
+            </a:pPr>
+            <a:r>
+              <a:rPr sz="1300" b="0" i="0">
+                <a:solidFill>
+                  <a:srgbClr val="1C1B19"/>
+                </a:solidFill>
+                <a:latin typeface="Source Serif 4"/>
+              </a:rPr>
+              <a:t/>
+            </a:r>
+          </a:p>
+          <a:p>
+            <a:pPr algn="l">
+              <a:spcAft>
+                <a:spcPts val="585"/>
+              </a:spcAft>
+            </a:pPr>
+            <a:r>
+              <a:rPr sz="1500" b="1" i="0">
+                <a:solidFill>
+                  <a:srgbClr val="1C1B19"/>
+                </a:solidFill>
+                <a:latin typeface="Source Serif 4"/>
+              </a:rPr>
+              <a:t>Steer away from "toxic" and "cut them off."</a:t>
+            </a:r>
+          </a:p>
+          <a:p>
+            <a:pPr algn="l">
+              <a:spcAft>
+                <a:spcPts val="585"/>
+              </a:spcAft>
+            </a:pPr>
+            <a:r>
+              <a:rPr sz="1300" b="0" i="0">
+                <a:solidFill>
+                  <a:srgbClr val="1C1B19"/>
+                </a:solidFill>
+                <a:latin typeface="Source Serif 4"/>
+              </a:rPr>
+              <a:t>Most friendships in the gray zone are worth adjusting, and many 9th graders have one or two friends to lose. The research supports judging patterns over months and changing the friendship before ending it.</a:t>
+            </a:r>
+          </a:p>
+          <a:p>
+            <a:pPr algn="l">
+              <a:spcAft>
+                <a:spcPts val="585"/>
+              </a:spcAft>
+            </a:pPr>
+            <a:r>
+              <a:rPr sz="1300" b="0" i="0">
+                <a:solidFill>
+                  <a:srgbClr val="1C1B19"/>
+                </a:solidFill>
+                <a:latin typeface="Source Serif 4"/>
+              </a:rPr>
+              <a:t/>
+            </a:r>
+          </a:p>
+          <a:p>
+            <a:pPr algn="l">
+              <a:spcAft>
+                <a:spcPts val="585"/>
+              </a:spcAft>
+            </a:pPr>
+            <a:r>
+              <a:rPr sz="1500" b="1" i="0">
+                <a:solidFill>
+                  <a:srgbClr val="1C1B19"/>
+                </a:solidFill>
+                <a:latin typeface="Source Serif 4"/>
+              </a:rPr>
+              <a:t>Some red flags are an adult's job.</a:t>
+            </a:r>
+          </a:p>
+          <a:p>
+            <a:pPr algn="l">
+              <a:spcAft>
+                <a:spcPts val="585"/>
+              </a:spcAft>
+            </a:pPr>
+            <a:r>
+              <a:rPr sz="1300" b="0" i="0">
+                <a:solidFill>
+                  <a:srgbClr val="1C1B19"/>
+                </a:solidFill>
+                <a:latin typeface="Source Serif 4"/>
+              </a:rPr>
+              <a:t>Threats to share secrets, screenshots, or photos to control someone, threats to hurt anyone, pressure into unsafe things, or getting others to gang up: thank the student and connect them with a counselor that day. For sexual images of anyone under 18, the free Take It Down tool from the National Center for Missing &amp; Exploited Children can help get them removed.</a:t>
+            </a:r>
+          </a:p>
+          <a:p>
+            <a:pPr algn="l">
+              <a:spcAft>
+                <a:spcPts val="585"/>
+              </a:spcAft>
+            </a:pPr>
+            <a:r>
+              <a:rPr sz="1300" b="0" i="0">
+                <a:solidFill>
+                  <a:srgbClr val="1C1B19"/>
+                </a:solidFill>
+                <a:latin typeface="Source Serif 4"/>
+              </a:rPr>
+              <a:t/>
+            </a:r>
+          </a:p>
+        </p:txBody>
+      </p:sp>
+      <p:sp>
+        <p:nvSpPr>
+          <p:cNvPr id="6" name="TextBox 5"/>
+          <p:cNvSpPr txBox="1"/>
+          <p:nvPr/>
+        </p:nvSpPr>
+        <p:spPr>
+          <a:xfrm>
+            <a:off x="6217920" y="1463040"/>
+            <a:ext cx="5394960" cy="4937760"/>
+          </a:xfrm>
+          <a:prstGeom prst="rect">
+            <a:avLst/>
+          </a:prstGeom>
+          <a:noFill/>
+        </p:spPr>
+        <p:txBody>
+          <a:bodyPr wrap="square" anchor="t" lIns="0" rIns="0" tIns="0" bIns="0">
+            <a:spAutoFit/>
+          </a:bodyPr>
+          <a:lstStyle/>
+          <a:p>
+            <a:pPr algn="l">
+              <a:spcAft>
+                <a:spcPts val="585"/>
+              </a:spcAft>
+            </a:pPr>
+            <a:r>
+              <a:rPr sz="1500" b="1" i="0">
+                <a:solidFill>
+                  <a:srgbClr val="1C1B19"/>
+                </a:solidFill>
+                <a:latin typeface="Source Serif 4"/>
+              </a:rPr>
+              <a:t>If a student says a friend talks about hurting themselves.</a:t>
+            </a:r>
+          </a:p>
+          <a:p>
+            <a:pPr algn="l">
+              <a:spcAft>
+                <a:spcPts val="585"/>
+              </a:spcAft>
+            </a:pPr>
+            <a:r>
+              <a:rPr sz="1300" b="0" i="0">
+                <a:solidFill>
+                  <a:srgbClr val="1C1B19"/>
+                </a:solidFill>
+                <a:latin typeface="Source Serif 4"/>
+              </a:rPr>
+              <a:t>That goes to a counselor right away, and the student should hear that telling is looking out for the friend. Don't discuss it in front of the class.</a:t>
+            </a:r>
+          </a:p>
+          <a:p>
+            <a:pPr algn="l">
+              <a:spcAft>
+                <a:spcPts val="585"/>
+              </a:spcAft>
+            </a:pPr>
+            <a:r>
+              <a:rPr sz="1300" b="0" i="0">
+                <a:solidFill>
+                  <a:srgbClr val="1C1B19"/>
+                </a:solidFill>
+                <a:latin typeface="Source Serif 4"/>
+              </a:rPr>
+              <a:t/>
+            </a:r>
+          </a:p>
+          <a:p>
+            <a:pPr algn="l">
+              <a:spcAft>
+                <a:spcPts val="585"/>
+              </a:spcAft>
+            </a:pPr>
+            <a:r>
+              <a:rPr sz="1500" b="1" i="0">
+                <a:solidFill>
+                  <a:srgbClr val="1C1B19"/>
+                </a:solidFill>
+                <a:latin typeface="Source Serif 4"/>
+              </a:rPr>
+              <a:t>Co-rumination is a kind friend's habit.</a:t>
+            </a:r>
+          </a:p>
+          <a:p>
+            <a:pPr algn="l">
+              <a:spcAft>
+                <a:spcPts val="585"/>
+              </a:spcAft>
+            </a:pPr>
+            <a:r>
+              <a:rPr sz="1300" b="0" i="0">
+                <a:solidFill>
+                  <a:srgbClr val="1C1B19"/>
+                </a:solidFill>
+                <a:latin typeface="Source Serif 4"/>
+              </a:rPr>
+              <a:t>Students who talk a friend through every problem are trying to help. Present the ten-minute limit as a better way to help, and keep blame out of it. If what's being replayed sounds like more than ordinary stress, point both students to a counselor.</a:t>
+            </a:r>
+          </a:p>
+          <a:p>
+            <a:pPr algn="l">
+              <a:spcAft>
+                <a:spcPts val="585"/>
+              </a:spcAft>
+            </a:pPr>
+            <a:r>
+              <a:rPr sz="1300" b="0" i="0">
+                <a:solidFill>
+                  <a:srgbClr val="1C1B19"/>
+                </a:solidFill>
+                <a:latin typeface="Source Serif 4"/>
+              </a:rPr>
+              <a:t/>
+            </a:r>
+          </a:p>
+          <a:p>
+            <a:pPr algn="l">
+              <a:spcAft>
+                <a:spcPts val="585"/>
+              </a:spcAft>
+            </a:pPr>
+            <a:r>
+              <a:rPr sz="1500" b="1" i="0">
+                <a:solidFill>
+                  <a:srgbClr val="1C1B19"/>
+                </a:solidFill>
+                <a:latin typeface="Source Serif 4"/>
+              </a:rPr>
+              <a:t>Dating comes up.</a:t>
+            </a:r>
+          </a:p>
+          <a:p>
+            <a:pPr algn="l">
+              <a:spcAft>
+                <a:spcPts val="585"/>
+              </a:spcAft>
+            </a:pPr>
+            <a:r>
+              <a:rPr sz="1300" b="0" i="0">
+                <a:solidFill>
+                  <a:srgbClr val="1C1B19"/>
+                </a:solidFill>
+                <a:latin typeface="Source Serif 4"/>
+              </a:rPr>
+              <a:t>Tracking, phone checks, and jealousy show up in dating too. The same flags apply. Keep examples to "someone you're close to" or "someone you like" without assuming genders.</a:t>
+            </a:r>
+          </a:p>
+          <a:p>
+            <a:pPr algn="l">
+              <a:spcAft>
+                <a:spcPts val="585"/>
+              </a:spcAft>
+            </a:pPr>
+            <a:r>
+              <a:rPr sz="1300" b="0" i="0">
+                <a:solidFill>
+                  <a:srgbClr val="1C1B19"/>
+                </a:solidFill>
+                <a:latin typeface="Source Serif 4"/>
+              </a:rPr>
+              <a:t/>
+            </a:r>
+          </a:p>
+        </p:txBody>
+      </p:sp>
+    </p:spTree>
+  </p:cSld>
+  <p:clrMapOvr>
+    <a:masterClrMapping/>
+  </p:clrMapOvr>
+</p:sld>
+</file>
+
+<file path=ppt/slides/slide14.xml><?xml version="1.0" encoding="utf-8"?>
+<p:sld xmlns:a="http://schemas.openxmlformats.org/drawingml/2006/main" xmlns:p="http://schemas.openxmlformats.org/presentationml/2006/main" xmlns:r="http://schemas.openxmlformats.org/officeDocument/2006/relationships" show="0">
+  <p:cSld>
+    <p:bg>
+      <p:bgPr>
+        <a:solidFill>
+          <a:srgbClr val="EEEBE4"/>
+        </a:solidFill>
+        <a:effectLst/>
+      </p:bgPr>
+    </p:bg>
+    <p:spTree>
+      <p:nvGrpSpPr>
+        <p:cNvPr id="1" name=""/>
+        <p:cNvGrpSpPr/>
+        <p:nvPr/>
+      </p:nvGrpSpPr>
+      <p:grpSpPr/>
+      <p:sp>
+        <p:nvSpPr>
+          <p:cNvPr id="2" name="Rectangle 1"/>
+          <p:cNvSpPr/>
+          <p:nvPr/>
+        </p:nvSpPr>
+        <p:spPr>
+          <a:xfrm>
+            <a:off x="0" y="0"/>
+            <a:ext cx="12191695" cy="384048"/>
+          </a:xfrm>
+          <a:prstGeom prst="rect">
+            <a:avLst/>
+          </a:prstGeom>
+          <a:solidFill>
+            <a:srgbClr val="0B2D5B"/>
+          </a:solidFill>
+          <a:ln>
+            <a:noFill/>
+          </a:ln>
+          <a:effectLst/>
+        </p:spPr>
+        <p:style>
+          <a:lnRef idx="1">
+            <a:schemeClr val="accent1"/>
+          </a:lnRef>
+          <a:fillRef idx="3">
+            <a:schemeClr val="accent1"/>
+          </a:fillRef>
+          <a:effectRef idx="2">
+            <a:schemeClr val="accent1"/>
+          </a:effectRef>
+          <a:fontRef idx="minor">
+            <a:schemeClr val="lt1"/>
+          </a:fontRef>
+        </p:style>
+        <p:txBody>
+          <a:bodyPr rtlCol="0" anchor="ctr"/>
+          <a:lstStyle/>
+          <a:p>
+            <a:pPr algn="ctr"/>
+          </a:p>
+        </p:txBody>
+      </p:sp>
+      <p:sp>
+        <p:nvSpPr>
+          <p:cNvPr id="3" name="TextBox 2"/>
+          <p:cNvSpPr txBox="1"/>
+          <p:nvPr/>
+        </p:nvSpPr>
+        <p:spPr>
+          <a:xfrm>
+            <a:off x="548640" y="100584"/>
+            <a:ext cx="10972800" cy="274320"/>
+          </a:xfrm>
+          <a:prstGeom prst="rect">
+            <a:avLst/>
+          </a:prstGeom>
+          <a:noFill/>
+        </p:spPr>
+        <p:txBody>
+          <a:bodyPr wrap="square" anchor="t" lIns="0" rIns="0" tIns="0" bIns="0">
+            <a:spAutoFit/>
+          </a:bodyPr>
+          <a:lstStyle/>
+          <a:p>
+            <a:pPr algn="l">
+              <a:spcAft>
+                <a:spcPts val="495"/>
+              </a:spcAft>
+            </a:pPr>
+            <a:r>
+              <a:rPr sz="1100" b="1" i="0">
+                <a:solidFill>
+                  <a:srgbClr val="FFFFFF"/>
+                </a:solidFill>
+                <a:latin typeface="Inter Tight"/>
+              </a:rPr>
+              <a:t>TEACHER PAGE  ·  skipped when you present  ·  Every student in the room</a:t>
+            </a:r>
+          </a:p>
+        </p:txBody>
+      </p:sp>
+      <p:sp>
+        <p:nvSpPr>
+          <p:cNvPr id="4" name="TextBox 3"/>
+          <p:cNvSpPr txBox="1"/>
+          <p:nvPr/>
+        </p:nvSpPr>
+        <p:spPr>
+          <a:xfrm>
+            <a:off x="548640" y="685800"/>
+            <a:ext cx="10972800" cy="640080"/>
+          </a:xfrm>
+          <a:prstGeom prst="rect">
+            <a:avLst/>
+          </a:prstGeom>
+          <a:noFill/>
+        </p:spPr>
+        <p:txBody>
+          <a:bodyPr wrap="square" anchor="t" lIns="0" rIns="0" tIns="0" bIns="0">
+            <a:spAutoFit/>
+          </a:bodyPr>
+          <a:lstStyle/>
+          <a:p>
+            <a:pPr algn="l">
+              <a:spcAft>
+                <a:spcPts val="1350"/>
+              </a:spcAft>
+            </a:pPr>
+            <a:r>
+              <a:rPr sz="3000" b="1" i="0">
+                <a:solidFill>
+                  <a:srgbClr val="1C1B19"/>
+                </a:solidFill>
+                <a:latin typeface="Source Serif 4"/>
+              </a:rPr>
+              <a:t>Every student in the room</a:t>
+            </a:r>
+          </a:p>
+        </p:txBody>
+      </p:sp>
+      <p:sp>
+        <p:nvSpPr>
+          <p:cNvPr id="5" name="TextBox 4"/>
+          <p:cNvSpPr txBox="1"/>
+          <p:nvPr/>
+        </p:nvSpPr>
+        <p:spPr>
+          <a:xfrm>
+            <a:off x="548640" y="1325880"/>
+            <a:ext cx="10972800" cy="365760"/>
+          </a:xfrm>
+          <a:prstGeom prst="rect">
+            <a:avLst/>
+          </a:prstGeom>
+          <a:noFill/>
+        </p:spPr>
+        <p:txBody>
+          <a:bodyPr wrap="square" anchor="t" lIns="0" rIns="0" tIns="0" bIns="0">
+            <a:spAutoFit/>
+          </a:bodyPr>
+          <a:lstStyle/>
+          <a:p>
+            <a:pPr algn="l">
+              <a:spcAft>
+                <a:spcPts val="630"/>
+              </a:spcAft>
+            </a:pPr>
+            <a:r>
+              <a:rPr sz="1400" b="0" i="0">
+                <a:solidFill>
+                  <a:srgbClr val="5D5A54"/>
+                </a:solidFill>
+                <a:latin typeface="Inter Tight"/>
+              </a:rPr>
+              <a:t>Culture, family, identity, ability and money: what to keep in mind for this topic.</a:t>
+            </a:r>
+          </a:p>
+        </p:txBody>
+      </p:sp>
+      <p:sp>
+        <p:nvSpPr>
+          <p:cNvPr id="6" name="TextBox 5"/>
+          <p:cNvSpPr txBox="1"/>
+          <p:nvPr/>
+        </p:nvSpPr>
+        <p:spPr>
+          <a:xfrm>
+            <a:off x="548640" y="1828800"/>
+            <a:ext cx="5394960" cy="4572000"/>
+          </a:xfrm>
+          <a:prstGeom prst="rect">
+            <a:avLst/>
+          </a:prstGeom>
+          <a:noFill/>
+        </p:spPr>
+        <p:txBody>
+          <a:bodyPr wrap="square" anchor="t" lIns="0" rIns="0" tIns="0" bIns="0">
+            <a:spAutoFit/>
+          </a:bodyPr>
+          <a:lstStyle/>
+          <a:p>
+            <a:pPr algn="l">
+              <a:spcAft>
+                <a:spcPts val="585"/>
+              </a:spcAft>
+            </a:pPr>
+            <a:r>
+              <a:rPr sz="1500" b="1" i="0">
+                <a:solidFill>
+                  <a:srgbClr val="1C1B19"/>
+                </a:solidFill>
+                <a:latin typeface="Source Serif 4"/>
+              </a:rPr>
+              <a:t>What a good friend looks like varies.</a:t>
+            </a:r>
+          </a:p>
+          <a:p>
+            <a:pPr algn="l">
+              <a:spcAft>
+                <a:spcPts val="585"/>
+              </a:spcAft>
+            </a:pPr>
+            <a:r>
+              <a:rPr sz="1300" b="0" i="0">
+                <a:solidFill>
+                  <a:srgbClr val="1C1B19"/>
+                </a:solidFill>
+                <a:latin typeface="Source Serif 4"/>
+              </a:rPr>
+              <a:t>In some families and cultures close friends are treated like family: constant contact, showing up unannounced, sharing almost everything. In others more privacy is normal. Neither is wrong. Ask students what a good friend looks like where they come from instead of naming one norm as healthy.</a:t>
+            </a:r>
+          </a:p>
+          <a:p>
+            <a:pPr algn="l">
+              <a:spcAft>
+                <a:spcPts val="585"/>
+              </a:spcAft>
+            </a:pPr>
+            <a:r>
+              <a:rPr sz="1300" b="0" i="0">
+                <a:solidFill>
+                  <a:srgbClr val="1C1B19"/>
+                </a:solidFill>
+                <a:latin typeface="Source Serif 4"/>
+              </a:rPr>
+              <a:t/>
+            </a:r>
+          </a:p>
+          <a:p>
+            <a:pPr algn="l">
+              <a:spcAft>
+                <a:spcPts val="585"/>
+              </a:spcAft>
+            </a:pPr>
+            <a:r>
+              <a:rPr sz="1500" b="1" i="0">
+                <a:solidFill>
+                  <a:srgbClr val="1C1B19"/>
+                </a:solidFill>
+                <a:latin typeface="Source Serif 4"/>
+              </a:rPr>
+              <a:t>Accent jokes are a real red flag.</a:t>
+            </a:r>
+          </a:p>
+          <a:p>
+            <a:pPr algn="l">
+              <a:spcAft>
+                <a:spcPts val="585"/>
+              </a:spcAft>
+            </a:pPr>
+            <a:r>
+              <a:rPr sz="1300" b="0" i="0">
+                <a:solidFill>
+                  <a:srgbClr val="1C1B19"/>
+                </a:solidFill>
+                <a:latin typeface="Source Serif 4"/>
+              </a:rPr>
+              <a:t>The Imani card is about a joke about someone's accent. Students who speak another language at home, or are new to the country, hear these often. Name it as a put-down that hits a sore spot, and treat Imani's private feedback as the green flag.</a:t>
+            </a:r>
+          </a:p>
+          <a:p>
+            <a:pPr algn="l">
+              <a:spcAft>
+                <a:spcPts val="585"/>
+              </a:spcAft>
+            </a:pPr>
+            <a:r>
+              <a:rPr sz="1300" b="0" i="0">
+                <a:solidFill>
+                  <a:srgbClr val="1C1B19"/>
+                </a:solidFill>
+                <a:latin typeface="Source Serif 4"/>
+              </a:rPr>
+              <a:t/>
+            </a:r>
+          </a:p>
+          <a:p>
+            <a:pPr algn="l">
+              <a:spcAft>
+                <a:spcPts val="585"/>
+              </a:spcAft>
+            </a:pPr>
+            <a:r>
+              <a:rPr sz="1500" b="1" i="0">
+                <a:solidFill>
+                  <a:srgbClr val="1C1B19"/>
+                </a:solidFill>
+                <a:latin typeface="Source Serif 4"/>
+              </a:rPr>
+              <a:t>LGBTQ+ students and secrets held over them.</a:t>
+            </a:r>
+          </a:p>
+          <a:p>
+            <a:pPr algn="l">
+              <a:spcAft>
+                <a:spcPts val="585"/>
+              </a:spcAft>
+            </a:pPr>
+            <a:r>
+              <a:rPr sz="1300" b="0" i="0">
+                <a:solidFill>
+                  <a:srgbClr val="1C1B19"/>
+                </a:solidFill>
+                <a:latin typeface="Source Serif 4"/>
+              </a:rPr>
+              <a:t>"I'll tell people" can mean threatening to out someone. That's the controller pattern and a counselor conversation that day. Students who aren't out may need a safe adult other than family. The Trevor Project (call 1-866-488-7386 or text START to 678-678) is free.</a:t>
+            </a:r>
+          </a:p>
+          <a:p>
+            <a:pPr algn="l">
+              <a:spcAft>
+                <a:spcPts val="585"/>
+              </a:spcAft>
+            </a:pPr>
+            <a:r>
+              <a:rPr sz="1300" b="0" i="0">
+                <a:solidFill>
+                  <a:srgbClr val="1C1B19"/>
+                </a:solidFill>
+                <a:latin typeface="Source Serif 4"/>
+              </a:rPr>
+              <a:t/>
+            </a:r>
+          </a:p>
+        </p:txBody>
+      </p:sp>
+      <p:sp>
+        <p:nvSpPr>
+          <p:cNvPr id="7" name="TextBox 6"/>
+          <p:cNvSpPr txBox="1"/>
+          <p:nvPr/>
+        </p:nvSpPr>
+        <p:spPr>
+          <a:xfrm>
+            <a:off x="6217920" y="1828800"/>
+            <a:ext cx="5394960" cy="4572000"/>
+          </a:xfrm>
+          <a:prstGeom prst="rect">
+            <a:avLst/>
+          </a:prstGeom>
+          <a:noFill/>
+        </p:spPr>
+        <p:txBody>
+          <a:bodyPr wrap="square" anchor="t" lIns="0" rIns="0" tIns="0" bIns="0">
+            <a:spAutoFit/>
+          </a:bodyPr>
+          <a:lstStyle/>
+          <a:p>
+            <a:pPr algn="l">
+              <a:spcAft>
+                <a:spcPts val="585"/>
+              </a:spcAft>
+            </a:pPr>
+            <a:r>
+              <a:rPr sz="1500" b="1" i="0">
+                <a:solidFill>
+                  <a:srgbClr val="1C1B19"/>
+                </a:solidFill>
+                <a:latin typeface="Source Serif 4"/>
+              </a:rPr>
+              <a:t>Reading social cues comes harder for some students.</a:t>
+            </a:r>
+          </a:p>
+          <a:p>
+            <a:pPr algn="l">
+              <a:spcAft>
+                <a:spcPts val="585"/>
+              </a:spcAft>
+            </a:pPr>
+            <a:r>
+              <a:rPr sz="1300" b="0" i="0">
+                <a:solidFill>
+                  <a:srgbClr val="1C1B19"/>
+                </a:solidFill>
+                <a:latin typeface="Source Serif 4"/>
+              </a:rPr>
+              <a:t>Autistic students and others who find tone hard to read may miss when a joke has turned into a put-down, or be the target of "jokes" more often. The green and red flags give them concrete checks. Never treat eye contact or being outgoing as the sign of a good friend.</a:t>
+            </a:r>
+          </a:p>
+          <a:p>
+            <a:pPr algn="l">
+              <a:spcAft>
+                <a:spcPts val="585"/>
+              </a:spcAft>
+            </a:pPr>
+            <a:r>
+              <a:rPr sz="1300" b="0" i="0">
+                <a:solidFill>
+                  <a:srgbClr val="1C1B19"/>
+                </a:solidFill>
+                <a:latin typeface="Source Serif 4"/>
+              </a:rPr>
+              <a:t/>
+            </a:r>
+          </a:p>
+          <a:p>
+            <a:pPr algn="l">
+              <a:spcAft>
+                <a:spcPts val="585"/>
+              </a:spcAft>
+            </a:pPr>
+            <a:r>
+              <a:rPr sz="1500" b="1" i="0">
+                <a:solidFill>
+                  <a:srgbClr val="1C1B19"/>
+                </a:solidFill>
+                <a:latin typeface="Source Serif 4"/>
+              </a:rPr>
+              <a:t>The outside view comes from anyone trusted.</a:t>
+            </a:r>
+          </a:p>
+          <a:p>
+            <a:pPr algn="l">
+              <a:spcAft>
+                <a:spcPts val="585"/>
+              </a:spcAft>
+            </a:pPr>
+            <a:r>
+              <a:rPr sz="1300" b="0" i="0">
+                <a:solidFill>
+                  <a:srgbClr val="1C1B19"/>
+                </a:solidFill>
+                <a:latin typeface="Source Serif 4"/>
+              </a:rPr>
+              <a:t>"A parent or older sibling" doesn't fit every home. Say "an adult you trust": a grandparent, an aunt, a coach, a foster parent, a counselor, someone at a faith community, or a friend outside the group.</a:t>
+            </a:r>
+          </a:p>
+          <a:p>
+            <a:pPr algn="l">
+              <a:spcAft>
+                <a:spcPts val="585"/>
+              </a:spcAft>
+            </a:pPr>
+            <a:r>
+              <a:rPr sz="1300" b="0" i="0">
+                <a:solidFill>
+                  <a:srgbClr val="1C1B19"/>
+                </a:solidFill>
+                <a:latin typeface="Source Serif 4"/>
+              </a:rPr>
+              <a:t/>
+            </a:r>
+          </a:p>
+          <a:p>
+            <a:pPr algn="l">
+              <a:spcAft>
+                <a:spcPts val="585"/>
+              </a:spcAft>
+            </a:pPr>
+            <a:r>
+              <a:rPr sz="1500" b="1" i="0">
+                <a:solidFill>
+                  <a:srgbClr val="1C1B19"/>
+                </a:solidFill>
+                <a:latin typeface="Source Serif 4"/>
+              </a:rPr>
+              <a:t>Money shows up in put-downs and plans.</a:t>
+            </a:r>
+          </a:p>
+          <a:p>
+            <a:pPr algn="l">
+              <a:spcAft>
+                <a:spcPts val="585"/>
+              </a:spcAft>
+            </a:pPr>
+            <a:r>
+              <a:rPr sz="1300" b="0" i="0">
+                <a:solidFill>
+                  <a:srgbClr val="1C1B19"/>
+                </a:solidFill>
+                <a:latin typeface="Source Serif 4"/>
+              </a:rPr>
+              <a:t>Jokes about clothes, phones, or where someone lives hit students with less money hardest. And "turn the volume down" can simply mean skipping the plans that cost money and putting time into free ones with people who leave you better off.</a:t>
+            </a:r>
+          </a:p>
+          <a:p>
+            <a:pPr algn="l">
+              <a:spcAft>
+                <a:spcPts val="585"/>
+              </a:spcAft>
+            </a:pPr>
+            <a:r>
+              <a:rPr sz="1300" b="0" i="0">
+                <a:solidFill>
+                  <a:srgbClr val="1C1B19"/>
+                </a:solidFill>
+                <a:latin typeface="Source Serif 4"/>
+              </a:rPr>
+              <a:t/>
+            </a:r>
+          </a:p>
+        </p:txBody>
+      </p:sp>
+    </p:spTree>
+  </p:cSld>
+  <p:clrMapOvr>
+    <a:masterClrMapping/>
+  </p:clrMapOvr>
+</p:sld>
+</file>
+
+<file path=ppt/slides/slide15.xml><?xml version="1.0" encoding="utf-8"?>
+<p:sld xmlns:a="http://schemas.openxmlformats.org/drawingml/2006/main" xmlns:p="http://schemas.openxmlformats.org/presentationml/2006/main" xmlns:r="http://schemas.openxmlformats.org/officeDocument/2006/relationships" show="0">
+  <p:cSld>
+    <p:bg>
+      <p:bgPr>
+        <a:solidFill>
+          <a:srgbClr val="EEEBE4"/>
+        </a:solidFill>
+        <a:effectLst/>
+      </p:bgPr>
+    </p:bg>
+    <p:spTree>
+      <p:nvGrpSpPr>
+        <p:cNvPr id="1" name=""/>
+        <p:cNvGrpSpPr/>
+        <p:nvPr/>
+      </p:nvGrpSpPr>
+      <p:grpSpPr/>
+      <p:sp>
+        <p:nvSpPr>
+          <p:cNvPr id="2" name="Rectangle 1"/>
+          <p:cNvSpPr/>
+          <p:nvPr/>
+        </p:nvSpPr>
+        <p:spPr>
+          <a:xfrm>
+            <a:off x="0" y="0"/>
+            <a:ext cx="12191695" cy="384048"/>
+          </a:xfrm>
+          <a:prstGeom prst="rect">
+            <a:avLst/>
+          </a:prstGeom>
+          <a:solidFill>
+            <a:srgbClr val="0B2D5B"/>
+          </a:solidFill>
+          <a:ln>
+            <a:noFill/>
+          </a:ln>
+          <a:effectLst/>
+        </p:spPr>
+        <p:style>
+          <a:lnRef idx="1">
+            <a:schemeClr val="accent1"/>
+          </a:lnRef>
+          <a:fillRef idx="3">
+            <a:schemeClr val="accent1"/>
+          </a:fillRef>
+          <a:effectRef idx="2">
+            <a:schemeClr val="accent1"/>
+          </a:effectRef>
+          <a:fontRef idx="minor">
+            <a:schemeClr val="lt1"/>
+          </a:fontRef>
+        </p:style>
+        <p:txBody>
+          <a:bodyPr rtlCol="0" anchor="ctr"/>
+          <a:lstStyle/>
+          <a:p>
+            <a:pPr algn="ctr"/>
+          </a:p>
+        </p:txBody>
+      </p:sp>
+      <p:sp>
+        <p:nvSpPr>
+          <p:cNvPr id="3" name="TextBox 2"/>
+          <p:cNvSpPr txBox="1"/>
+          <p:nvPr/>
+        </p:nvSpPr>
+        <p:spPr>
+          <a:xfrm>
+            <a:off x="548640" y="100584"/>
+            <a:ext cx="10972800" cy="274320"/>
+          </a:xfrm>
+          <a:prstGeom prst="rect">
+            <a:avLst/>
+          </a:prstGeom>
+          <a:noFill/>
+        </p:spPr>
+        <p:txBody>
+          <a:bodyPr wrap="square" anchor="t" lIns="0" rIns="0" tIns="0" bIns="0">
+            <a:spAutoFit/>
+          </a:bodyPr>
+          <a:lstStyle/>
+          <a:p>
+            <a:pPr algn="l">
+              <a:spcAft>
+                <a:spcPts val="495"/>
+              </a:spcAft>
+            </a:pPr>
+            <a:r>
+              <a:rPr sz="1100" b="1" i="0">
+                <a:solidFill>
+                  <a:srgbClr val="FFFFFF"/>
+                </a:solidFill>
+                <a:latin typeface="Inter Tight"/>
+              </a:rPr>
+              <a:t>TEACHER PAGE  ·  skipped when you present  ·  Background</a:t>
+            </a:r>
+          </a:p>
+        </p:txBody>
+      </p:sp>
+      <p:sp>
+        <p:nvSpPr>
+          <p:cNvPr id="4" name="TextBox 3"/>
+          <p:cNvSpPr txBox="1"/>
+          <p:nvPr/>
+        </p:nvSpPr>
+        <p:spPr>
+          <a:xfrm>
+            <a:off x="548640" y="685800"/>
+            <a:ext cx="10972800" cy="640080"/>
+          </a:xfrm>
+          <a:prstGeom prst="rect">
+            <a:avLst/>
+          </a:prstGeom>
+          <a:noFill/>
+        </p:spPr>
+        <p:txBody>
+          <a:bodyPr wrap="square" anchor="t" lIns="0" rIns="0" tIns="0" bIns="0">
+            <a:spAutoFit/>
+          </a:bodyPr>
+          <a:lstStyle/>
+          <a:p>
+            <a:pPr algn="l">
+              <a:spcAft>
+                <a:spcPts val="1350"/>
+              </a:spcAft>
+            </a:pPr>
+            <a:r>
+              <a:rPr sz="3000" b="1" i="0">
+                <a:solidFill>
+                  <a:srgbClr val="1C1B19"/>
+                </a:solidFill>
+                <a:latin typeface="Source Serif 4"/>
+              </a:rPr>
+              <a:t>What the research says</a:t>
+            </a:r>
+          </a:p>
+        </p:txBody>
+      </p:sp>
+      <p:sp>
+        <p:nvSpPr>
+          <p:cNvPr id="5" name="TextBox 4"/>
+          <p:cNvSpPr txBox="1"/>
+          <p:nvPr/>
+        </p:nvSpPr>
+        <p:spPr>
+          <a:xfrm>
+            <a:off x="548640" y="1463040"/>
+            <a:ext cx="5394960" cy="4937760"/>
+          </a:xfrm>
+          <a:prstGeom prst="rect">
+            <a:avLst/>
+          </a:prstGeom>
+          <a:noFill/>
+        </p:spPr>
+        <p:txBody>
+          <a:bodyPr wrap="square" anchor="t" lIns="0" rIns="0" tIns="0" bIns="0">
+            <a:spAutoFit/>
+          </a:bodyPr>
+          <a:lstStyle/>
+          <a:p>
+            <a:pPr algn="l">
+              <a:spcAft>
+                <a:spcPts val="585"/>
+              </a:spcAft>
+            </a:pPr>
+            <a:r>
+              <a:rPr sz="1300" b="0" i="0">
+                <a:solidFill>
+                  <a:srgbClr val="1C1B19"/>
+                </a:solidFill>
+                <a:latin typeface="Source Serif 4"/>
+              </a:rPr>
+              <a:t>Couples whose partners responded to good news with interest and questions were more satisfied and less likely to break up two months later. Shrugging, poking holes, or changing the subject went with dissatisfaction. The studies were with dating couples and are widely applied to friendship.</a:t>
+            </a:r>
+          </a:p>
+          <a:p>
+            <a:pPr algn="l">
+              <a:spcAft>
+                <a:spcPts val="585"/>
+              </a:spcAft>
+            </a:pPr>
+            <a:r>
+              <a:rPr sz="1050" b="0" i="0">
+                <a:solidFill>
+                  <a:srgbClr val="5D5A54"/>
+                </a:solidFill>
+                <a:latin typeface="Inter Tight"/>
+              </a:rPr>
+              <a:t>Gable, Gonzaga and Strachman, Journal of Personality and Social Psychology, 2006</a:t>
+            </a:r>
+          </a:p>
+          <a:p>
+            <a:pPr algn="l">
+              <a:spcAft>
+                <a:spcPts val="585"/>
+              </a:spcAft>
+            </a:pPr>
+            <a:r>
+              <a:rPr sz="1300" b="0" i="0">
+                <a:solidFill>
+                  <a:srgbClr val="1C1B19"/>
+                </a:solidFill>
+                <a:latin typeface="Source Serif 4"/>
+              </a:rPr>
+              <a:t>Adults who talked about a stressful event with an ambivalent friend (sometimes supportive, sometimes hurtful) had a bigger rise in blood pressure than with a supportive friend, and higher resting heart rates.</a:t>
+            </a:r>
+          </a:p>
+          <a:p>
+            <a:pPr algn="l">
+              <a:spcAft>
+                <a:spcPts val="585"/>
+              </a:spcAft>
+            </a:pPr>
+            <a:r>
+              <a:rPr sz="1050" b="0" i="0">
+                <a:solidFill>
+                  <a:srgbClr val="5D5A54"/>
+                </a:solidFill>
+                <a:latin typeface="Inter Tight"/>
+              </a:rPr>
+              <a:t>Holt-Lunstad et al., Annals of Behavioral Medicine, 2007 (Brigham Young University)</a:t>
+            </a:r>
+          </a:p>
+          <a:p>
+            <a:pPr algn="l">
+              <a:spcAft>
+                <a:spcPts val="585"/>
+              </a:spcAft>
+            </a:pPr>
+            <a:r>
+              <a:rPr sz="1300" b="0" i="0">
+                <a:solidFill>
+                  <a:srgbClr val="1C1B19"/>
+                </a:solidFill>
+                <a:latin typeface="Source Serif 4"/>
+              </a:rPr>
+              <a:t>Co-rumination, friends going over the same problems again and again, was linked with closer, higher-quality friendships and with more anxiety and depression.</a:t>
+            </a:r>
+          </a:p>
+          <a:p>
+            <a:pPr algn="l">
+              <a:spcAft>
+                <a:spcPts val="585"/>
+              </a:spcAft>
+            </a:pPr>
+            <a:r>
+              <a:rPr sz="1050" b="0" i="0">
+                <a:solidFill>
+                  <a:srgbClr val="5D5A54"/>
+                </a:solidFill>
+                <a:latin typeface="Inter Tight"/>
+              </a:rPr>
+              <a:t>Rose, Child Development, 2002</a:t>
+            </a:r>
+          </a:p>
+        </p:txBody>
+      </p:sp>
+      <p:sp>
+        <p:nvSpPr>
+          <p:cNvPr id="6" name="TextBox 5"/>
+          <p:cNvSpPr txBox="1"/>
+          <p:nvPr/>
+        </p:nvSpPr>
+        <p:spPr>
+          <a:xfrm>
+            <a:off x="6217920" y="1463040"/>
+            <a:ext cx="5394960" cy="4937760"/>
+          </a:xfrm>
+          <a:prstGeom prst="rect">
+            <a:avLst/>
+          </a:prstGeom>
+          <a:noFill/>
+        </p:spPr>
+        <p:txBody>
+          <a:bodyPr wrap="square" anchor="t" lIns="0" rIns="0" tIns="0" bIns="0">
+            <a:spAutoFit/>
+          </a:bodyPr>
+          <a:lstStyle/>
+          <a:p>
+            <a:pPr algn="l">
+              <a:spcAft>
+                <a:spcPts val="585"/>
+              </a:spcAft>
+            </a:pPr>
+            <a:r>
+              <a:rPr sz="1300" b="0" i="0">
+                <a:solidFill>
+                  <a:srgbClr val="1C1B19"/>
+                </a:solidFill>
+                <a:latin typeface="Source Serif 4"/>
+              </a:rPr>
+              <a:t>In a driving video game, teenagers took more risks when friends were watching than when they played alone. The effect was much smaller in adults.</a:t>
+            </a:r>
+          </a:p>
+          <a:p>
+            <a:pPr algn="l">
+              <a:spcAft>
+                <a:spcPts val="585"/>
+              </a:spcAft>
+            </a:pPr>
+            <a:r>
+              <a:rPr sz="1050" b="0" i="0">
+                <a:solidFill>
+                  <a:srgbClr val="5D5A54"/>
+                </a:solidFill>
+                <a:latin typeface="Inter Tight"/>
+              </a:rPr>
+              <a:t>Gardner and Steinberg, Developmental Psychology, 2005</a:t>
+            </a:r>
+          </a:p>
+          <a:p>
+            <a:pPr algn="l">
+              <a:spcAft>
+                <a:spcPts val="585"/>
+              </a:spcAft>
+            </a:pPr>
+            <a:r>
+              <a:rPr sz="1300" b="0" i="0">
+                <a:solidFill>
+                  <a:srgbClr val="1C1B19"/>
+                </a:solidFill>
+                <a:latin typeface="Source Serif 4"/>
+              </a:rPr>
+              <a:t>In fifth and sixth graders, bad experiences raised cortisol and lowered self-worth less when a best friend was present.</a:t>
+            </a:r>
+          </a:p>
+          <a:p>
+            <a:pPr algn="l">
+              <a:spcAft>
+                <a:spcPts val="585"/>
+              </a:spcAft>
+            </a:pPr>
+            <a:r>
+              <a:rPr sz="1050" b="0" i="0">
+                <a:solidFill>
+                  <a:srgbClr val="5D5A54"/>
+                </a:solidFill>
+                <a:latin typeface="Inter Tight"/>
+              </a:rPr>
+              <a:t>Adams, Santo and Bukowski, Developmental Psychology, 2011</a:t>
+            </a:r>
+          </a:p>
+          <a:p>
+            <a:pPr algn="l">
+              <a:spcAft>
+                <a:spcPts val="585"/>
+              </a:spcAft>
+            </a:pPr>
+            <a:r>
+              <a:rPr sz="1300" b="0" i="0">
+                <a:solidFill>
+                  <a:srgbClr val="1C1B19"/>
+                </a:solidFill>
+                <a:latin typeface="Source Serif 4"/>
+              </a:rPr>
+              <a:t>Take It Down is a free tool that helps remove sexual images of anyone under 18 from online platforms.</a:t>
+            </a:r>
+          </a:p>
+          <a:p>
+            <a:pPr algn="l">
+              <a:spcAft>
+                <a:spcPts val="585"/>
+              </a:spcAft>
+            </a:pPr>
+            <a:r>
+              <a:rPr sz="1050" b="0" i="0">
+                <a:solidFill>
+                  <a:srgbClr val="5D5A54"/>
+                </a:solidFill>
+                <a:latin typeface="Inter Tight"/>
+              </a:rPr>
+              <a:t>National Center for Missing &amp; Exploited Children</a:t>
+            </a:r>
+          </a:p>
+        </p:txBody>
+      </p:sp>
+    </p:spTree>
+  </p:cSld>
+  <p:clrMapOvr>
+    <a:masterClrMapping/>
+  </p:clrMapOvr>
+</p:sld>
+</file>
+
+<file path=ppt/slides/slide2.xml><?xml version="1.0" encoding="utf-8"?>
+<p:sld xmlns:a="http://schemas.openxmlformats.org/drawingml/2006/main" xmlns:p="http://schemas.openxmlformats.org/presentationml/2006/main" xmlns:r="http://schemas.openxmlformats.org/officeDocument/2006/relationships">
+  <p:cSld>
+    <p:bg>
+      <p:bgPr>
+        <a:solidFill>
+          <a:srgbClr val="0B2D5B"/>
+        </a:solidFill>
+        <a:effectLst/>
+      </p:bgPr>
+    </p:bg>
+    <p:spTree>
+      <p:nvGrpSpPr>
+        <p:cNvPr id="1" name=""/>
+        <p:cNvGrpSpPr/>
+        <p:nvPr/>
+      </p:nvGrpSpPr>
+      <p:grpSpPr/>
+      <p:sp>
+        <p:nvSpPr>
+          <p:cNvPr id="2" name="Rectangle 1"/>
+          <p:cNvSpPr/>
+          <p:nvPr/>
+        </p:nvSpPr>
+        <p:spPr>
+          <a:xfrm>
+            <a:off x="548640" y="502920"/>
+            <a:ext cx="457200" cy="54864"/>
+          </a:xfrm>
+          <a:prstGeom prst="rect">
+            <a:avLst/>
+          </a:prstGeom>
+          <a:solidFill>
+            <a:srgbClr val="F47B20"/>
+          </a:solidFill>
+          <a:ln>
+            <a:noFill/>
+          </a:ln>
+          <a:effectLst/>
+        </p:spPr>
+        <p:style>
+          <a:lnRef idx="1">
+            <a:schemeClr val="accent1"/>
+          </a:lnRef>
+          <a:fillRef idx="3">
+            <a:schemeClr val="accent1"/>
+          </a:fillRef>
+          <a:effectRef idx="2">
+            <a:schemeClr val="accent1"/>
+          </a:effectRef>
+          <a:fontRef idx="minor">
+            <a:schemeClr val="lt1"/>
+          </a:fontRef>
+        </p:style>
+        <p:txBody>
+          <a:bodyPr rtlCol="0" anchor="ctr"/>
+          <a:lstStyle/>
+          <a:p>
+            <a:pPr algn="ctr"/>
+          </a:p>
+        </p:txBody>
+      </p:sp>
+      <p:sp>
+        <p:nvSpPr>
+          <p:cNvPr id="3" name="TextBox 2"/>
+          <p:cNvSpPr txBox="1"/>
+          <p:nvPr/>
+        </p:nvSpPr>
+        <p:spPr>
+          <a:xfrm>
+            <a:off x="1143000" y="393192"/>
+            <a:ext cx="8229600" cy="274320"/>
+          </a:xfrm>
+          <a:prstGeom prst="rect">
+            <a:avLst/>
+          </a:prstGeom>
+          <a:noFill/>
+        </p:spPr>
+        <p:txBody>
+          <a:bodyPr wrap="square" anchor="t" lIns="0" rIns="0" tIns="0" bIns="0">
+            <a:spAutoFit/>
+          </a:bodyPr>
+          <a:lstStyle/>
+          <a:p>
+            <a:pPr algn="l">
+              <a:spcAft>
+                <a:spcPts val="540"/>
+              </a:spcAft>
+            </a:pPr>
+            <a:r>
+              <a:rPr sz="1200" b="1" i="0">
+                <a:solidFill>
+                  <a:srgbClr val="5D5A54"/>
+                </a:solidFill>
+                <a:latin typeface="Inter Tight"/>
+              </a:rPr>
+              <a:t>IS THIS A GOOD FRIEND?</a:t>
+            </a:r>
+          </a:p>
+        </p:txBody>
+      </p:sp>
+      <p:sp>
+        <p:nvSpPr>
+          <p:cNvPr id="4" name="TextBox 3"/>
+          <p:cNvSpPr txBox="1"/>
+          <p:nvPr/>
+        </p:nvSpPr>
+        <p:spPr>
+          <a:xfrm>
+            <a:off x="8229600" y="6400800"/>
+            <a:ext cx="3410712" cy="274320"/>
+          </a:xfrm>
+          <a:prstGeom prst="rect">
+            <a:avLst/>
+          </a:prstGeom>
+          <a:noFill/>
+        </p:spPr>
+        <p:txBody>
+          <a:bodyPr wrap="square" anchor="t" lIns="0" rIns="0" tIns="0" bIns="0">
+            <a:spAutoFit/>
+          </a:bodyPr>
+          <a:lstStyle/>
+          <a:p>
+            <a:pPr algn="r">
+              <a:spcAft>
+                <a:spcPts val="450"/>
+              </a:spcAft>
+            </a:pPr>
+            <a:r>
+              <a:rPr sz="1000" b="0" i="0">
+                <a:solidFill>
+                  <a:srgbClr val="5D5A54"/>
+                </a:solidFill>
+                <a:latin typeface="Inter Tight"/>
+              </a:rPr>
+              <a:t>Beaver Counseling</a:t>
+            </a:r>
+          </a:p>
+        </p:txBody>
+      </p:sp>
+      <p:sp>
+        <p:nvSpPr>
+          <p:cNvPr id="5" name="TextBox 4"/>
+          <p:cNvSpPr txBox="1"/>
+          <p:nvPr/>
+        </p:nvSpPr>
+        <p:spPr>
+          <a:xfrm>
+            <a:off x="822960" y="2011680"/>
+            <a:ext cx="10515600" cy="1463040"/>
+          </a:xfrm>
+          <a:prstGeom prst="rect">
+            <a:avLst/>
+          </a:prstGeom>
+          <a:noFill/>
+        </p:spPr>
+        <p:txBody>
+          <a:bodyPr wrap="square" anchor="b" lIns="0" rIns="0" tIns="0" bIns="0">
+            <a:spAutoFit/>
+          </a:bodyPr>
+          <a:lstStyle/>
+          <a:p>
+            <a:pPr algn="l">
+              <a:spcAft>
+                <a:spcPts val="2700"/>
+              </a:spcAft>
+            </a:pPr>
+            <a:r>
+              <a:rPr sz="6000" b="1" i="0">
+                <a:solidFill>
+                  <a:srgbClr val="FFFFFF"/>
+                </a:solidFill>
+                <a:latin typeface="Source Serif 4"/>
+              </a:rPr>
+              <a:t>Is This a Good Friend?</a:t>
+            </a:r>
+          </a:p>
+        </p:txBody>
+      </p:sp>
+      <p:sp>
+        <p:nvSpPr>
+          <p:cNvPr id="6" name="TextBox 5"/>
+          <p:cNvSpPr txBox="1"/>
+          <p:nvPr/>
+        </p:nvSpPr>
+        <p:spPr>
+          <a:xfrm>
+            <a:off x="822960" y="3611880"/>
+            <a:ext cx="10515600" cy="914400"/>
+          </a:xfrm>
+          <a:prstGeom prst="rect">
+            <a:avLst/>
+          </a:prstGeom>
+          <a:noFill/>
+        </p:spPr>
+        <p:txBody>
+          <a:bodyPr wrap="square" anchor="t" lIns="0" rIns="0" tIns="0" bIns="0">
+            <a:spAutoFit/>
+          </a:bodyPr>
+          <a:lstStyle/>
+          <a:p>
+            <a:pPr algn="l">
+              <a:spcAft>
+                <a:spcPts val="1080"/>
+              </a:spcAft>
+            </a:pPr>
+            <a:r>
+              <a:rPr sz="2400" b="0" i="1">
+                <a:solidFill>
+                  <a:srgbClr val="E8E4DA"/>
+                </a:solidFill>
+                <a:latin typeface="Source Serif 4"/>
+              </a:rPr>
+              <a:t>Charges you up or drains you.</a:t>
+            </a:r>
+          </a:p>
+        </p:txBody>
+      </p:sp>
+      <p:sp>
+        <p:nvSpPr>
+          <p:cNvPr id="7" name="TextBox 6"/>
+          <p:cNvSpPr txBox="1"/>
+          <p:nvPr/>
+        </p:nvSpPr>
+        <p:spPr>
+          <a:xfrm>
+            <a:off x="822960" y="6035040"/>
+            <a:ext cx="7315200" cy="365760"/>
+          </a:xfrm>
+          <a:prstGeom prst="rect">
+            <a:avLst/>
+          </a:prstGeom>
+          <a:noFill/>
+        </p:spPr>
+        <p:txBody>
+          <a:bodyPr wrap="square" anchor="t" lIns="0" rIns="0" tIns="0" bIns="0">
+            <a:spAutoFit/>
+          </a:bodyPr>
+          <a:lstStyle/>
+          <a:p>
+            <a:pPr algn="l">
+              <a:spcAft>
+                <a:spcPts val="585"/>
+              </a:spcAft>
+            </a:pPr>
+            <a:r>
+              <a:rPr sz="1300" b="0" i="0">
+                <a:solidFill>
+                  <a:srgbClr val="E8E4DA"/>
+                </a:solidFill>
+                <a:latin typeface="Inter Tight"/>
+              </a:rPr>
+              <a:t>Beaver Upper School · Counseling</a:t>
+            </a:r>
+          </a:p>
+        </p:txBody>
+      </p:sp>
+    </p:spTree>
+  </p:cSld>
+  <p:clrMapOvr>
+    <a:masterClrMapping/>
+  </p:clrMapOvr>
+</p:sld>
+</file>
+
+<file path=ppt/slides/slide3.xml><?xml version="1.0" encoding="utf-8"?>
 <p:sld xmlns:a="http://schemas.openxmlformats.org/drawingml/2006/main" xmlns:p="http://schemas.openxmlformats.org/presentationml/2006/main" xmlns:r="http://schemas.openxmlformats.org/officeDocument/2006/relationships">
   <p:cSld>
     <p:bg>
@@ -5985,7 +7961,7 @@
                 </a:solidFill>
                 <a:latin typeface="Inter Tight"/>
               </a:rPr>
-              <a:t>GREEN, RED, OR GRAY?</a:t>
+              <a:t>MYTH OR FACT?</a:t>
             </a:r>
           </a:p>
         </p:txBody>
@@ -6038,7 +8014,7 @@
         <p:spPr>
           <a:xfrm>
             <a:off x="822960" y="1005840"/>
-            <a:ext cx="10515600" cy="914400"/>
+            <a:ext cx="10515600" cy="1097280"/>
           </a:xfrm>
           <a:prstGeom prst="rect">
             <a:avLst/>
@@ -6053,77 +8029,31 @@
           <a:p>
             <a:pPr algn="l">
               <a:spcAft>
-                <a:spcPts val="1530"/>
-              </a:spcAft>
-            </a:pPr>
-            <a:r>
-              <a:rPr sz="3400" b="1" i="0">
+                <a:spcPts val="1620"/>
+              </a:spcAft>
+            </a:pPr>
+            <a:r>
+              <a:rPr sz="3600" b="1" i="0">
                 <a:solidFill>
                   <a:srgbClr val="1C1B19"/>
                 </a:solidFill>
                 <a:latin typeface="Source Serif 4"/>
               </a:rPr>
-              <a:t>What do you think? What would you do?</a:t>
-            </a:r>
-          </a:p>
-        </p:txBody>
-      </p:sp>
-      <p:sp>
-        <p:nvSpPr>
-          <p:cNvPr id="6" name="Rectangle 5"/>
-          <p:cNvSpPr/>
-          <p:nvPr/>
-        </p:nvSpPr>
-        <p:spPr>
-          <a:xfrm>
-            <a:off x="822960" y="2103120"/>
-            <a:ext cx="3322320" cy="3840480"/>
-          </a:xfrm>
-          <a:prstGeom prst="rect">
-            <a:avLst/>
-          </a:prstGeom>
-          <a:solidFill>
-            <a:srgbClr val="FFFFFF"/>
-          </a:solidFill>
-          <a:ln w="15875">
-            <a:solidFill>
-              <a:srgbClr val="D8D2C6"/>
-            </a:solidFill>
-          </a:ln>
-          <a:effectLst/>
-        </p:spPr>
-        <p:style>
-          <a:lnRef idx="1">
-            <a:schemeClr val="accent1"/>
-          </a:lnRef>
-          <a:fillRef idx="3">
-            <a:schemeClr val="accent1"/>
-          </a:fillRef>
-          <a:effectRef idx="2">
-            <a:schemeClr val="accent1"/>
-          </a:effectRef>
-          <a:fontRef idx="minor">
-            <a:schemeClr val="lt1"/>
-          </a:fontRef>
-        </p:style>
-        <p:txBody>
-          <a:bodyPr rtlCol="0" anchor="ctr"/>
-          <a:lstStyle/>
-          <a:p>
-            <a:pPr algn="ctr"/>
-          </a:p>
-        </p:txBody>
-      </p:sp>
-      <p:sp>
-        <p:nvSpPr>
-          <p:cNvPr id="7" name="TextBox 6"/>
+              <a:t>Stand up if you think it's a fact.</a:t>
+            </a:r>
+          </a:p>
+        </p:txBody>
+      </p:sp>
+      <p:sp>
+        <p:nvSpPr>
+          <p:cNvPr id="6" name="TextBox 5"/>
           <p:cNvSpPr txBox="1"/>
           <p:nvPr/>
         </p:nvSpPr>
         <p:spPr>
           <a:xfrm>
-            <a:off x="1051560" y="2286000"/>
-            <a:ext cx="2865120" cy="365760"/>
+            <a:off x="822960" y="2057400"/>
+            <a:ext cx="548640" cy="804672"/>
           </a:xfrm>
           <a:prstGeom prst="rect">
             <a:avLst/>
@@ -6138,31 +8068,31 @@
           <a:p>
             <a:pPr algn="l">
               <a:spcAft>
-                <a:spcPts val="585"/>
-              </a:spcAft>
-            </a:pPr>
-            <a:r>
-              <a:rPr sz="1300" b="1" i="0">
-                <a:solidFill>
-                  <a:srgbClr val="0B2D5B"/>
-                </a:solidFill>
-                <a:latin typeface="Inter Tight"/>
-              </a:rPr>
-              <a:t>DEV</a:t>
-            </a:r>
-          </a:p>
-        </p:txBody>
-      </p:sp>
-      <p:sp>
-        <p:nvSpPr>
-          <p:cNvPr id="8" name="TextBox 7"/>
+                <a:spcPts val="1170"/>
+              </a:spcAft>
+            </a:pPr>
+            <a:r>
+              <a:rPr sz="2600" b="1" i="0">
+                <a:solidFill>
+                  <a:srgbClr val="F47B20"/>
+                </a:solidFill>
+                <a:latin typeface="Source Serif 4"/>
+              </a:rPr>
+              <a:t>1</a:t>
+            </a:r>
+          </a:p>
+        </p:txBody>
+      </p:sp>
+      <p:sp>
+        <p:nvSpPr>
+          <p:cNvPr id="7" name="TextBox 6"/>
           <p:cNvSpPr txBox="1"/>
           <p:nvPr/>
         </p:nvSpPr>
         <p:spPr>
           <a:xfrm>
-            <a:off x="1051560" y="2743200"/>
-            <a:ext cx="2865120" cy="3017520"/>
+            <a:off x="1463040" y="2093976"/>
+            <a:ext cx="9875520" cy="804672"/>
           </a:xfrm>
           <a:prstGeom prst="rect">
             <a:avLst/>
@@ -6177,77 +8107,31 @@
           <a:p>
             <a:pPr algn="l">
               <a:spcAft>
-                <a:spcPts val="810"/>
-              </a:spcAft>
-            </a:pPr>
-            <a:r>
-              <a:rPr sz="1800" b="0" i="0">
+                <a:spcPts val="945"/>
+              </a:spcAft>
+            </a:pPr>
+            <a:r>
+              <a:rPr sz="2100" b="1" i="0">
                 <a:solidFill>
                   <a:srgbClr val="1C1B19"/>
                 </a:solidFill>
                 <a:latin typeface="Source Serif 4"/>
               </a:rPr>
-              <a:t>Wants your location shared all the time "so I know you're safe," and is upset for a day whenever you turn it off.</a:t>
-            </a:r>
-          </a:p>
-        </p:txBody>
-      </p:sp>
-      <p:sp>
-        <p:nvSpPr>
-          <p:cNvPr id="9" name="Rectangle 8"/>
-          <p:cNvSpPr/>
-          <p:nvPr/>
-        </p:nvSpPr>
-        <p:spPr>
-          <a:xfrm>
-            <a:off x="4419600" y="2103120"/>
-            <a:ext cx="3322320" cy="3840480"/>
-          </a:xfrm>
-          <a:prstGeom prst="rect">
-            <a:avLst/>
-          </a:prstGeom>
-          <a:solidFill>
-            <a:srgbClr val="FFFFFF"/>
-          </a:solidFill>
-          <a:ln w="15875">
-            <a:solidFill>
-              <a:srgbClr val="D8D2C6"/>
-            </a:solidFill>
-          </a:ln>
-          <a:effectLst/>
-        </p:spPr>
-        <p:style>
-          <a:lnRef idx="1">
-            <a:schemeClr val="accent1"/>
-          </a:lnRef>
-          <a:fillRef idx="3">
-            <a:schemeClr val="accent1"/>
-          </a:fillRef>
-          <a:effectRef idx="2">
-            <a:schemeClr val="accent1"/>
-          </a:effectRef>
-          <a:fontRef idx="minor">
-            <a:schemeClr val="lt1"/>
-          </a:fontRef>
-        </p:style>
-        <p:txBody>
-          <a:bodyPr rtlCol="0" anchor="ctr"/>
-          <a:lstStyle/>
-          <a:p>
-            <a:pPr algn="ctr"/>
-          </a:p>
-        </p:txBody>
-      </p:sp>
-      <p:sp>
-        <p:nvSpPr>
-          <p:cNvPr id="10" name="TextBox 9"/>
+              <a:t>A real friend would never hurt me.</a:t>
+            </a:r>
+          </a:p>
+        </p:txBody>
+      </p:sp>
+      <p:sp>
+        <p:nvSpPr>
+          <p:cNvPr id="8" name="TextBox 7"/>
           <p:cNvSpPr txBox="1"/>
           <p:nvPr/>
         </p:nvSpPr>
         <p:spPr>
           <a:xfrm>
-            <a:off x="4648200" y="2286000"/>
-            <a:ext cx="2865120" cy="365760"/>
+            <a:off x="822960" y="2862072"/>
+            <a:ext cx="548640" cy="804672"/>
           </a:xfrm>
           <a:prstGeom prst="rect">
             <a:avLst/>
@@ -6262,31 +8146,31 @@
           <a:p>
             <a:pPr algn="l">
               <a:spcAft>
-                <a:spcPts val="585"/>
-              </a:spcAft>
-            </a:pPr>
-            <a:r>
-              <a:rPr sz="1300" b="1" i="0">
-                <a:solidFill>
-                  <a:srgbClr val="0B2D5B"/>
-                </a:solidFill>
-                <a:latin typeface="Inter Tight"/>
-              </a:rPr>
-              <a:t>IMANI</a:t>
-            </a:r>
-          </a:p>
-        </p:txBody>
-      </p:sp>
-      <p:sp>
-        <p:nvSpPr>
-          <p:cNvPr id="11" name="TextBox 10"/>
+                <a:spcPts val="1170"/>
+              </a:spcAft>
+            </a:pPr>
+            <a:r>
+              <a:rPr sz="2600" b="1" i="0">
+                <a:solidFill>
+                  <a:srgbClr val="F47B20"/>
+                </a:solidFill>
+                <a:latin typeface="Source Serif 4"/>
+              </a:rPr>
+              <a:t>2</a:t>
+            </a:r>
+          </a:p>
+        </p:txBody>
+      </p:sp>
+      <p:sp>
+        <p:nvSpPr>
+          <p:cNvPr id="9" name="TextBox 8"/>
           <p:cNvSpPr txBox="1"/>
           <p:nvPr/>
         </p:nvSpPr>
         <p:spPr>
           <a:xfrm>
-            <a:off x="4648200" y="2743200"/>
-            <a:ext cx="2865120" cy="3017520"/>
+            <a:off x="1463040" y="2898648"/>
+            <a:ext cx="9875520" cy="804672"/>
           </a:xfrm>
           <a:prstGeom prst="rect">
             <a:avLst/>
@@ -6301,77 +8185,31 @@
           <a:p>
             <a:pPr algn="l">
               <a:spcAft>
-                <a:spcPts val="810"/>
-              </a:spcAft>
-            </a:pPr>
-            <a:r>
-              <a:rPr sz="1800" b="0" i="0">
+                <a:spcPts val="945"/>
+              </a:spcAft>
+            </a:pPr>
+            <a:r>
+              <a:rPr sz="2100" b="1" i="0">
                 <a:solidFill>
                   <a:srgbClr val="1C1B19"/>
                 </a:solidFill>
                 <a:latin typeface="Source Serif 4"/>
               </a:rPr>
-              <a:t>Tells you privately that your joke in the group chat about a classmate's accent came across as mean.</a:t>
-            </a:r>
-          </a:p>
-        </p:txBody>
-      </p:sp>
-      <p:sp>
-        <p:nvSpPr>
-          <p:cNvPr id="12" name="Rectangle 11"/>
-          <p:cNvSpPr/>
-          <p:nvPr/>
-        </p:nvSpPr>
-        <p:spPr>
-          <a:xfrm>
-            <a:off x="8016239" y="2103120"/>
-            <a:ext cx="3322320" cy="3840480"/>
-          </a:xfrm>
-          <a:prstGeom prst="rect">
-            <a:avLst/>
-          </a:prstGeom>
-          <a:solidFill>
-            <a:srgbClr val="FFFFFF"/>
-          </a:solidFill>
-          <a:ln w="15875">
-            <a:solidFill>
-              <a:srgbClr val="D8D2C6"/>
-            </a:solidFill>
-          </a:ln>
-          <a:effectLst/>
-        </p:spPr>
-        <p:style>
-          <a:lnRef idx="1">
-            <a:schemeClr val="accent1"/>
-          </a:lnRef>
-          <a:fillRef idx="3">
-            <a:schemeClr val="accent1"/>
-          </a:fillRef>
-          <a:effectRef idx="2">
-            <a:schemeClr val="accent1"/>
-          </a:effectRef>
-          <a:fontRef idx="minor">
-            <a:schemeClr val="lt1"/>
-          </a:fontRef>
-        </p:style>
-        <p:txBody>
-          <a:bodyPr rtlCol="0" anchor="ctr"/>
-          <a:lstStyle/>
-          <a:p>
-            <a:pPr algn="ctr"/>
-          </a:p>
-        </p:txBody>
-      </p:sp>
-      <p:sp>
-        <p:nvSpPr>
-          <p:cNvPr id="13" name="TextBox 12"/>
+              <a:t>How a friend reacts to good news says a lot.</a:t>
+            </a:r>
+          </a:p>
+        </p:txBody>
+      </p:sp>
+      <p:sp>
+        <p:nvSpPr>
+          <p:cNvPr id="10" name="TextBox 9"/>
           <p:cNvSpPr txBox="1"/>
           <p:nvPr/>
         </p:nvSpPr>
         <p:spPr>
           <a:xfrm>
-            <a:off x="8244839" y="2286000"/>
-            <a:ext cx="2865120" cy="365760"/>
+            <a:off x="822960" y="3666744"/>
+            <a:ext cx="548640" cy="804672"/>
           </a:xfrm>
           <a:prstGeom prst="rect">
             <a:avLst/>
@@ -6386,31 +8224,31 @@
           <a:p>
             <a:pPr algn="l">
               <a:spcAft>
-                <a:spcPts val="585"/>
-              </a:spcAft>
-            </a:pPr>
-            <a:r>
-              <a:rPr sz="1300" b="1" i="0">
-                <a:solidFill>
-                  <a:srgbClr val="0B2D5B"/>
-                </a:solidFill>
-                <a:latin typeface="Inter Tight"/>
-              </a:rPr>
-              <a:t>LUIS</a:t>
-            </a:r>
-          </a:p>
-        </p:txBody>
-      </p:sp>
-      <p:sp>
-        <p:nvSpPr>
-          <p:cNvPr id="14" name="TextBox 13"/>
+                <a:spcPts val="1170"/>
+              </a:spcAft>
+            </a:pPr>
+            <a:r>
+              <a:rPr sz="2600" b="1" i="0">
+                <a:solidFill>
+                  <a:srgbClr val="F47B20"/>
+                </a:solidFill>
+                <a:latin typeface="Source Serif 4"/>
+              </a:rPr>
+              <a:t>3</a:t>
+            </a:r>
+          </a:p>
+        </p:txBody>
+      </p:sp>
+      <p:sp>
+        <p:nvSpPr>
+          <p:cNvPr id="11" name="TextBox 10"/>
           <p:cNvSpPr txBox="1"/>
           <p:nvPr/>
         </p:nvSpPr>
         <p:spPr>
           <a:xfrm>
-            <a:off x="8244839" y="2743200"/>
-            <a:ext cx="2865120" cy="3017520"/>
+            <a:off x="1463040" y="3703320"/>
+            <a:ext cx="9875520" cy="804672"/>
           </a:xfrm>
           <a:prstGeom prst="rect">
             <a:avLst/>
@@ -6425,17 +8263,173 @@
           <a:p>
             <a:pPr algn="l">
               <a:spcAft>
-                <a:spcPts val="810"/>
-              </a:spcAft>
-            </a:pPr>
-            <a:r>
-              <a:rPr sz="1800" b="0" i="0">
+                <a:spcPts val="945"/>
+              </a:spcAft>
+            </a:pPr>
+            <a:r>
+              <a:rPr sz="2100" b="1" i="0">
                 <a:solidFill>
                   <a:srgbClr val="1C1B19"/>
                 </a:solidFill>
                 <a:latin typeface="Source Serif 4"/>
               </a:rPr>
-              <a:t>A junior on your team drives you home from practice and takes the back roads way too fast. Everyone cheers. So do you.</a:t>
+              <a:t>The closer we are, the healthier it is.</a:t>
+            </a:r>
+          </a:p>
+        </p:txBody>
+      </p:sp>
+      <p:sp>
+        <p:nvSpPr>
+          <p:cNvPr id="12" name="TextBox 11"/>
+          <p:cNvSpPr txBox="1"/>
+          <p:nvPr/>
+        </p:nvSpPr>
+        <p:spPr>
+          <a:xfrm>
+            <a:off x="822960" y="4471416"/>
+            <a:ext cx="548640" cy="804672"/>
+          </a:xfrm>
+          <a:prstGeom prst="rect">
+            <a:avLst/>
+          </a:prstGeom>
+          <a:noFill/>
+        </p:spPr>
+        <p:txBody>
+          <a:bodyPr wrap="square" anchor="t" lIns="0" rIns="0" tIns="0" bIns="0">
+            <a:spAutoFit/>
+          </a:bodyPr>
+          <a:lstStyle/>
+          <a:p>
+            <a:pPr algn="l">
+              <a:spcAft>
+                <a:spcPts val="1170"/>
+              </a:spcAft>
+            </a:pPr>
+            <a:r>
+              <a:rPr sz="2600" b="1" i="0">
+                <a:solidFill>
+                  <a:srgbClr val="F47B20"/>
+                </a:solidFill>
+                <a:latin typeface="Source Serif 4"/>
+              </a:rPr>
+              <a:t>4</a:t>
+            </a:r>
+          </a:p>
+        </p:txBody>
+      </p:sp>
+      <p:sp>
+        <p:nvSpPr>
+          <p:cNvPr id="13" name="TextBox 12"/>
+          <p:cNvSpPr txBox="1"/>
+          <p:nvPr/>
+        </p:nvSpPr>
+        <p:spPr>
+          <a:xfrm>
+            <a:off x="1463040" y="4507992"/>
+            <a:ext cx="9875520" cy="804672"/>
+          </a:xfrm>
+          <a:prstGeom prst="rect">
+            <a:avLst/>
+          </a:prstGeom>
+          <a:noFill/>
+        </p:spPr>
+        <p:txBody>
+          <a:bodyPr wrap="square" anchor="t" lIns="0" rIns="0" tIns="0" bIns="0">
+            <a:spAutoFit/>
+          </a:bodyPr>
+          <a:lstStyle/>
+          <a:p>
+            <a:pPr algn="l">
+              <a:spcAft>
+                <a:spcPts val="945"/>
+              </a:spcAft>
+            </a:pPr>
+            <a:r>
+              <a:rPr sz="2100" b="1" i="0">
+                <a:solidFill>
+                  <a:srgbClr val="1C1B19"/>
+                </a:solidFill>
+                <a:latin typeface="Source Serif 4"/>
+              </a:rPr>
+              <a:t>Teens take more risks when friends are watching.</a:t>
+            </a:r>
+          </a:p>
+        </p:txBody>
+      </p:sp>
+      <p:sp>
+        <p:nvSpPr>
+          <p:cNvPr id="14" name="TextBox 13"/>
+          <p:cNvSpPr txBox="1"/>
+          <p:nvPr/>
+        </p:nvSpPr>
+        <p:spPr>
+          <a:xfrm>
+            <a:off x="822960" y="5276088"/>
+            <a:ext cx="548640" cy="804672"/>
+          </a:xfrm>
+          <a:prstGeom prst="rect">
+            <a:avLst/>
+          </a:prstGeom>
+          <a:noFill/>
+        </p:spPr>
+        <p:txBody>
+          <a:bodyPr wrap="square" anchor="t" lIns="0" rIns="0" tIns="0" bIns="0">
+            <a:spAutoFit/>
+          </a:bodyPr>
+          <a:lstStyle/>
+          <a:p>
+            <a:pPr algn="l">
+              <a:spcAft>
+                <a:spcPts val="1170"/>
+              </a:spcAft>
+            </a:pPr>
+            <a:r>
+              <a:rPr sz="2600" b="1" i="0">
+                <a:solidFill>
+                  <a:srgbClr val="F47B20"/>
+                </a:solidFill>
+                <a:latin typeface="Source Serif 4"/>
+              </a:rPr>
+              <a:t>5</a:t>
+            </a:r>
+          </a:p>
+        </p:txBody>
+      </p:sp>
+      <p:sp>
+        <p:nvSpPr>
+          <p:cNvPr id="15" name="TextBox 14"/>
+          <p:cNvSpPr txBox="1"/>
+          <p:nvPr/>
+        </p:nvSpPr>
+        <p:spPr>
+          <a:xfrm>
+            <a:off x="1463040" y="5312664"/>
+            <a:ext cx="9875520" cy="804672"/>
+          </a:xfrm>
+          <a:prstGeom prst="rect">
+            <a:avLst/>
+          </a:prstGeom>
+          <a:noFill/>
+        </p:spPr>
+        <p:txBody>
+          <a:bodyPr wrap="square" anchor="t" lIns="0" rIns="0" tIns="0" bIns="0">
+            <a:spAutoFit/>
+          </a:bodyPr>
+          <a:lstStyle/>
+          <a:p>
+            <a:pPr algn="l">
+              <a:spcAft>
+                <a:spcPts val="945"/>
+              </a:spcAft>
+            </a:pPr>
+            <a:r>
+              <a:rPr sz="2100" b="1" i="0">
+                <a:solidFill>
+                  <a:srgbClr val="1C1B19"/>
+                </a:solidFill>
+                <a:latin typeface="Source Serif 4"/>
+              </a:rPr>
+              <a:t>Setting a boundary with a friend is mean.</a:t>
             </a:r>
           </a:p>
         </p:txBody>
@@ -6448,7 +8442,7 @@
 </p:sld>
 </file>
 
-<file path=ppt/slides/slide13.xml><?xml version="1.0" encoding="utf-8"?>
+<file path=ppt/slides/slide4.xml><?xml version="1.0" encoding="utf-8"?>
 <p:sld xmlns:a="http://schemas.openxmlformats.org/drawingml/2006/main" xmlns:p="http://schemas.openxmlformats.org/presentationml/2006/main" xmlns:r="http://schemas.openxmlformats.org/officeDocument/2006/relationships">
   <p:cSld>
     <p:bg>
@@ -6544,7 +8538,7 @@
                 </a:solidFill>
                 <a:latin typeface="Inter Tight"/>
               </a:rPr>
-              <a:t>WHAT HELPS</a:t>
+              <a:t>MYTH OR FACT?</a:t>
             </a:r>
           </a:p>
         </p:txBody>
@@ -6622,7 +8616,7 @@
                 </a:solidFill>
                 <a:latin typeface="Source Serif 4"/>
               </a:rPr>
-              <a:t>Change a friendship without ending it.</a:t>
+              <a:t>The answers</a:t>
             </a:r>
           </a:p>
         </p:txBody>
@@ -6700,7 +8694,7 @@
                 </a:solidFill>
                 <a:latin typeface="Source Serif 4"/>
               </a:rPr>
-              <a:t>Say it once, clearly.</a:t>
+              <a:t>Myth.</a:t>
             </a:r>
           </a:p>
           <a:p>
@@ -6716,7 +8710,7 @@
                 </a:solidFill>
                 <a:latin typeface="Source Serif 4"/>
               </a:rPr>
-              <a:t>"When you joke about my grades, it gets to me."</a:t>
+              <a:t>Good friends hurt each other sometimes. Do they own it and change?</a:t>
             </a:r>
           </a:p>
         </p:txBody>
@@ -6794,7 +8788,7 @@
                 </a:solidFill>
                 <a:latin typeface="Source Serif 4"/>
               </a:rPr>
-              <a:t>Set a boundary you control.</a:t>
+              <a:t>Fact.</a:t>
             </a:r>
           </a:p>
           <a:p>
@@ -6810,7 +8804,7 @@
                 </a:solidFill>
                 <a:latin typeface="Source Serif 4"/>
               </a:rPr>
-              <a:t>What you'll do: "I'm turning location off."</a:t>
+              <a:t>Being glad for you is harder than helping on a bad day.</a:t>
             </a:r>
           </a:p>
         </p:txBody>
@@ -6888,7 +8882,7 @@
                 </a:solidFill>
                 <a:latin typeface="Source Serif 4"/>
               </a:rPr>
-              <a:t>Change the loop.</a:t>
+              <a:t>Myth.</a:t>
             </a:r>
           </a:p>
           <a:p>
@@ -6904,7 +8898,7 @@
                 </a:solidFill>
                 <a:latin typeface="Source Serif 4"/>
               </a:rPr>
-              <a:t>"Ten minutes on it, then let's go do something."</a:t>
+              <a:t>Close friends can keep each other stuck.</a:t>
             </a:r>
           </a:p>
         </p:txBody>
@@ -6982,7 +8976,7 @@
                 </a:solidFill>
                 <a:latin typeface="Source Serif 4"/>
               </a:rPr>
-              <a:t>Turn the volume down.</a:t>
+              <a:t>Fact.</a:t>
             </a:r>
           </a:p>
           <a:p>
@@ -6998,7 +8992,7 @@
                 </a:solidFill>
                 <a:latin typeface="Source Serif 4"/>
               </a:rPr>
-              <a:t>See them less, share less.</a:t>
+              <a:t>In a driving game, much more than adults.</a:t>
             </a:r>
           </a:p>
         </p:txBody>
@@ -7076,7 +9070,7 @@
                 </a:solidFill>
                 <a:latin typeface="Source Serif 4"/>
               </a:rPr>
-              <a:t>Get an outside view.</a:t>
+              <a:t>Myth.</a:t>
             </a:r>
           </a:p>
           <a:p>
@@ -7092,7 +9086,7 @@
                 </a:solidFill>
                 <a:latin typeface="Source Serif 4"/>
               </a:rPr>
-              <a:t>An adult you trust, or a friend outside the group.</a:t>
+              <a:t>A clear boundary gives the friendship a chance to work.</a:t>
             </a:r>
           </a:p>
         </p:txBody>
@@ -7105,7 +9099,7 @@
 </p:sld>
 </file>
 
-<file path=ppt/slides/slide14.xml><?xml version="1.0" encoding="utf-8"?>
+<file path=ppt/slides/slide5.xml><?xml version="1.0" encoding="utf-8"?>
 <p:sld xmlns:a="http://schemas.openxmlformats.org/drawingml/2006/main" xmlns:p="http://schemas.openxmlformats.org/presentationml/2006/main" xmlns:r="http://schemas.openxmlformats.org/officeDocument/2006/relationships">
   <p:cSld>
     <p:bg>
@@ -7201,7 +9195,7 @@
                 </a:solidFill>
                 <a:latin typeface="Inter Tight"/>
               </a:rPr>
-              <a:t>BEFORE YOU GO</a:t>
+              <a:t>THE GOOD-NEWS TEST</a:t>
             </a:r>
           </a:p>
         </p:txBody>
@@ -7253,7 +9247,7 @@
         </p:nvSpPr>
         <p:spPr>
           <a:xfrm>
-            <a:off x="822960" y="1188720"/>
+            <a:off x="822960" y="1005840"/>
             <a:ext cx="10515600" cy="914400"/>
           </a:xfrm>
           <a:prstGeom prst="rect">
@@ -7269,70 +9263,31 @@
           <a:p>
             <a:pPr algn="l">
               <a:spcAft>
-                <a:spcPts val="1620"/>
-              </a:spcAft>
-            </a:pPr>
-            <a:r>
-              <a:rPr sz="3600" b="1" i="0">
+                <a:spcPts val="1530"/>
+              </a:spcAft>
+            </a:pPr>
+            <a:r>
+              <a:rPr sz="3400" b="1" i="0">
                 <a:solidFill>
                   <a:srgbClr val="1C1B19"/>
                 </a:solidFill>
                 <a:latin typeface="Source Serif 4"/>
               </a:rPr>
-              <a:t>Exit card</a:t>
-            </a:r>
-          </a:p>
-        </p:txBody>
-      </p:sp>
-      <p:sp>
-        <p:nvSpPr>
-          <p:cNvPr id="6" name="TextBox 5"/>
-          <p:cNvSpPr txBox="1"/>
-          <p:nvPr/>
-        </p:nvSpPr>
-        <p:spPr>
-          <a:xfrm>
-            <a:off x="822960" y="2286000"/>
-            <a:ext cx="10515600" cy="1463040"/>
-          </a:xfrm>
-          <a:prstGeom prst="rect">
-            <a:avLst/>
-          </a:prstGeom>
-          <a:noFill/>
-        </p:spPr>
-        <p:txBody>
-          <a:bodyPr wrap="square" anchor="t" lIns="0" rIns="0" tIns="0" bIns="0">
-            <a:spAutoFit/>
-          </a:bodyPr>
-          <a:lstStyle/>
-          <a:p>
-            <a:pPr algn="l">
-              <a:spcAft>
-                <a:spcPts val="1080"/>
-              </a:spcAft>
-            </a:pPr>
-            <a:r>
-              <a:rPr sz="2400" b="0" i="0">
-                <a:solidFill>
-                  <a:srgbClr val="1C1B19"/>
-                </a:solidFill>
-                <a:latin typeface="Source Serif 4"/>
-              </a:rPr>
-              <a:t>One thing you'll say, or one boundary you'll set. Or: one friend you'll pass the good-news test for this week.</a:t>
-            </a:r>
-          </a:p>
-        </p:txBody>
-      </p:sp>
-      <p:sp>
-        <p:nvSpPr>
-          <p:cNvPr id="7" name="Rectangle 6"/>
+              <a:t>You share good news. What happens next?</a:t>
+            </a:r>
+          </a:p>
+        </p:txBody>
+      </p:sp>
+      <p:sp>
+        <p:nvSpPr>
+          <p:cNvPr id="6" name="Rectangle 5"/>
           <p:cNvSpPr/>
           <p:nvPr/>
         </p:nvSpPr>
         <p:spPr>
           <a:xfrm>
-            <a:off x="822960" y="4023360"/>
-            <a:ext cx="10515600" cy="1371600"/>
+            <a:off x="822960" y="2103120"/>
+            <a:ext cx="5120640" cy="3931920"/>
           </a:xfrm>
           <a:prstGeom prst="rect">
             <a:avLst/>
@@ -7342,7 +9297,7 @@
           </a:solidFill>
           <a:ln w="15875">
             <a:solidFill>
-              <a:srgbClr val="1C1B19"/>
+              <a:srgbClr val="D8D2C6"/>
             </a:solidFill>
           </a:ln>
           <a:effectLst/>
@@ -7371,14 +9326,14 @@
       </p:sp>
       <p:sp>
         <p:nvSpPr>
-          <p:cNvPr id="8" name="TextBox 7"/>
+          <p:cNvPr id="7" name="TextBox 6"/>
           <p:cNvSpPr txBox="1"/>
           <p:nvPr/>
         </p:nvSpPr>
         <p:spPr>
           <a:xfrm>
-            <a:off x="1097280" y="4206240"/>
-            <a:ext cx="10058400" cy="365760"/>
+            <a:off x="1097280" y="2286000"/>
+            <a:ext cx="4572000" cy="457200"/>
           </a:xfrm>
           <a:prstGeom prst="rect">
             <a:avLst/>
@@ -7393,31 +9348,31 @@
           <a:p>
             <a:pPr algn="l">
               <a:spcAft>
-                <a:spcPts val="540"/>
-              </a:spcAft>
-            </a:pPr>
-            <a:r>
-              <a:rPr sz="1200" b="1" i="0">
+                <a:spcPts val="585"/>
+              </a:spcAft>
+            </a:pPr>
+            <a:r>
+              <a:rPr sz="1300" b="1" i="0">
                 <a:solidFill>
                   <a:srgbClr val="0B2D5B"/>
                 </a:solidFill>
                 <a:latin typeface="Inter Tight"/>
               </a:rPr>
-              <a:t>ON THE BVR DINER MENU</a:t>
-            </a:r>
-          </a:p>
-        </p:txBody>
-      </p:sp>
-      <p:sp>
-        <p:nvSpPr>
-          <p:cNvPr id="9" name="TextBox 8"/>
+              <a:t>LANDS</a:t>
+            </a:r>
+          </a:p>
+        </p:txBody>
+      </p:sp>
+      <p:sp>
+        <p:nvSpPr>
+          <p:cNvPr id="8" name="TextBox 7"/>
           <p:cNvSpPr txBox="1"/>
           <p:nvPr/>
         </p:nvSpPr>
         <p:spPr>
           <a:xfrm>
-            <a:off x="1097280" y="4617720"/>
-            <a:ext cx="10058400" cy="640080"/>
+            <a:off x="1097280" y="2788920"/>
+            <a:ext cx="4572000" cy="3108960"/>
           </a:xfrm>
           <a:prstGeom prst="rect">
             <a:avLst/>
@@ -7432,66 +9387,90 @@
           <a:p>
             <a:pPr algn="l">
               <a:spcAft>
-                <a:spcPts val="900"/>
-              </a:spcAft>
-            </a:pPr>
-            <a:r>
-              <a:rPr sz="2000" b="0" i="0">
+                <a:spcPts val="855"/>
+              </a:spcAft>
+            </a:pPr>
+            <a:r>
+              <a:rPr sz="1900" b="0" i="0">
                 <a:solidFill>
                   <a:srgbClr val="1C1B19"/>
                 </a:solidFill>
-                <a:latin typeface="Inter Tight"/>
-              </a:rPr>
-              <a:t>https://rmwtoolkit.github.io/bcds-toolkit/is-this-a-good-friend-high-school.html</a:t>
-            </a:r>
-          </a:p>
-        </p:txBody>
-      </p:sp>
-    </p:spTree>
-  </p:cSld>
-  <p:clrMapOvr>
-    <a:masterClrMapping/>
-  </p:clrMapOvr>
-</p:sld>
-</file>
-
-<file path=ppt/slides/slide2.xml><?xml version="1.0" encoding="utf-8"?>
-<p:sld xmlns:a="http://schemas.openxmlformats.org/drawingml/2006/main" xmlns:p="http://schemas.openxmlformats.org/presentationml/2006/main" xmlns:r="http://schemas.openxmlformats.org/officeDocument/2006/relationships" show="0">
-  <p:cSld>
-    <p:bg>
-      <p:bgPr>
-        <a:solidFill>
-          <a:srgbClr val="EEEBE4"/>
-        </a:solidFill>
-        <a:effectLst/>
-      </p:bgPr>
-    </p:bg>
-    <p:spTree>
-      <p:nvGrpSpPr>
-        <p:cNvPr id="1" name=""/>
-        <p:cNvGrpSpPr/>
-        <p:nvPr/>
-      </p:nvGrpSpPr>
-      <p:grpSpPr/>
-      <p:sp>
-        <p:nvSpPr>
-          <p:cNvPr id="2" name="Rectangle 1"/>
+                <a:latin typeface="Source Serif 4"/>
+              </a:rPr>
+              <a:t>"Wait, tell me everything."</a:t>
+            </a:r>
+          </a:p>
+          <a:p>
+            <a:pPr algn="l">
+              <a:spcAft>
+                <a:spcPts val="855"/>
+              </a:spcAft>
+            </a:pPr>
+            <a:r>
+              <a:rPr sz="1900" b="0" i="0">
+                <a:solidFill>
+                  <a:srgbClr val="1C1B19"/>
+                </a:solidFill>
+                <a:latin typeface="Source Serif 4"/>
+              </a:rPr>
+              <a:t>Asks a follow-up question</a:t>
+            </a:r>
+          </a:p>
+          <a:p>
+            <a:pPr algn="l">
+              <a:spcAft>
+                <a:spcPts val="855"/>
+              </a:spcAft>
+            </a:pPr>
+            <a:r>
+              <a:rPr sz="1900" b="0" i="0">
+                <a:solidFill>
+                  <a:srgbClr val="1C1B19"/>
+                </a:solidFill>
+                <a:latin typeface="Source Serif 4"/>
+              </a:rPr>
+              <a:t>Glad for you, no competing</a:t>
+            </a:r>
+          </a:p>
+          <a:p>
+            <a:pPr algn="l">
+              <a:spcAft>
+                <a:spcPts val="855"/>
+              </a:spcAft>
+            </a:pPr>
+            <a:r>
+              <a:rPr sz="1900" b="0" i="0">
+                <a:solidFill>
+                  <a:srgbClr val="1C1B19"/>
+                </a:solidFill>
+                <a:latin typeface="Source Serif 4"/>
+              </a:rPr>
+              <a:t>Brings it up again later</a:t>
+            </a:r>
+          </a:p>
+        </p:txBody>
+      </p:sp>
+      <p:sp>
+        <p:nvSpPr>
+          <p:cNvPr id="9" name="Rectangle 8"/>
           <p:cNvSpPr/>
           <p:nvPr/>
         </p:nvSpPr>
         <p:spPr>
           <a:xfrm>
-            <a:off x="0" y="0"/>
-            <a:ext cx="12191695" cy="384048"/>
+            <a:off x="6309360" y="2103120"/>
+            <a:ext cx="5120640" cy="3931920"/>
           </a:xfrm>
           <a:prstGeom prst="rect">
             <a:avLst/>
           </a:prstGeom>
           <a:solidFill>
-            <a:srgbClr val="0B2D5B"/>
+            <a:srgbClr val="FFFFFF"/>
           </a:solidFill>
-          <a:ln>
-            <a:noFill/>
+          <a:ln w="15875">
+            <a:solidFill>
+              <a:srgbClr val="D8D2C6"/>
+            </a:solidFill>
           </a:ln>
           <a:effectLst/>
         </p:spPr>
@@ -7519,14 +9498,14 @@
       </p:sp>
       <p:sp>
         <p:nvSpPr>
-          <p:cNvPr id="3" name="TextBox 2"/>
+          <p:cNvPr id="10" name="TextBox 9"/>
           <p:cNvSpPr txBox="1"/>
           <p:nvPr/>
         </p:nvSpPr>
         <p:spPr>
           <a:xfrm>
-            <a:off x="548640" y="100584"/>
-            <a:ext cx="10972800" cy="274320"/>
+            <a:off x="6583680" y="2286000"/>
+            <a:ext cx="4572000" cy="457200"/>
           </a:xfrm>
           <a:prstGeom prst="rect">
             <a:avLst/>
@@ -7541,31 +9520,31 @@
           <a:p>
             <a:pPr algn="l">
               <a:spcAft>
-                <a:spcPts val="495"/>
-              </a:spcAft>
-            </a:pPr>
-            <a:r>
-              <a:rPr sz="1100" b="1" i="0">
-                <a:solidFill>
-                  <a:srgbClr val="FFFFFF"/>
+                <a:spcPts val="585"/>
+              </a:spcAft>
+            </a:pPr>
+            <a:r>
+              <a:rPr sz="1300" b="1" i="0">
+                <a:solidFill>
+                  <a:srgbClr val="0B2D5B"/>
                 </a:solidFill>
                 <a:latin typeface="Inter Tight"/>
               </a:rPr>
-              <a:t>TEACHER PAGE  ·  skipped when you present  ·  Before you teach</a:t>
-            </a:r>
-          </a:p>
-        </p:txBody>
-      </p:sp>
-      <p:sp>
-        <p:nvSpPr>
-          <p:cNvPr id="4" name="TextBox 3"/>
+              <a:t>MISSES</a:t>
+            </a:r>
+          </a:p>
+        </p:txBody>
+      </p:sp>
+      <p:sp>
+        <p:nvSpPr>
+          <p:cNvPr id="11" name="TextBox 10"/>
           <p:cNvSpPr txBox="1"/>
           <p:nvPr/>
         </p:nvSpPr>
         <p:spPr>
           <a:xfrm>
-            <a:off x="548640" y="685800"/>
-            <a:ext cx="10972800" cy="640080"/>
+            <a:off x="6583680" y="2788920"/>
+            <a:ext cx="4572000" cy="3108960"/>
           </a:xfrm>
           <a:prstGeom prst="rect">
             <a:avLst/>
@@ -7580,1523 +9559,65 @@
           <a:p>
             <a:pPr algn="l">
               <a:spcAft>
-                <a:spcPts val="1350"/>
-              </a:spcAft>
-            </a:pPr>
-            <a:r>
-              <a:rPr sz="3000" b="1" i="0">
+                <a:spcPts val="855"/>
+              </a:spcAft>
+            </a:pPr>
+            <a:r>
+              <a:rPr sz="1900" b="0" i="0">
                 <a:solidFill>
                   <a:srgbClr val="1C1B19"/>
                 </a:solidFill>
                 <a:latin typeface="Source Serif 4"/>
               </a:rPr>
-              <a:t>Before you teach</a:t>
-            </a:r>
-          </a:p>
-        </p:txBody>
-      </p:sp>
-      <p:sp>
-        <p:nvSpPr>
-          <p:cNvPr id="5" name="TextBox 4"/>
-          <p:cNvSpPr txBox="1"/>
-          <p:nvPr/>
-        </p:nvSpPr>
-        <p:spPr>
-          <a:xfrm>
-            <a:off x="548640" y="1463040"/>
-            <a:ext cx="5394960" cy="4937760"/>
-          </a:xfrm>
-          <a:prstGeom prst="rect">
-            <a:avLst/>
-          </a:prstGeom>
-          <a:noFill/>
-        </p:spPr>
-        <p:txBody>
-          <a:bodyPr wrap="square" anchor="t" lIns="0" rIns="0" tIns="0" bIns="0">
-            <a:spAutoFit/>
-          </a:bodyPr>
-          <a:lstStyle/>
-          <a:p>
-            <a:pPr algn="l">
-              <a:spcAft>
-                <a:spcPts val="585"/>
-              </a:spcAft>
-            </a:pPr>
-            <a:r>
-              <a:rPr sz="1500" b="1" i="0">
+              <a:t>A shrug, or "cool"</a:t>
+            </a:r>
+          </a:p>
+          <a:p>
+            <a:pPr algn="l">
+              <a:spcAft>
+                <a:spcPts val="855"/>
+              </a:spcAft>
+            </a:pPr>
+            <a:r>
+              <a:rPr sz="1900" b="0" i="0">
                 <a:solidFill>
                   <a:srgbClr val="1C1B19"/>
                 </a:solidFill>
                 <a:latin typeface="Source Serif 4"/>
               </a:rPr>
-              <a:t>Friends are sitting in the same room.</a:t>
-            </a:r>
-          </a:p>
-          <a:p>
-            <a:pPr algn="l">
-              <a:spcAft>
-                <a:spcPts val="585"/>
-              </a:spcAft>
-            </a:pPr>
-            <a:r>
-              <a:rPr sz="1300" b="0" i="0">
+              <a:t>Pokes holes in it</a:t>
+            </a:r>
+          </a:p>
+          <a:p>
+            <a:pPr algn="l">
+              <a:spcAft>
+                <a:spcPts val="855"/>
+              </a:spcAft>
+            </a:pPr>
+            <a:r>
+              <a:rPr sz="1900" b="0" i="0">
                 <a:solidFill>
                   <a:srgbClr val="1C1B19"/>
                 </a:solidFill>
                 <a:latin typeface="Source Serif 4"/>
               </a:rPr>
-              <a:t>The friend a student is thinking about may be two desks away. No names, initials, or stories about real friendships, in pairs or out loud. The flag check stays on a card that goes home.</a:t>
-            </a:r>
-          </a:p>
-          <a:p>
-            <a:pPr algn="l">
-              <a:spcAft>
-                <a:spcPts val="585"/>
-              </a:spcAft>
-            </a:pPr>
-            <a:r>
-              <a:rPr sz="1300" b="0" i="0">
+              <a:t>Turns it into their story</a:t>
+            </a:r>
+          </a:p>
+          <a:p>
+            <a:pPr algn="l">
+              <a:spcAft>
+                <a:spcPts val="855"/>
+              </a:spcAft>
+            </a:pPr>
+            <a:r>
+              <a:rPr sz="1900" b="0" i="0">
                 <a:solidFill>
                   <a:srgbClr val="1C1B19"/>
                 </a:solidFill>
                 <a:latin typeface="Source Serif 4"/>
               </a:rPr>
-              <a:t/>
-            </a:r>
-          </a:p>
-          <a:p>
-            <a:pPr algn="l">
-              <a:spcAft>
-                <a:spcPts val="585"/>
-              </a:spcAft>
-            </a:pPr>
-            <a:r>
-              <a:rPr sz="1500" b="1" i="0">
-                <a:solidFill>
-                  <a:srgbClr val="1C1B19"/>
-                </a:solidFill>
-                <a:latin typeface="Source Serif 4"/>
-              </a:rPr>
-              <a:t>Steer away from "toxic" and "cut them off."</a:t>
-            </a:r>
-          </a:p>
-          <a:p>
-            <a:pPr algn="l">
-              <a:spcAft>
-                <a:spcPts val="585"/>
-              </a:spcAft>
-            </a:pPr>
-            <a:r>
-              <a:rPr sz="1300" b="0" i="0">
-                <a:solidFill>
-                  <a:srgbClr val="1C1B19"/>
-                </a:solidFill>
-                <a:latin typeface="Source Serif 4"/>
-              </a:rPr>
-              <a:t>Most friendships in the gray zone are worth adjusting, and many 9th graders have one or two friends to lose. The research supports judging patterns over months and changing the friendship before ending it.</a:t>
-            </a:r>
-          </a:p>
-          <a:p>
-            <a:pPr algn="l">
-              <a:spcAft>
-                <a:spcPts val="585"/>
-              </a:spcAft>
-            </a:pPr>
-            <a:r>
-              <a:rPr sz="1300" b="0" i="0">
-                <a:solidFill>
-                  <a:srgbClr val="1C1B19"/>
-                </a:solidFill>
-                <a:latin typeface="Source Serif 4"/>
-              </a:rPr>
-              <a:t/>
-            </a:r>
-          </a:p>
-          <a:p>
-            <a:pPr algn="l">
-              <a:spcAft>
-                <a:spcPts val="585"/>
-              </a:spcAft>
-            </a:pPr>
-            <a:r>
-              <a:rPr sz="1500" b="1" i="0">
-                <a:solidFill>
-                  <a:srgbClr val="1C1B19"/>
-                </a:solidFill>
-                <a:latin typeface="Source Serif 4"/>
-              </a:rPr>
-              <a:t>Some red flags are an adult's job.</a:t>
-            </a:r>
-          </a:p>
-          <a:p>
-            <a:pPr algn="l">
-              <a:spcAft>
-                <a:spcPts val="585"/>
-              </a:spcAft>
-            </a:pPr>
-            <a:r>
-              <a:rPr sz="1300" b="0" i="0">
-                <a:solidFill>
-                  <a:srgbClr val="1C1B19"/>
-                </a:solidFill>
-                <a:latin typeface="Source Serif 4"/>
-              </a:rPr>
-              <a:t>Threats to share secrets, screenshots, or photos to control someone, threats to hurt anyone, pressure into unsafe things, or getting others to gang up: thank the student and connect them with a counselor that day. For sexual images of anyone under 18, the free Take It Down tool from the National Center for Missing &amp; Exploited Children can help get them removed.</a:t>
-            </a:r>
-          </a:p>
-          <a:p>
-            <a:pPr algn="l">
-              <a:spcAft>
-                <a:spcPts val="585"/>
-              </a:spcAft>
-            </a:pPr>
-            <a:r>
-              <a:rPr sz="1300" b="0" i="0">
-                <a:solidFill>
-                  <a:srgbClr val="1C1B19"/>
-                </a:solidFill>
-                <a:latin typeface="Source Serif 4"/>
-              </a:rPr>
-              <a:t/>
-            </a:r>
-          </a:p>
-        </p:txBody>
-      </p:sp>
-      <p:sp>
-        <p:nvSpPr>
-          <p:cNvPr id="6" name="TextBox 5"/>
-          <p:cNvSpPr txBox="1"/>
-          <p:nvPr/>
-        </p:nvSpPr>
-        <p:spPr>
-          <a:xfrm>
-            <a:off x="6217920" y="1463040"/>
-            <a:ext cx="5394960" cy="4937760"/>
-          </a:xfrm>
-          <a:prstGeom prst="rect">
-            <a:avLst/>
-          </a:prstGeom>
-          <a:noFill/>
-        </p:spPr>
-        <p:txBody>
-          <a:bodyPr wrap="square" anchor="t" lIns="0" rIns="0" tIns="0" bIns="0">
-            <a:spAutoFit/>
-          </a:bodyPr>
-          <a:lstStyle/>
-          <a:p>
-            <a:pPr algn="l">
-              <a:spcAft>
-                <a:spcPts val="585"/>
-              </a:spcAft>
-            </a:pPr>
-            <a:r>
-              <a:rPr sz="1500" b="1" i="0">
-                <a:solidFill>
-                  <a:srgbClr val="1C1B19"/>
-                </a:solidFill>
-                <a:latin typeface="Source Serif 4"/>
-              </a:rPr>
-              <a:t>If a student says a friend talks about hurting themselves.</a:t>
-            </a:r>
-          </a:p>
-          <a:p>
-            <a:pPr algn="l">
-              <a:spcAft>
-                <a:spcPts val="585"/>
-              </a:spcAft>
-            </a:pPr>
-            <a:r>
-              <a:rPr sz="1300" b="0" i="0">
-                <a:solidFill>
-                  <a:srgbClr val="1C1B19"/>
-                </a:solidFill>
-                <a:latin typeface="Source Serif 4"/>
-              </a:rPr>
-              <a:t>That goes to a counselor right away, and the student should hear that telling is looking out for the friend. Don't discuss it in front of the class.</a:t>
-            </a:r>
-          </a:p>
-          <a:p>
-            <a:pPr algn="l">
-              <a:spcAft>
-                <a:spcPts val="585"/>
-              </a:spcAft>
-            </a:pPr>
-            <a:r>
-              <a:rPr sz="1300" b="0" i="0">
-                <a:solidFill>
-                  <a:srgbClr val="1C1B19"/>
-                </a:solidFill>
-                <a:latin typeface="Source Serif 4"/>
-              </a:rPr>
-              <a:t/>
-            </a:r>
-          </a:p>
-          <a:p>
-            <a:pPr algn="l">
-              <a:spcAft>
-                <a:spcPts val="585"/>
-              </a:spcAft>
-            </a:pPr>
-            <a:r>
-              <a:rPr sz="1500" b="1" i="0">
-                <a:solidFill>
-                  <a:srgbClr val="1C1B19"/>
-                </a:solidFill>
-                <a:latin typeface="Source Serif 4"/>
-              </a:rPr>
-              <a:t>Co-rumination is a kind friend's habit.</a:t>
-            </a:r>
-          </a:p>
-          <a:p>
-            <a:pPr algn="l">
-              <a:spcAft>
-                <a:spcPts val="585"/>
-              </a:spcAft>
-            </a:pPr>
-            <a:r>
-              <a:rPr sz="1300" b="0" i="0">
-                <a:solidFill>
-                  <a:srgbClr val="1C1B19"/>
-                </a:solidFill>
-                <a:latin typeface="Source Serif 4"/>
-              </a:rPr>
-              <a:t>Students who talk a friend through every problem are trying to help. Present the ten-minute limit as a better way to help, and keep blame out of it. If what's being replayed sounds like more than ordinary stress, point both students to a counselor.</a:t>
-            </a:r>
-          </a:p>
-          <a:p>
-            <a:pPr algn="l">
-              <a:spcAft>
-                <a:spcPts val="585"/>
-              </a:spcAft>
-            </a:pPr>
-            <a:r>
-              <a:rPr sz="1300" b="0" i="0">
-                <a:solidFill>
-                  <a:srgbClr val="1C1B19"/>
-                </a:solidFill>
-                <a:latin typeface="Source Serif 4"/>
-              </a:rPr>
-              <a:t/>
-            </a:r>
-          </a:p>
-          <a:p>
-            <a:pPr algn="l">
-              <a:spcAft>
-                <a:spcPts val="585"/>
-              </a:spcAft>
-            </a:pPr>
-            <a:r>
-              <a:rPr sz="1500" b="1" i="0">
-                <a:solidFill>
-                  <a:srgbClr val="1C1B19"/>
-                </a:solidFill>
-                <a:latin typeface="Source Serif 4"/>
-              </a:rPr>
-              <a:t>Dating comes up.</a:t>
-            </a:r>
-          </a:p>
-          <a:p>
-            <a:pPr algn="l">
-              <a:spcAft>
-                <a:spcPts val="585"/>
-              </a:spcAft>
-            </a:pPr>
-            <a:r>
-              <a:rPr sz="1300" b="0" i="0">
-                <a:solidFill>
-                  <a:srgbClr val="1C1B19"/>
-                </a:solidFill>
-                <a:latin typeface="Source Serif 4"/>
-              </a:rPr>
-              <a:t>Tracking, phone checks, and jealousy show up in dating too. The same flags apply. Keep examples to "someone you're close to" or "someone you like" without assuming genders.</a:t>
-            </a:r>
-          </a:p>
-          <a:p>
-            <a:pPr algn="l">
-              <a:spcAft>
-                <a:spcPts val="585"/>
-              </a:spcAft>
-            </a:pPr>
-            <a:r>
-              <a:rPr sz="1300" b="0" i="0">
-                <a:solidFill>
-                  <a:srgbClr val="1C1B19"/>
-                </a:solidFill>
-                <a:latin typeface="Source Serif 4"/>
-              </a:rPr>
-              <a:t/>
-            </a:r>
-          </a:p>
-        </p:txBody>
-      </p:sp>
-    </p:spTree>
-  </p:cSld>
-  <p:clrMapOvr>
-    <a:masterClrMapping/>
-  </p:clrMapOvr>
-</p:sld>
-</file>
-
-<file path=ppt/slides/slide3.xml><?xml version="1.0" encoding="utf-8"?>
-<p:sld xmlns:a="http://schemas.openxmlformats.org/drawingml/2006/main" xmlns:p="http://schemas.openxmlformats.org/presentationml/2006/main" xmlns:r="http://schemas.openxmlformats.org/officeDocument/2006/relationships" show="0">
-  <p:cSld>
-    <p:bg>
-      <p:bgPr>
-        <a:solidFill>
-          <a:srgbClr val="EEEBE4"/>
-        </a:solidFill>
-        <a:effectLst/>
-      </p:bgPr>
-    </p:bg>
-    <p:spTree>
-      <p:nvGrpSpPr>
-        <p:cNvPr id="1" name=""/>
-        <p:cNvGrpSpPr/>
-        <p:nvPr/>
-      </p:nvGrpSpPr>
-      <p:grpSpPr/>
-      <p:sp>
-        <p:nvSpPr>
-          <p:cNvPr id="2" name="Rectangle 1"/>
-          <p:cNvSpPr/>
-          <p:nvPr/>
-        </p:nvSpPr>
-        <p:spPr>
-          <a:xfrm>
-            <a:off x="0" y="0"/>
-            <a:ext cx="12191695" cy="384048"/>
-          </a:xfrm>
-          <a:prstGeom prst="rect">
-            <a:avLst/>
-          </a:prstGeom>
-          <a:solidFill>
-            <a:srgbClr val="0B2D5B"/>
-          </a:solidFill>
-          <a:ln>
-            <a:noFill/>
-          </a:ln>
-          <a:effectLst/>
-        </p:spPr>
-        <p:style>
-          <a:lnRef idx="1">
-            <a:schemeClr val="accent1"/>
-          </a:lnRef>
-          <a:fillRef idx="3">
-            <a:schemeClr val="accent1"/>
-          </a:fillRef>
-          <a:effectRef idx="2">
-            <a:schemeClr val="accent1"/>
-          </a:effectRef>
-          <a:fontRef idx="minor">
-            <a:schemeClr val="lt1"/>
-          </a:fontRef>
-        </p:style>
-        <p:txBody>
-          <a:bodyPr rtlCol="0" anchor="ctr"/>
-          <a:lstStyle/>
-          <a:p>
-            <a:pPr algn="ctr"/>
-          </a:p>
-        </p:txBody>
-      </p:sp>
-      <p:sp>
-        <p:nvSpPr>
-          <p:cNvPr id="3" name="TextBox 2"/>
-          <p:cNvSpPr txBox="1"/>
-          <p:nvPr/>
-        </p:nvSpPr>
-        <p:spPr>
-          <a:xfrm>
-            <a:off x="548640" y="100584"/>
-            <a:ext cx="10972800" cy="274320"/>
-          </a:xfrm>
-          <a:prstGeom prst="rect">
-            <a:avLst/>
-          </a:prstGeom>
-          <a:noFill/>
-        </p:spPr>
-        <p:txBody>
-          <a:bodyPr wrap="square" anchor="t" lIns="0" rIns="0" tIns="0" bIns="0">
-            <a:spAutoFit/>
-          </a:bodyPr>
-          <a:lstStyle/>
-          <a:p>
-            <a:pPr algn="l">
-              <a:spcAft>
-                <a:spcPts val="495"/>
-              </a:spcAft>
-            </a:pPr>
-            <a:r>
-              <a:rPr sz="1100" b="1" i="0">
-                <a:solidFill>
-                  <a:srgbClr val="FFFFFF"/>
-                </a:solidFill>
-                <a:latin typeface="Inter Tight"/>
-              </a:rPr>
-              <a:t>TEACHER PAGE  ·  skipped when you present  ·  Every student in the room</a:t>
-            </a:r>
-          </a:p>
-        </p:txBody>
-      </p:sp>
-      <p:sp>
-        <p:nvSpPr>
-          <p:cNvPr id="4" name="TextBox 3"/>
-          <p:cNvSpPr txBox="1"/>
-          <p:nvPr/>
-        </p:nvSpPr>
-        <p:spPr>
-          <a:xfrm>
-            <a:off x="548640" y="685800"/>
-            <a:ext cx="10972800" cy="640080"/>
-          </a:xfrm>
-          <a:prstGeom prst="rect">
-            <a:avLst/>
-          </a:prstGeom>
-          <a:noFill/>
-        </p:spPr>
-        <p:txBody>
-          <a:bodyPr wrap="square" anchor="t" lIns="0" rIns="0" tIns="0" bIns="0">
-            <a:spAutoFit/>
-          </a:bodyPr>
-          <a:lstStyle/>
-          <a:p>
-            <a:pPr algn="l">
-              <a:spcAft>
-                <a:spcPts val="1350"/>
-              </a:spcAft>
-            </a:pPr>
-            <a:r>
-              <a:rPr sz="3000" b="1" i="0">
-                <a:solidFill>
-                  <a:srgbClr val="1C1B19"/>
-                </a:solidFill>
-                <a:latin typeface="Source Serif 4"/>
-              </a:rPr>
-              <a:t>Every student in the room</a:t>
-            </a:r>
-          </a:p>
-        </p:txBody>
-      </p:sp>
-      <p:sp>
-        <p:nvSpPr>
-          <p:cNvPr id="5" name="TextBox 4"/>
-          <p:cNvSpPr txBox="1"/>
-          <p:nvPr/>
-        </p:nvSpPr>
-        <p:spPr>
-          <a:xfrm>
-            <a:off x="548640" y="1325880"/>
-            <a:ext cx="10972800" cy="365760"/>
-          </a:xfrm>
-          <a:prstGeom prst="rect">
-            <a:avLst/>
-          </a:prstGeom>
-          <a:noFill/>
-        </p:spPr>
-        <p:txBody>
-          <a:bodyPr wrap="square" anchor="t" lIns="0" rIns="0" tIns="0" bIns="0">
-            <a:spAutoFit/>
-          </a:bodyPr>
-          <a:lstStyle/>
-          <a:p>
-            <a:pPr algn="l">
-              <a:spcAft>
-                <a:spcPts val="630"/>
-              </a:spcAft>
-            </a:pPr>
-            <a:r>
-              <a:rPr sz="1400" b="0" i="0">
-                <a:solidFill>
-                  <a:srgbClr val="5D5A54"/>
-                </a:solidFill>
-                <a:latin typeface="Inter Tight"/>
-              </a:rPr>
-              <a:t>Culture, family, identity, ability and money: what to keep in mind for this topic.</a:t>
-            </a:r>
-          </a:p>
-        </p:txBody>
-      </p:sp>
-      <p:sp>
-        <p:nvSpPr>
-          <p:cNvPr id="6" name="TextBox 5"/>
-          <p:cNvSpPr txBox="1"/>
-          <p:nvPr/>
-        </p:nvSpPr>
-        <p:spPr>
-          <a:xfrm>
-            <a:off x="548640" y="1828800"/>
-            <a:ext cx="5394960" cy="4572000"/>
-          </a:xfrm>
-          <a:prstGeom prst="rect">
-            <a:avLst/>
-          </a:prstGeom>
-          <a:noFill/>
-        </p:spPr>
-        <p:txBody>
-          <a:bodyPr wrap="square" anchor="t" lIns="0" rIns="0" tIns="0" bIns="0">
-            <a:spAutoFit/>
-          </a:bodyPr>
-          <a:lstStyle/>
-          <a:p>
-            <a:pPr algn="l">
-              <a:spcAft>
-                <a:spcPts val="585"/>
-              </a:spcAft>
-            </a:pPr>
-            <a:r>
-              <a:rPr sz="1500" b="1" i="0">
-                <a:solidFill>
-                  <a:srgbClr val="1C1B19"/>
-                </a:solidFill>
-                <a:latin typeface="Source Serif 4"/>
-              </a:rPr>
-              <a:t>What a good friend looks like varies.</a:t>
-            </a:r>
-          </a:p>
-          <a:p>
-            <a:pPr algn="l">
-              <a:spcAft>
-                <a:spcPts val="585"/>
-              </a:spcAft>
-            </a:pPr>
-            <a:r>
-              <a:rPr sz="1300" b="0" i="0">
-                <a:solidFill>
-                  <a:srgbClr val="1C1B19"/>
-                </a:solidFill>
-                <a:latin typeface="Source Serif 4"/>
-              </a:rPr>
-              <a:t>In some families and cultures close friends are treated like family: constant contact, showing up unannounced, sharing almost everything. In others more privacy is normal. Neither is wrong. Ask students what a good friend looks like where they come from instead of naming one norm as healthy.</a:t>
-            </a:r>
-          </a:p>
-          <a:p>
-            <a:pPr algn="l">
-              <a:spcAft>
-                <a:spcPts val="585"/>
-              </a:spcAft>
-            </a:pPr>
-            <a:r>
-              <a:rPr sz="1300" b="0" i="0">
-                <a:solidFill>
-                  <a:srgbClr val="1C1B19"/>
-                </a:solidFill>
-                <a:latin typeface="Source Serif 4"/>
-              </a:rPr>
-              <a:t/>
-            </a:r>
-          </a:p>
-          <a:p>
-            <a:pPr algn="l">
-              <a:spcAft>
-                <a:spcPts val="585"/>
-              </a:spcAft>
-            </a:pPr>
-            <a:r>
-              <a:rPr sz="1500" b="1" i="0">
-                <a:solidFill>
-                  <a:srgbClr val="1C1B19"/>
-                </a:solidFill>
-                <a:latin typeface="Source Serif 4"/>
-              </a:rPr>
-              <a:t>Accent jokes are a real red flag.</a:t>
-            </a:r>
-          </a:p>
-          <a:p>
-            <a:pPr algn="l">
-              <a:spcAft>
-                <a:spcPts val="585"/>
-              </a:spcAft>
-            </a:pPr>
-            <a:r>
-              <a:rPr sz="1300" b="0" i="0">
-                <a:solidFill>
-                  <a:srgbClr val="1C1B19"/>
-                </a:solidFill>
-                <a:latin typeface="Source Serif 4"/>
-              </a:rPr>
-              <a:t>The Imani card is about a joke about someone's accent. Students who speak another language at home, or are new to the country, hear these often. Name it as a put-down that hits a sore spot, and treat Imani's private feedback as the green flag.</a:t>
-            </a:r>
-          </a:p>
-          <a:p>
-            <a:pPr algn="l">
-              <a:spcAft>
-                <a:spcPts val="585"/>
-              </a:spcAft>
-            </a:pPr>
-            <a:r>
-              <a:rPr sz="1300" b="0" i="0">
-                <a:solidFill>
-                  <a:srgbClr val="1C1B19"/>
-                </a:solidFill>
-                <a:latin typeface="Source Serif 4"/>
-              </a:rPr>
-              <a:t/>
-            </a:r>
-          </a:p>
-          <a:p>
-            <a:pPr algn="l">
-              <a:spcAft>
-                <a:spcPts val="585"/>
-              </a:spcAft>
-            </a:pPr>
-            <a:r>
-              <a:rPr sz="1500" b="1" i="0">
-                <a:solidFill>
-                  <a:srgbClr val="1C1B19"/>
-                </a:solidFill>
-                <a:latin typeface="Source Serif 4"/>
-              </a:rPr>
-              <a:t>LGBTQ+ students and secrets held over them.</a:t>
-            </a:r>
-          </a:p>
-          <a:p>
-            <a:pPr algn="l">
-              <a:spcAft>
-                <a:spcPts val="585"/>
-              </a:spcAft>
-            </a:pPr>
-            <a:r>
-              <a:rPr sz="1300" b="0" i="0">
-                <a:solidFill>
-                  <a:srgbClr val="1C1B19"/>
-                </a:solidFill>
-                <a:latin typeface="Source Serif 4"/>
-              </a:rPr>
-              <a:t>"I'll tell people" can mean threatening to out someone. That's the controller pattern and a counselor conversation that day. Students who aren't out may need a safe adult other than family. The Trevor Project (call 1-866-488-7386 or text START to 678-678) is free.</a:t>
-            </a:r>
-          </a:p>
-          <a:p>
-            <a:pPr algn="l">
-              <a:spcAft>
-                <a:spcPts val="585"/>
-              </a:spcAft>
-            </a:pPr>
-            <a:r>
-              <a:rPr sz="1300" b="0" i="0">
-                <a:solidFill>
-                  <a:srgbClr val="1C1B19"/>
-                </a:solidFill>
-                <a:latin typeface="Source Serif 4"/>
-              </a:rPr>
-              <a:t/>
-            </a:r>
-          </a:p>
-        </p:txBody>
-      </p:sp>
-      <p:sp>
-        <p:nvSpPr>
-          <p:cNvPr id="7" name="TextBox 6"/>
-          <p:cNvSpPr txBox="1"/>
-          <p:nvPr/>
-        </p:nvSpPr>
-        <p:spPr>
-          <a:xfrm>
-            <a:off x="6217920" y="1828800"/>
-            <a:ext cx="5394960" cy="4572000"/>
-          </a:xfrm>
-          <a:prstGeom prst="rect">
-            <a:avLst/>
-          </a:prstGeom>
-          <a:noFill/>
-        </p:spPr>
-        <p:txBody>
-          <a:bodyPr wrap="square" anchor="t" lIns="0" rIns="0" tIns="0" bIns="0">
-            <a:spAutoFit/>
-          </a:bodyPr>
-          <a:lstStyle/>
-          <a:p>
-            <a:pPr algn="l">
-              <a:spcAft>
-                <a:spcPts val="585"/>
-              </a:spcAft>
-            </a:pPr>
-            <a:r>
-              <a:rPr sz="1500" b="1" i="0">
-                <a:solidFill>
-                  <a:srgbClr val="1C1B19"/>
-                </a:solidFill>
-                <a:latin typeface="Source Serif 4"/>
-              </a:rPr>
-              <a:t>Reading social cues comes harder for some students.</a:t>
-            </a:r>
-          </a:p>
-          <a:p>
-            <a:pPr algn="l">
-              <a:spcAft>
-                <a:spcPts val="585"/>
-              </a:spcAft>
-            </a:pPr>
-            <a:r>
-              <a:rPr sz="1300" b="0" i="0">
-                <a:solidFill>
-                  <a:srgbClr val="1C1B19"/>
-                </a:solidFill>
-                <a:latin typeface="Source Serif 4"/>
-              </a:rPr>
-              <a:t>Autistic students and others who find tone hard to read may miss when a joke has turned into a put-down, or be the target of "jokes" more often. The green and red flags give them concrete checks. Never treat eye contact or being outgoing as the sign of a good friend.</a:t>
-            </a:r>
-          </a:p>
-          <a:p>
-            <a:pPr algn="l">
-              <a:spcAft>
-                <a:spcPts val="585"/>
-              </a:spcAft>
-            </a:pPr>
-            <a:r>
-              <a:rPr sz="1300" b="0" i="0">
-                <a:solidFill>
-                  <a:srgbClr val="1C1B19"/>
-                </a:solidFill>
-                <a:latin typeface="Source Serif 4"/>
-              </a:rPr>
-              <a:t/>
-            </a:r>
-          </a:p>
-          <a:p>
-            <a:pPr algn="l">
-              <a:spcAft>
-                <a:spcPts val="585"/>
-              </a:spcAft>
-            </a:pPr>
-            <a:r>
-              <a:rPr sz="1500" b="1" i="0">
-                <a:solidFill>
-                  <a:srgbClr val="1C1B19"/>
-                </a:solidFill>
-                <a:latin typeface="Source Serif 4"/>
-              </a:rPr>
-              <a:t>The outside view comes from anyone trusted.</a:t>
-            </a:r>
-          </a:p>
-          <a:p>
-            <a:pPr algn="l">
-              <a:spcAft>
-                <a:spcPts val="585"/>
-              </a:spcAft>
-            </a:pPr>
-            <a:r>
-              <a:rPr sz="1300" b="0" i="0">
-                <a:solidFill>
-                  <a:srgbClr val="1C1B19"/>
-                </a:solidFill>
-                <a:latin typeface="Source Serif 4"/>
-              </a:rPr>
-              <a:t>"A parent or older sibling" doesn't fit every home. Say "an adult you trust": a grandparent, an aunt, a coach, a foster parent, a counselor, someone at a faith community, or a friend outside the group.</a:t>
-            </a:r>
-          </a:p>
-          <a:p>
-            <a:pPr algn="l">
-              <a:spcAft>
-                <a:spcPts val="585"/>
-              </a:spcAft>
-            </a:pPr>
-            <a:r>
-              <a:rPr sz="1300" b="0" i="0">
-                <a:solidFill>
-                  <a:srgbClr val="1C1B19"/>
-                </a:solidFill>
-                <a:latin typeface="Source Serif 4"/>
-              </a:rPr>
-              <a:t/>
-            </a:r>
-          </a:p>
-          <a:p>
-            <a:pPr algn="l">
-              <a:spcAft>
-                <a:spcPts val="585"/>
-              </a:spcAft>
-            </a:pPr>
-            <a:r>
-              <a:rPr sz="1500" b="1" i="0">
-                <a:solidFill>
-                  <a:srgbClr val="1C1B19"/>
-                </a:solidFill>
-                <a:latin typeface="Source Serif 4"/>
-              </a:rPr>
-              <a:t>Money shows up in put-downs and plans.</a:t>
-            </a:r>
-          </a:p>
-          <a:p>
-            <a:pPr algn="l">
-              <a:spcAft>
-                <a:spcPts val="585"/>
-              </a:spcAft>
-            </a:pPr>
-            <a:r>
-              <a:rPr sz="1300" b="0" i="0">
-                <a:solidFill>
-                  <a:srgbClr val="1C1B19"/>
-                </a:solidFill>
-                <a:latin typeface="Source Serif 4"/>
-              </a:rPr>
-              <a:t>Jokes about clothes, phones, or where someone lives hit students with less money hardest. And "turn the volume down" can simply mean skipping the plans that cost money and putting time into free ones with people who leave you better off.</a:t>
-            </a:r>
-          </a:p>
-          <a:p>
-            <a:pPr algn="l">
-              <a:spcAft>
-                <a:spcPts val="585"/>
-              </a:spcAft>
-            </a:pPr>
-            <a:r>
-              <a:rPr sz="1300" b="0" i="0">
-                <a:solidFill>
-                  <a:srgbClr val="1C1B19"/>
-                </a:solidFill>
-                <a:latin typeface="Source Serif 4"/>
-              </a:rPr>
-              <a:t/>
-            </a:r>
-          </a:p>
-        </p:txBody>
-      </p:sp>
-    </p:spTree>
-  </p:cSld>
-  <p:clrMapOvr>
-    <a:masterClrMapping/>
-  </p:clrMapOvr>
-</p:sld>
-</file>
-
-<file path=ppt/slides/slide4.xml><?xml version="1.0" encoding="utf-8"?>
-<p:sld xmlns:a="http://schemas.openxmlformats.org/drawingml/2006/main" xmlns:p="http://schemas.openxmlformats.org/presentationml/2006/main" xmlns:r="http://schemas.openxmlformats.org/officeDocument/2006/relationships" show="0">
-  <p:cSld>
-    <p:bg>
-      <p:bgPr>
-        <a:solidFill>
-          <a:srgbClr val="EEEBE4"/>
-        </a:solidFill>
-        <a:effectLst/>
-      </p:bgPr>
-    </p:bg>
-    <p:spTree>
-      <p:nvGrpSpPr>
-        <p:cNvPr id="1" name=""/>
-        <p:cNvGrpSpPr/>
-        <p:nvPr/>
-      </p:nvGrpSpPr>
-      <p:grpSpPr/>
-      <p:sp>
-        <p:nvSpPr>
-          <p:cNvPr id="2" name="Rectangle 1"/>
-          <p:cNvSpPr/>
-          <p:nvPr/>
-        </p:nvSpPr>
-        <p:spPr>
-          <a:xfrm>
-            <a:off x="0" y="0"/>
-            <a:ext cx="12191695" cy="384048"/>
-          </a:xfrm>
-          <a:prstGeom prst="rect">
-            <a:avLst/>
-          </a:prstGeom>
-          <a:solidFill>
-            <a:srgbClr val="0B2D5B"/>
-          </a:solidFill>
-          <a:ln>
-            <a:noFill/>
-          </a:ln>
-          <a:effectLst/>
-        </p:spPr>
-        <p:style>
-          <a:lnRef idx="1">
-            <a:schemeClr val="accent1"/>
-          </a:lnRef>
-          <a:fillRef idx="3">
-            <a:schemeClr val="accent1"/>
-          </a:fillRef>
-          <a:effectRef idx="2">
-            <a:schemeClr val="accent1"/>
-          </a:effectRef>
-          <a:fontRef idx="minor">
-            <a:schemeClr val="lt1"/>
-          </a:fontRef>
-        </p:style>
-        <p:txBody>
-          <a:bodyPr rtlCol="0" anchor="ctr"/>
-          <a:lstStyle/>
-          <a:p>
-            <a:pPr algn="ctr"/>
-          </a:p>
-        </p:txBody>
-      </p:sp>
-      <p:sp>
-        <p:nvSpPr>
-          <p:cNvPr id="3" name="TextBox 2"/>
-          <p:cNvSpPr txBox="1"/>
-          <p:nvPr/>
-        </p:nvSpPr>
-        <p:spPr>
-          <a:xfrm>
-            <a:off x="548640" y="100584"/>
-            <a:ext cx="10972800" cy="274320"/>
-          </a:xfrm>
-          <a:prstGeom prst="rect">
-            <a:avLst/>
-          </a:prstGeom>
-          <a:noFill/>
-        </p:spPr>
-        <p:txBody>
-          <a:bodyPr wrap="square" anchor="t" lIns="0" rIns="0" tIns="0" bIns="0">
-            <a:spAutoFit/>
-          </a:bodyPr>
-          <a:lstStyle/>
-          <a:p>
-            <a:pPr algn="l">
-              <a:spcAft>
-                <a:spcPts val="495"/>
-              </a:spcAft>
-            </a:pPr>
-            <a:r>
-              <a:rPr sz="1100" b="1" i="0">
-                <a:solidFill>
-                  <a:srgbClr val="FFFFFF"/>
-                </a:solidFill>
-                <a:latin typeface="Inter Tight"/>
-              </a:rPr>
-              <a:t>TEACHER PAGE  ·  skipped when you present  ·  Background</a:t>
-            </a:r>
-          </a:p>
-        </p:txBody>
-      </p:sp>
-      <p:sp>
-        <p:nvSpPr>
-          <p:cNvPr id="4" name="TextBox 3"/>
-          <p:cNvSpPr txBox="1"/>
-          <p:nvPr/>
-        </p:nvSpPr>
-        <p:spPr>
-          <a:xfrm>
-            <a:off x="548640" y="685800"/>
-            <a:ext cx="10972800" cy="640080"/>
-          </a:xfrm>
-          <a:prstGeom prst="rect">
-            <a:avLst/>
-          </a:prstGeom>
-          <a:noFill/>
-        </p:spPr>
-        <p:txBody>
-          <a:bodyPr wrap="square" anchor="t" lIns="0" rIns="0" tIns="0" bIns="0">
-            <a:spAutoFit/>
-          </a:bodyPr>
-          <a:lstStyle/>
-          <a:p>
-            <a:pPr algn="l">
-              <a:spcAft>
-                <a:spcPts val="1350"/>
-              </a:spcAft>
-            </a:pPr>
-            <a:r>
-              <a:rPr sz="3000" b="1" i="0">
-                <a:solidFill>
-                  <a:srgbClr val="1C1B19"/>
-                </a:solidFill>
-                <a:latin typeface="Source Serif 4"/>
-              </a:rPr>
-              <a:t>What the research says</a:t>
-            </a:r>
-          </a:p>
-        </p:txBody>
-      </p:sp>
-      <p:sp>
-        <p:nvSpPr>
-          <p:cNvPr id="5" name="TextBox 4"/>
-          <p:cNvSpPr txBox="1"/>
-          <p:nvPr/>
-        </p:nvSpPr>
-        <p:spPr>
-          <a:xfrm>
-            <a:off x="548640" y="1463040"/>
-            <a:ext cx="5394960" cy="4937760"/>
-          </a:xfrm>
-          <a:prstGeom prst="rect">
-            <a:avLst/>
-          </a:prstGeom>
-          <a:noFill/>
-        </p:spPr>
-        <p:txBody>
-          <a:bodyPr wrap="square" anchor="t" lIns="0" rIns="0" tIns="0" bIns="0">
-            <a:spAutoFit/>
-          </a:bodyPr>
-          <a:lstStyle/>
-          <a:p>
-            <a:pPr algn="l">
-              <a:spcAft>
-                <a:spcPts val="585"/>
-              </a:spcAft>
-            </a:pPr>
-            <a:r>
-              <a:rPr sz="1300" b="0" i="0">
-                <a:solidFill>
-                  <a:srgbClr val="1C1B19"/>
-                </a:solidFill>
-                <a:latin typeface="Source Serif 4"/>
-              </a:rPr>
-              <a:t>Couples whose partners responded to good news with interest and questions were more satisfied and less likely to break up two months later. Shrugging, poking holes, or changing the subject went with dissatisfaction. The studies were with dating couples and are widely applied to friendship.</a:t>
-            </a:r>
-          </a:p>
-          <a:p>
-            <a:pPr algn="l">
-              <a:spcAft>
-                <a:spcPts val="585"/>
-              </a:spcAft>
-            </a:pPr>
-            <a:r>
-              <a:rPr sz="1050" b="0" i="0">
-                <a:solidFill>
-                  <a:srgbClr val="5D5A54"/>
-                </a:solidFill>
-                <a:latin typeface="Inter Tight"/>
-              </a:rPr>
-              <a:t>Gable, Gonzaga and Strachman, Journal of Personality and Social Psychology, 2006</a:t>
-            </a:r>
-          </a:p>
-          <a:p>
-            <a:pPr algn="l">
-              <a:spcAft>
-                <a:spcPts val="585"/>
-              </a:spcAft>
-            </a:pPr>
-            <a:r>
-              <a:rPr sz="1300" b="0" i="0">
-                <a:solidFill>
-                  <a:srgbClr val="1C1B19"/>
-                </a:solidFill>
-                <a:latin typeface="Source Serif 4"/>
-              </a:rPr>
-              <a:t>Adults who talked about a stressful event with an ambivalent friend (sometimes supportive, sometimes hurtful) had a bigger rise in blood pressure than with a supportive friend, and higher resting heart rates.</a:t>
-            </a:r>
-          </a:p>
-          <a:p>
-            <a:pPr algn="l">
-              <a:spcAft>
-                <a:spcPts val="585"/>
-              </a:spcAft>
-            </a:pPr>
-            <a:r>
-              <a:rPr sz="1050" b="0" i="0">
-                <a:solidFill>
-                  <a:srgbClr val="5D5A54"/>
-                </a:solidFill>
-                <a:latin typeface="Inter Tight"/>
-              </a:rPr>
-              <a:t>Holt-Lunstad et al., Annals of Behavioral Medicine, 2007 (Brigham Young University)</a:t>
-            </a:r>
-          </a:p>
-          <a:p>
-            <a:pPr algn="l">
-              <a:spcAft>
-                <a:spcPts val="585"/>
-              </a:spcAft>
-            </a:pPr>
-            <a:r>
-              <a:rPr sz="1300" b="0" i="0">
-                <a:solidFill>
-                  <a:srgbClr val="1C1B19"/>
-                </a:solidFill>
-                <a:latin typeface="Source Serif 4"/>
-              </a:rPr>
-              <a:t>Co-rumination, friends going over the same problems again and again, was linked with closer, higher-quality friendships and with more anxiety and depression.</a:t>
-            </a:r>
-          </a:p>
-          <a:p>
-            <a:pPr algn="l">
-              <a:spcAft>
-                <a:spcPts val="585"/>
-              </a:spcAft>
-            </a:pPr>
-            <a:r>
-              <a:rPr sz="1050" b="0" i="0">
-                <a:solidFill>
-                  <a:srgbClr val="5D5A54"/>
-                </a:solidFill>
-                <a:latin typeface="Inter Tight"/>
-              </a:rPr>
-              <a:t>Rose, Child Development, 2002</a:t>
-            </a:r>
-          </a:p>
-        </p:txBody>
-      </p:sp>
-      <p:sp>
-        <p:nvSpPr>
-          <p:cNvPr id="6" name="TextBox 5"/>
-          <p:cNvSpPr txBox="1"/>
-          <p:nvPr/>
-        </p:nvSpPr>
-        <p:spPr>
-          <a:xfrm>
-            <a:off x="6217920" y="1463040"/>
-            <a:ext cx="5394960" cy="4937760"/>
-          </a:xfrm>
-          <a:prstGeom prst="rect">
-            <a:avLst/>
-          </a:prstGeom>
-          <a:noFill/>
-        </p:spPr>
-        <p:txBody>
-          <a:bodyPr wrap="square" anchor="t" lIns="0" rIns="0" tIns="0" bIns="0">
-            <a:spAutoFit/>
-          </a:bodyPr>
-          <a:lstStyle/>
-          <a:p>
-            <a:pPr algn="l">
-              <a:spcAft>
-                <a:spcPts val="585"/>
-              </a:spcAft>
-            </a:pPr>
-            <a:r>
-              <a:rPr sz="1300" b="0" i="0">
-                <a:solidFill>
-                  <a:srgbClr val="1C1B19"/>
-                </a:solidFill>
-                <a:latin typeface="Source Serif 4"/>
-              </a:rPr>
-              <a:t>In a driving video game, teenagers took more risks when friends were watching than when they played alone. The effect was much smaller in adults.</a:t>
-            </a:r>
-          </a:p>
-          <a:p>
-            <a:pPr algn="l">
-              <a:spcAft>
-                <a:spcPts val="585"/>
-              </a:spcAft>
-            </a:pPr>
-            <a:r>
-              <a:rPr sz="1050" b="0" i="0">
-                <a:solidFill>
-                  <a:srgbClr val="5D5A54"/>
-                </a:solidFill>
-                <a:latin typeface="Inter Tight"/>
-              </a:rPr>
-              <a:t>Gardner and Steinberg, Developmental Psychology, 2005</a:t>
-            </a:r>
-          </a:p>
-          <a:p>
-            <a:pPr algn="l">
-              <a:spcAft>
-                <a:spcPts val="585"/>
-              </a:spcAft>
-            </a:pPr>
-            <a:r>
-              <a:rPr sz="1300" b="0" i="0">
-                <a:solidFill>
-                  <a:srgbClr val="1C1B19"/>
-                </a:solidFill>
-                <a:latin typeface="Source Serif 4"/>
-              </a:rPr>
-              <a:t>In fifth and sixth graders, bad experiences raised cortisol and lowered self-worth less when a best friend was present.</a:t>
-            </a:r>
-          </a:p>
-          <a:p>
-            <a:pPr algn="l">
-              <a:spcAft>
-                <a:spcPts val="585"/>
-              </a:spcAft>
-            </a:pPr>
-            <a:r>
-              <a:rPr sz="1050" b="0" i="0">
-                <a:solidFill>
-                  <a:srgbClr val="5D5A54"/>
-                </a:solidFill>
-                <a:latin typeface="Inter Tight"/>
-              </a:rPr>
-              <a:t>Adams, Santo and Bukowski, Developmental Psychology, 2011</a:t>
-            </a:r>
-          </a:p>
-          <a:p>
-            <a:pPr algn="l">
-              <a:spcAft>
-                <a:spcPts val="585"/>
-              </a:spcAft>
-            </a:pPr>
-            <a:r>
-              <a:rPr sz="1300" b="0" i="0">
-                <a:solidFill>
-                  <a:srgbClr val="1C1B19"/>
-                </a:solidFill>
-                <a:latin typeface="Source Serif 4"/>
-              </a:rPr>
-              <a:t>Take It Down is a free tool that helps remove sexual images of anyone under 18 from online platforms.</a:t>
-            </a:r>
-          </a:p>
-          <a:p>
-            <a:pPr algn="l">
-              <a:spcAft>
-                <a:spcPts val="585"/>
-              </a:spcAft>
-            </a:pPr>
-            <a:r>
-              <a:rPr sz="1050" b="0" i="0">
-                <a:solidFill>
-                  <a:srgbClr val="5D5A54"/>
-                </a:solidFill>
-                <a:latin typeface="Inter Tight"/>
-              </a:rPr>
-              <a:t>National Center for Missing &amp; Exploited Children</a:t>
-            </a:r>
-          </a:p>
-        </p:txBody>
-      </p:sp>
-    </p:spTree>
-  </p:cSld>
-  <p:clrMapOvr>
-    <a:masterClrMapping/>
-  </p:clrMapOvr>
-</p:sld>
-</file>
-
-<file path=ppt/slides/slide5.xml><?xml version="1.0" encoding="utf-8"?>
-<p:sld xmlns:a="http://schemas.openxmlformats.org/drawingml/2006/main" xmlns:p="http://schemas.openxmlformats.org/presentationml/2006/main" xmlns:r="http://schemas.openxmlformats.org/officeDocument/2006/relationships">
-  <p:cSld>
-    <p:bg>
-      <p:bgPr>
-        <a:solidFill>
-          <a:srgbClr val="0B2D5B"/>
-        </a:solidFill>
-        <a:effectLst/>
-      </p:bgPr>
-    </p:bg>
-    <p:spTree>
-      <p:nvGrpSpPr>
-        <p:cNvPr id="1" name=""/>
-        <p:cNvGrpSpPr/>
-        <p:nvPr/>
-      </p:nvGrpSpPr>
-      <p:grpSpPr/>
-      <p:sp>
-        <p:nvSpPr>
-          <p:cNvPr id="2" name="Rectangle 1"/>
-          <p:cNvSpPr/>
-          <p:nvPr/>
-        </p:nvSpPr>
-        <p:spPr>
-          <a:xfrm>
-            <a:off x="548640" y="502920"/>
-            <a:ext cx="457200" cy="54864"/>
-          </a:xfrm>
-          <a:prstGeom prst="rect">
-            <a:avLst/>
-          </a:prstGeom>
-          <a:solidFill>
-            <a:srgbClr val="F47B20"/>
-          </a:solidFill>
-          <a:ln>
-            <a:noFill/>
-          </a:ln>
-          <a:effectLst/>
-        </p:spPr>
-        <p:style>
-          <a:lnRef idx="1">
-            <a:schemeClr val="accent1"/>
-          </a:lnRef>
-          <a:fillRef idx="3">
-            <a:schemeClr val="accent1"/>
-          </a:fillRef>
-          <a:effectRef idx="2">
-            <a:schemeClr val="accent1"/>
-          </a:effectRef>
-          <a:fontRef idx="minor">
-            <a:schemeClr val="lt1"/>
-          </a:fontRef>
-        </p:style>
-        <p:txBody>
-          <a:bodyPr rtlCol="0" anchor="ctr"/>
-          <a:lstStyle/>
-          <a:p>
-            <a:pPr algn="ctr"/>
-          </a:p>
-        </p:txBody>
-      </p:sp>
-      <p:sp>
-        <p:nvSpPr>
-          <p:cNvPr id="3" name="TextBox 2"/>
-          <p:cNvSpPr txBox="1"/>
-          <p:nvPr/>
-        </p:nvSpPr>
-        <p:spPr>
-          <a:xfrm>
-            <a:off x="1143000" y="393192"/>
-            <a:ext cx="8229600" cy="274320"/>
-          </a:xfrm>
-          <a:prstGeom prst="rect">
-            <a:avLst/>
-          </a:prstGeom>
-          <a:noFill/>
-        </p:spPr>
-        <p:txBody>
-          <a:bodyPr wrap="square" anchor="t" lIns="0" rIns="0" tIns="0" bIns="0">
-            <a:spAutoFit/>
-          </a:bodyPr>
-          <a:lstStyle/>
-          <a:p>
-            <a:pPr algn="l">
-              <a:spcAft>
-                <a:spcPts val="540"/>
-              </a:spcAft>
-            </a:pPr>
-            <a:r>
-              <a:rPr sz="1200" b="1" i="0">
-                <a:solidFill>
-                  <a:srgbClr val="5D5A54"/>
-                </a:solidFill>
-                <a:latin typeface="Inter Tight"/>
-              </a:rPr>
-              <a:t>IS THIS A GOOD FRIEND?</a:t>
-            </a:r>
-          </a:p>
-        </p:txBody>
-      </p:sp>
-      <p:sp>
-        <p:nvSpPr>
-          <p:cNvPr id="4" name="TextBox 3"/>
-          <p:cNvSpPr txBox="1"/>
-          <p:nvPr/>
-        </p:nvSpPr>
-        <p:spPr>
-          <a:xfrm>
-            <a:off x="8229600" y="6400800"/>
-            <a:ext cx="3410712" cy="274320"/>
-          </a:xfrm>
-          <a:prstGeom prst="rect">
-            <a:avLst/>
-          </a:prstGeom>
-          <a:noFill/>
-        </p:spPr>
-        <p:txBody>
-          <a:bodyPr wrap="square" anchor="t" lIns="0" rIns="0" tIns="0" bIns="0">
-            <a:spAutoFit/>
-          </a:bodyPr>
-          <a:lstStyle/>
-          <a:p>
-            <a:pPr algn="r">
-              <a:spcAft>
-                <a:spcPts val="450"/>
-              </a:spcAft>
-            </a:pPr>
-            <a:r>
-              <a:rPr sz="1000" b="0" i="0">
-                <a:solidFill>
-                  <a:srgbClr val="5D5A54"/>
-                </a:solidFill>
-                <a:latin typeface="Inter Tight"/>
-              </a:rPr>
-              <a:t>Beaver Counseling</a:t>
-            </a:r>
-          </a:p>
-        </p:txBody>
-      </p:sp>
-      <p:sp>
-        <p:nvSpPr>
-          <p:cNvPr id="5" name="TextBox 4"/>
-          <p:cNvSpPr txBox="1"/>
-          <p:nvPr/>
-        </p:nvSpPr>
-        <p:spPr>
-          <a:xfrm>
-            <a:off x="822960" y="2011680"/>
-            <a:ext cx="10515600" cy="1463040"/>
-          </a:xfrm>
-          <a:prstGeom prst="rect">
-            <a:avLst/>
-          </a:prstGeom>
-          <a:noFill/>
-        </p:spPr>
-        <p:txBody>
-          <a:bodyPr wrap="square" anchor="b" lIns="0" rIns="0" tIns="0" bIns="0">
-            <a:spAutoFit/>
-          </a:bodyPr>
-          <a:lstStyle/>
-          <a:p>
-            <a:pPr algn="l">
-              <a:spcAft>
-                <a:spcPts val="2700"/>
-              </a:spcAft>
-            </a:pPr>
-            <a:r>
-              <a:rPr sz="6000" b="1" i="0">
-                <a:solidFill>
-                  <a:srgbClr val="FFFFFF"/>
-                </a:solidFill>
-                <a:latin typeface="Source Serif 4"/>
-              </a:rPr>
-              <a:t>Is This a Good Friend?</a:t>
-            </a:r>
-          </a:p>
-        </p:txBody>
-      </p:sp>
-      <p:sp>
-        <p:nvSpPr>
-          <p:cNvPr id="6" name="TextBox 5"/>
-          <p:cNvSpPr txBox="1"/>
-          <p:nvPr/>
-        </p:nvSpPr>
-        <p:spPr>
-          <a:xfrm>
-            <a:off x="822960" y="3611880"/>
-            <a:ext cx="10515600" cy="914400"/>
-          </a:xfrm>
-          <a:prstGeom prst="rect">
-            <a:avLst/>
-          </a:prstGeom>
-          <a:noFill/>
-        </p:spPr>
-        <p:txBody>
-          <a:bodyPr wrap="square" anchor="t" lIns="0" rIns="0" tIns="0" bIns="0">
-            <a:spAutoFit/>
-          </a:bodyPr>
-          <a:lstStyle/>
-          <a:p>
-            <a:pPr algn="l">
-              <a:spcAft>
-                <a:spcPts val="1080"/>
-              </a:spcAft>
-            </a:pPr>
-            <a:r>
-              <a:rPr sz="2400" b="0" i="1">
-                <a:solidFill>
-                  <a:srgbClr val="E8E4DA"/>
-                </a:solidFill>
-                <a:latin typeface="Source Serif 4"/>
-              </a:rPr>
-              <a:t>Charges you up or drains you.</a:t>
-            </a:r>
-          </a:p>
-        </p:txBody>
-      </p:sp>
-      <p:sp>
-        <p:nvSpPr>
-          <p:cNvPr id="7" name="TextBox 6"/>
-          <p:cNvSpPr txBox="1"/>
-          <p:nvPr/>
-        </p:nvSpPr>
-        <p:spPr>
-          <a:xfrm>
-            <a:off x="822960" y="6035040"/>
-            <a:ext cx="7315200" cy="365760"/>
-          </a:xfrm>
-          <a:prstGeom prst="rect">
-            <a:avLst/>
-          </a:prstGeom>
-          <a:noFill/>
-        </p:spPr>
-        <p:txBody>
-          <a:bodyPr wrap="square" anchor="t" lIns="0" rIns="0" tIns="0" bIns="0">
-            <a:spAutoFit/>
-          </a:bodyPr>
-          <a:lstStyle/>
-          <a:p>
-            <a:pPr algn="l">
-              <a:spcAft>
-                <a:spcPts val="585"/>
-              </a:spcAft>
-            </a:pPr>
-            <a:r>
-              <a:rPr sz="1300" b="0" i="0">
-                <a:solidFill>
-                  <a:srgbClr val="E8E4DA"/>
-                </a:solidFill>
-                <a:latin typeface="Inter Tight"/>
-              </a:rPr>
-              <a:t>Beaver Upper School · Counseling</a:t>
+              <a:t>Changes the subject</a:t>
             </a:r>
           </a:p>
         </p:txBody>
@@ -9205,7 +9726,7 @@
                 </a:solidFill>
                 <a:latin typeface="Inter Tight"/>
               </a:rPr>
-              <a:t>MYTH OR FACT?</a:t>
+              <a:t>PAIR PRACTICE</a:t>
             </a:r>
           </a:p>
         </p:txBody>
@@ -9251,14 +9772,97 @@
       </p:sp>
       <p:sp>
         <p:nvSpPr>
-          <p:cNvPr id="5" name="TextBox 4"/>
+          <p:cNvPr id="5" name="Rectangle 4"/>
+          <p:cNvSpPr/>
+          <p:nvPr/>
+        </p:nvSpPr>
+        <p:spPr>
+          <a:xfrm>
+            <a:off x="822960" y="1371600"/>
+            <a:ext cx="73152" cy="3566160"/>
+          </a:xfrm>
+          <a:prstGeom prst="rect">
+            <a:avLst/>
+          </a:prstGeom>
+          <a:solidFill>
+            <a:srgbClr val="F47B20"/>
+          </a:solidFill>
+          <a:ln>
+            <a:noFill/>
+          </a:ln>
+          <a:effectLst/>
+        </p:spPr>
+        <p:style>
+          <a:lnRef idx="1">
+            <a:schemeClr val="accent1"/>
+          </a:lnRef>
+          <a:fillRef idx="3">
+            <a:schemeClr val="accent1"/>
+          </a:fillRef>
+          <a:effectRef idx="2">
+            <a:schemeClr val="accent1"/>
+          </a:effectRef>
+          <a:fontRef idx="minor">
+            <a:schemeClr val="lt1"/>
+          </a:fontRef>
+        </p:style>
+        <p:txBody>
+          <a:bodyPr rtlCol="0" anchor="ctr"/>
+          <a:lstStyle/>
+          <a:p>
+            <a:pPr algn="ctr"/>
+          </a:p>
+        </p:txBody>
+      </p:sp>
+      <p:sp>
+        <p:nvSpPr>
+          <p:cNvPr id="6" name="TextBox 5"/>
           <p:cNvSpPr txBox="1"/>
           <p:nvPr/>
         </p:nvSpPr>
         <p:spPr>
           <a:xfrm>
-            <a:off x="822960" y="1005840"/>
-            <a:ext cx="10515600" cy="1097280"/>
+            <a:off x="1188720" y="1371600"/>
+            <a:ext cx="10058400" cy="3566160"/>
+          </a:xfrm>
+          <a:prstGeom prst="rect">
+            <a:avLst/>
+          </a:prstGeom>
+          <a:noFill/>
+        </p:spPr>
+        <p:txBody>
+          <a:bodyPr wrap="square" anchor="ctr" lIns="0" rIns="0" tIns="0" bIns="0">
+            <a:spAutoFit/>
+          </a:bodyPr>
+          <a:lstStyle/>
+          <a:p>
+            <a:pPr algn="l">
+              <a:spcAft>
+                <a:spcPts val="1800"/>
+              </a:spcAft>
+            </a:pPr>
+            <a:r>
+              <a:rPr sz="4000" b="0" i="1">
+                <a:solidFill>
+                  <a:srgbClr val="1C1B19"/>
+                </a:solidFill>
+                <a:latin typeface="Source Serif 4"/>
+              </a:rPr>
+              <a:t>Tell your partner a small piece of good news.</a:t>
+            </a:r>
+          </a:p>
+        </p:txBody>
+      </p:sp>
+      <p:sp>
+        <p:nvSpPr>
+          <p:cNvPr id="7" name="TextBox 6"/>
+          <p:cNvSpPr txBox="1"/>
+          <p:nvPr/>
+        </p:nvSpPr>
+        <p:spPr>
+          <a:xfrm>
+            <a:off x="1188720" y="5120640"/>
+            <a:ext cx="10058400" cy="914400"/>
           </a:xfrm>
           <a:prstGeom prst="rect">
             <a:avLst/>
@@ -9273,407 +9877,17 @@
           <a:p>
             <a:pPr algn="l">
               <a:spcAft>
-                <a:spcPts val="1620"/>
-              </a:spcAft>
-            </a:pPr>
-            <a:r>
-              <a:rPr sz="3600" b="1" i="0">
-                <a:solidFill>
-                  <a:srgbClr val="1C1B19"/>
-                </a:solidFill>
-                <a:latin typeface="Source Serif 4"/>
-              </a:rPr>
-              <a:t>Stand up if you think it's a fact.</a:t>
-            </a:r>
-          </a:p>
-        </p:txBody>
-      </p:sp>
-      <p:sp>
-        <p:nvSpPr>
-          <p:cNvPr id="6" name="TextBox 5"/>
-          <p:cNvSpPr txBox="1"/>
-          <p:nvPr/>
-        </p:nvSpPr>
-        <p:spPr>
-          <a:xfrm>
-            <a:off x="822960" y="2057400"/>
-            <a:ext cx="548640" cy="804672"/>
-          </a:xfrm>
-          <a:prstGeom prst="rect">
-            <a:avLst/>
-          </a:prstGeom>
-          <a:noFill/>
-        </p:spPr>
-        <p:txBody>
-          <a:bodyPr wrap="square" anchor="t" lIns="0" rIns="0" tIns="0" bIns="0">
-            <a:spAutoFit/>
-          </a:bodyPr>
-          <a:lstStyle/>
-          <a:p>
-            <a:pPr algn="l">
-              <a:spcAft>
-                <a:spcPts val="1170"/>
-              </a:spcAft>
-            </a:pPr>
-            <a:r>
-              <a:rPr sz="2600" b="1" i="0">
-                <a:solidFill>
-                  <a:srgbClr val="F47B20"/>
-                </a:solidFill>
-                <a:latin typeface="Source Serif 4"/>
-              </a:rPr>
-              <a:t>1</a:t>
-            </a:r>
-          </a:p>
-        </p:txBody>
-      </p:sp>
-      <p:sp>
-        <p:nvSpPr>
-          <p:cNvPr id="7" name="TextBox 6"/>
-          <p:cNvSpPr txBox="1"/>
-          <p:nvPr/>
-        </p:nvSpPr>
-        <p:spPr>
-          <a:xfrm>
-            <a:off x="1463040" y="2093976"/>
-            <a:ext cx="9875520" cy="804672"/>
-          </a:xfrm>
-          <a:prstGeom prst="rect">
-            <a:avLst/>
-          </a:prstGeom>
-          <a:noFill/>
-        </p:spPr>
-        <p:txBody>
-          <a:bodyPr wrap="square" anchor="t" lIns="0" rIns="0" tIns="0" bIns="0">
-            <a:spAutoFit/>
-          </a:bodyPr>
-          <a:lstStyle/>
-          <a:p>
-            <a:pPr algn="l">
-              <a:spcAft>
-                <a:spcPts val="945"/>
-              </a:spcAft>
-            </a:pPr>
-            <a:r>
-              <a:rPr sz="2100" b="1" i="0">
-                <a:solidFill>
-                  <a:srgbClr val="1C1B19"/>
-                </a:solidFill>
-                <a:latin typeface="Source Serif 4"/>
-              </a:rPr>
-              <a:t>A real friend would never hurt me.</a:t>
-            </a:r>
-          </a:p>
-        </p:txBody>
-      </p:sp>
-      <p:sp>
-        <p:nvSpPr>
-          <p:cNvPr id="8" name="TextBox 7"/>
-          <p:cNvSpPr txBox="1"/>
-          <p:nvPr/>
-        </p:nvSpPr>
-        <p:spPr>
-          <a:xfrm>
-            <a:off x="822960" y="2862072"/>
-            <a:ext cx="548640" cy="804672"/>
-          </a:xfrm>
-          <a:prstGeom prst="rect">
-            <a:avLst/>
-          </a:prstGeom>
-          <a:noFill/>
-        </p:spPr>
-        <p:txBody>
-          <a:bodyPr wrap="square" anchor="t" lIns="0" rIns="0" tIns="0" bIns="0">
-            <a:spAutoFit/>
-          </a:bodyPr>
-          <a:lstStyle/>
-          <a:p>
-            <a:pPr algn="l">
-              <a:spcAft>
-                <a:spcPts val="1170"/>
-              </a:spcAft>
-            </a:pPr>
-            <a:r>
-              <a:rPr sz="2600" b="1" i="0">
-                <a:solidFill>
-                  <a:srgbClr val="F47B20"/>
-                </a:solidFill>
-                <a:latin typeface="Source Serif 4"/>
-              </a:rPr>
-              <a:t>2</a:t>
-            </a:r>
-          </a:p>
-        </p:txBody>
-      </p:sp>
-      <p:sp>
-        <p:nvSpPr>
-          <p:cNvPr id="9" name="TextBox 8"/>
-          <p:cNvSpPr txBox="1"/>
-          <p:nvPr/>
-        </p:nvSpPr>
-        <p:spPr>
-          <a:xfrm>
-            <a:off x="1463040" y="2898648"/>
-            <a:ext cx="9875520" cy="804672"/>
-          </a:xfrm>
-          <a:prstGeom prst="rect">
-            <a:avLst/>
-          </a:prstGeom>
-          <a:noFill/>
-        </p:spPr>
-        <p:txBody>
-          <a:bodyPr wrap="square" anchor="t" lIns="0" rIns="0" tIns="0" bIns="0">
-            <a:spAutoFit/>
-          </a:bodyPr>
-          <a:lstStyle/>
-          <a:p>
-            <a:pPr algn="l">
-              <a:spcAft>
-                <a:spcPts val="945"/>
-              </a:spcAft>
-            </a:pPr>
-            <a:r>
-              <a:rPr sz="2100" b="1" i="0">
-                <a:solidFill>
-                  <a:srgbClr val="1C1B19"/>
-                </a:solidFill>
-                <a:latin typeface="Source Serif 4"/>
-              </a:rPr>
-              <a:t>How a friend reacts to good news says a lot.</a:t>
-            </a:r>
-          </a:p>
-        </p:txBody>
-      </p:sp>
-      <p:sp>
-        <p:nvSpPr>
-          <p:cNvPr id="10" name="TextBox 9"/>
-          <p:cNvSpPr txBox="1"/>
-          <p:nvPr/>
-        </p:nvSpPr>
-        <p:spPr>
-          <a:xfrm>
-            <a:off x="822960" y="3666744"/>
-            <a:ext cx="548640" cy="804672"/>
-          </a:xfrm>
-          <a:prstGeom prst="rect">
-            <a:avLst/>
-          </a:prstGeom>
-          <a:noFill/>
-        </p:spPr>
-        <p:txBody>
-          <a:bodyPr wrap="square" anchor="t" lIns="0" rIns="0" tIns="0" bIns="0">
-            <a:spAutoFit/>
-          </a:bodyPr>
-          <a:lstStyle/>
-          <a:p>
-            <a:pPr algn="l">
-              <a:spcAft>
-                <a:spcPts val="1170"/>
-              </a:spcAft>
-            </a:pPr>
-            <a:r>
-              <a:rPr sz="2600" b="1" i="0">
-                <a:solidFill>
-                  <a:srgbClr val="F47B20"/>
-                </a:solidFill>
-                <a:latin typeface="Source Serif 4"/>
-              </a:rPr>
-              <a:t>3</a:t>
-            </a:r>
-          </a:p>
-        </p:txBody>
-      </p:sp>
-      <p:sp>
-        <p:nvSpPr>
-          <p:cNvPr id="11" name="TextBox 10"/>
-          <p:cNvSpPr txBox="1"/>
-          <p:nvPr/>
-        </p:nvSpPr>
-        <p:spPr>
-          <a:xfrm>
-            <a:off x="1463040" y="3703320"/>
-            <a:ext cx="9875520" cy="804672"/>
-          </a:xfrm>
-          <a:prstGeom prst="rect">
-            <a:avLst/>
-          </a:prstGeom>
-          <a:noFill/>
-        </p:spPr>
-        <p:txBody>
-          <a:bodyPr wrap="square" anchor="t" lIns="0" rIns="0" tIns="0" bIns="0">
-            <a:spAutoFit/>
-          </a:bodyPr>
-          <a:lstStyle/>
-          <a:p>
-            <a:pPr algn="l">
-              <a:spcAft>
-                <a:spcPts val="945"/>
-              </a:spcAft>
-            </a:pPr>
-            <a:r>
-              <a:rPr sz="2100" b="1" i="0">
-                <a:solidFill>
-                  <a:srgbClr val="1C1B19"/>
-                </a:solidFill>
-                <a:latin typeface="Source Serif 4"/>
-              </a:rPr>
-              <a:t>The closer we are, the healthier it is.</a:t>
-            </a:r>
-          </a:p>
-        </p:txBody>
-      </p:sp>
-      <p:sp>
-        <p:nvSpPr>
-          <p:cNvPr id="12" name="TextBox 11"/>
-          <p:cNvSpPr txBox="1"/>
-          <p:nvPr/>
-        </p:nvSpPr>
-        <p:spPr>
-          <a:xfrm>
-            <a:off x="822960" y="4471416"/>
-            <a:ext cx="548640" cy="804672"/>
-          </a:xfrm>
-          <a:prstGeom prst="rect">
-            <a:avLst/>
-          </a:prstGeom>
-          <a:noFill/>
-        </p:spPr>
-        <p:txBody>
-          <a:bodyPr wrap="square" anchor="t" lIns="0" rIns="0" tIns="0" bIns="0">
-            <a:spAutoFit/>
-          </a:bodyPr>
-          <a:lstStyle/>
-          <a:p>
-            <a:pPr algn="l">
-              <a:spcAft>
-                <a:spcPts val="1170"/>
-              </a:spcAft>
-            </a:pPr>
-            <a:r>
-              <a:rPr sz="2600" b="1" i="0">
-                <a:solidFill>
-                  <a:srgbClr val="F47B20"/>
-                </a:solidFill>
-                <a:latin typeface="Source Serif 4"/>
-              </a:rPr>
-              <a:t>4</a:t>
-            </a:r>
-          </a:p>
-        </p:txBody>
-      </p:sp>
-      <p:sp>
-        <p:nvSpPr>
-          <p:cNvPr id="13" name="TextBox 12"/>
-          <p:cNvSpPr txBox="1"/>
-          <p:nvPr/>
-        </p:nvSpPr>
-        <p:spPr>
-          <a:xfrm>
-            <a:off x="1463040" y="4507992"/>
-            <a:ext cx="9875520" cy="804672"/>
-          </a:xfrm>
-          <a:prstGeom prst="rect">
-            <a:avLst/>
-          </a:prstGeom>
-          <a:noFill/>
-        </p:spPr>
-        <p:txBody>
-          <a:bodyPr wrap="square" anchor="t" lIns="0" rIns="0" tIns="0" bIns="0">
-            <a:spAutoFit/>
-          </a:bodyPr>
-          <a:lstStyle/>
-          <a:p>
-            <a:pPr algn="l">
-              <a:spcAft>
-                <a:spcPts val="945"/>
-              </a:spcAft>
-            </a:pPr>
-            <a:r>
-              <a:rPr sz="2100" b="1" i="0">
-                <a:solidFill>
-                  <a:srgbClr val="1C1B19"/>
-                </a:solidFill>
-                <a:latin typeface="Source Serif 4"/>
-              </a:rPr>
-              <a:t>Teens take more risks when friends are watching.</a:t>
-            </a:r>
-          </a:p>
-        </p:txBody>
-      </p:sp>
-      <p:sp>
-        <p:nvSpPr>
-          <p:cNvPr id="14" name="TextBox 13"/>
-          <p:cNvSpPr txBox="1"/>
-          <p:nvPr/>
-        </p:nvSpPr>
-        <p:spPr>
-          <a:xfrm>
-            <a:off x="822960" y="5276088"/>
-            <a:ext cx="548640" cy="804672"/>
-          </a:xfrm>
-          <a:prstGeom prst="rect">
-            <a:avLst/>
-          </a:prstGeom>
-          <a:noFill/>
-        </p:spPr>
-        <p:txBody>
-          <a:bodyPr wrap="square" anchor="t" lIns="0" rIns="0" tIns="0" bIns="0">
-            <a:spAutoFit/>
-          </a:bodyPr>
-          <a:lstStyle/>
-          <a:p>
-            <a:pPr algn="l">
-              <a:spcAft>
-                <a:spcPts val="1170"/>
-              </a:spcAft>
-            </a:pPr>
-            <a:r>
-              <a:rPr sz="2600" b="1" i="0">
-                <a:solidFill>
-                  <a:srgbClr val="F47B20"/>
-                </a:solidFill>
-                <a:latin typeface="Source Serif 4"/>
-              </a:rPr>
-              <a:t>5</a:t>
-            </a:r>
-          </a:p>
-        </p:txBody>
-      </p:sp>
-      <p:sp>
-        <p:nvSpPr>
-          <p:cNvPr id="15" name="TextBox 14"/>
-          <p:cNvSpPr txBox="1"/>
-          <p:nvPr/>
-        </p:nvSpPr>
-        <p:spPr>
-          <a:xfrm>
-            <a:off x="1463040" y="5312664"/>
-            <a:ext cx="9875520" cy="804672"/>
-          </a:xfrm>
-          <a:prstGeom prst="rect">
-            <a:avLst/>
-          </a:prstGeom>
-          <a:noFill/>
-        </p:spPr>
-        <p:txBody>
-          <a:bodyPr wrap="square" anchor="t" lIns="0" rIns="0" tIns="0" bIns="0">
-            <a:spAutoFit/>
-          </a:bodyPr>
-          <a:lstStyle/>
-          <a:p>
-            <a:pPr algn="l">
-              <a:spcAft>
-                <a:spcPts val="945"/>
-              </a:spcAft>
-            </a:pPr>
-            <a:r>
-              <a:rPr sz="2100" b="1" i="0">
-                <a:solidFill>
-                  <a:srgbClr val="1C1B19"/>
-                </a:solidFill>
-                <a:latin typeface="Source Serif 4"/>
-              </a:rPr>
-              <a:t>Setting a boundary with a friend is mean.</a:t>
+                <a:spcPts val="810"/>
+              </a:spcAft>
+            </a:pPr>
+            <a:r>
+              <a:rPr sz="1800" b="0" i="0">
+                <a:solidFill>
+                  <a:srgbClr val="5D5A54"/>
+                </a:solidFill>
+                <a:latin typeface="Inter Tight"/>
+              </a:rPr>
+              <a:t>Your partner answers the "Lands" way: interest, then a question. Then switch.</a:t>
             </a:r>
           </a:p>
         </p:txBody>
@@ -9782,7 +9996,7 @@
                 </a:solidFill>
                 <a:latin typeface="Inter Tight"/>
               </a:rPr>
-              <a:t>MYTH OR FACT?</a:t>
+              <a:t>GRAY AREAS</a:t>
             </a:r>
           </a:p>
         </p:txBody>
@@ -9860,7 +10074,7 @@
                 </a:solidFill>
                 <a:latin typeface="Source Serif 4"/>
               </a:rPr>
-              <a:t>The answers</a:t>
+              <a:t>Close isn't automatically healthy.</a:t>
             </a:r>
           </a:p>
         </p:txBody>
@@ -9873,8 +10087,8 @@
         </p:nvSpPr>
         <p:spPr>
           <a:xfrm>
-            <a:off x="822960" y="2057400"/>
-            <a:ext cx="548640" cy="804672"/>
+            <a:off x="822960" y="2194560"/>
+            <a:ext cx="548640" cy="1005840"/>
           </a:xfrm>
           <a:prstGeom prst="rect">
             <a:avLst/>
@@ -9912,8 +10126,8 @@
         </p:nvSpPr>
         <p:spPr>
           <a:xfrm>
-            <a:off x="1463040" y="2093976"/>
-            <a:ext cx="9875520" cy="804672"/>
+            <a:off x="1463040" y="2231136"/>
+            <a:ext cx="9875520" cy="1005840"/>
           </a:xfrm>
           <a:prstGeom prst="rect">
             <a:avLst/>
@@ -9938,7 +10152,7 @@
                 </a:solidFill>
                 <a:latin typeface="Source Serif 4"/>
               </a:rPr>
-              <a:t>Myth.</a:t>
+              <a:t>Talking it to death.</a:t>
             </a:r>
           </a:p>
           <a:p>
@@ -9954,7 +10168,7 @@
                 </a:solidFill>
                 <a:latin typeface="Source Serif 4"/>
               </a:rPr>
-              <a:t>Good friends hurt each other sometimes. Do they own it and change?</a:t>
+              <a:t>Same problem, every night. Closer and more anxious.</a:t>
             </a:r>
           </a:p>
         </p:txBody>
@@ -9967,8 +10181,8 @@
         </p:nvSpPr>
         <p:spPr>
           <a:xfrm>
-            <a:off x="822960" y="2862072"/>
-            <a:ext cx="548640" cy="804672"/>
+            <a:off x="822960" y="3200400"/>
+            <a:ext cx="548640" cy="1005840"/>
           </a:xfrm>
           <a:prstGeom prst="rect">
             <a:avLst/>
@@ -10006,8 +10220,8 @@
         </p:nvSpPr>
         <p:spPr>
           <a:xfrm>
-            <a:off x="1463040" y="2898648"/>
-            <a:ext cx="9875520" cy="804672"/>
+            <a:off x="1463040" y="3236976"/>
+            <a:ext cx="9875520" cy="1005840"/>
           </a:xfrm>
           <a:prstGeom prst="rect">
             <a:avLst/>
@@ -10032,7 +10246,7 @@
                 </a:solidFill>
                 <a:latin typeface="Source Serif 4"/>
               </a:rPr>
-              <a:t>Fact.</a:t>
+              <a:t>The rollercoaster.</a:t>
             </a:r>
           </a:p>
           <a:p>
@@ -10048,7 +10262,7 @@
                 </a:solidFill>
                 <a:latin typeface="Source Serif 4"/>
               </a:rPr>
-              <a:t>Being glad for you is harder than helping on a bad day.</a:t>
+              <a:t>Warm one week, cold the next. You keep earning it back.</a:t>
             </a:r>
           </a:p>
         </p:txBody>
@@ -10061,8 +10275,8 @@
         </p:nvSpPr>
         <p:spPr>
           <a:xfrm>
-            <a:off x="822960" y="3666744"/>
-            <a:ext cx="548640" cy="804672"/>
+            <a:off x="822960" y="4206240"/>
+            <a:ext cx="548640" cy="1005840"/>
           </a:xfrm>
           <a:prstGeom prst="rect">
             <a:avLst/>
@@ -10100,8 +10314,8 @@
         </p:nvSpPr>
         <p:spPr>
           <a:xfrm>
-            <a:off x="1463040" y="3703320"/>
-            <a:ext cx="9875520" cy="804672"/>
+            <a:off x="1463040" y="4242816"/>
+            <a:ext cx="9875520" cy="1005840"/>
           </a:xfrm>
           <a:prstGeom prst="rect">
             <a:avLst/>
@@ -10126,7 +10340,7 @@
                 </a:solidFill>
                 <a:latin typeface="Source Serif 4"/>
               </a:rPr>
-              <a:t>Myth.</a:t>
+              <a:t>The put-down.</a:t>
             </a:r>
           </a:p>
           <a:p>
@@ -10142,7 +10356,7 @@
                 </a:solidFill>
                 <a:latin typeface="Source Serif 4"/>
               </a:rPr>
-              <a:t>Close friends can keep each other stuck.</a:t>
+              <a:t>Same sore spots, then "relax, it's a joke."</a:t>
             </a:r>
           </a:p>
         </p:txBody>
@@ -10155,8 +10369,8 @@
         </p:nvSpPr>
         <p:spPr>
           <a:xfrm>
-            <a:off x="822960" y="4471416"/>
-            <a:ext cx="548640" cy="804672"/>
+            <a:off x="822960" y="5212080"/>
+            <a:ext cx="548640" cy="1005840"/>
           </a:xfrm>
           <a:prstGeom prst="rect">
             <a:avLst/>
@@ -10194,8 +10408,8 @@
         </p:nvSpPr>
         <p:spPr>
           <a:xfrm>
-            <a:off x="1463040" y="4507992"/>
-            <a:ext cx="9875520" cy="804672"/>
+            <a:off x="1463040" y="5248656"/>
+            <a:ext cx="9875520" cy="1005840"/>
           </a:xfrm>
           <a:prstGeom prst="rect">
             <a:avLst/>
@@ -10220,7 +10434,7 @@
                 </a:solidFill>
                 <a:latin typeface="Source Serif 4"/>
               </a:rPr>
-              <a:t>Fact.</a:t>
+              <a:t>The controller.</a:t>
             </a:r>
           </a:p>
           <a:p>
@@ -10236,101 +10450,7 @@
                 </a:solidFill>
                 <a:latin typeface="Source Serif 4"/>
               </a:rPr>
-              <a:t>In a driving game, much more than adults.</a:t>
-            </a:r>
-          </a:p>
-        </p:txBody>
-      </p:sp>
-      <p:sp>
-        <p:nvSpPr>
-          <p:cNvPr id="14" name="TextBox 13"/>
-          <p:cNvSpPr txBox="1"/>
-          <p:nvPr/>
-        </p:nvSpPr>
-        <p:spPr>
-          <a:xfrm>
-            <a:off x="822960" y="5276088"/>
-            <a:ext cx="548640" cy="804672"/>
-          </a:xfrm>
-          <a:prstGeom prst="rect">
-            <a:avLst/>
-          </a:prstGeom>
-          <a:noFill/>
-        </p:spPr>
-        <p:txBody>
-          <a:bodyPr wrap="square" anchor="t" lIns="0" rIns="0" tIns="0" bIns="0">
-            <a:spAutoFit/>
-          </a:bodyPr>
-          <a:lstStyle/>
-          <a:p>
-            <a:pPr algn="l">
-              <a:spcAft>
-                <a:spcPts val="1170"/>
-              </a:spcAft>
-            </a:pPr>
-            <a:r>
-              <a:rPr sz="2600" b="1" i="0">
-                <a:solidFill>
-                  <a:srgbClr val="F47B20"/>
-                </a:solidFill>
-                <a:latin typeface="Source Serif 4"/>
-              </a:rPr>
-              <a:t>5</a:t>
-            </a:r>
-          </a:p>
-        </p:txBody>
-      </p:sp>
-      <p:sp>
-        <p:nvSpPr>
-          <p:cNvPr id="15" name="TextBox 14"/>
-          <p:cNvSpPr txBox="1"/>
-          <p:nvPr/>
-        </p:nvSpPr>
-        <p:spPr>
-          <a:xfrm>
-            <a:off x="1463040" y="5312664"/>
-            <a:ext cx="9875520" cy="804672"/>
-          </a:xfrm>
-          <a:prstGeom prst="rect">
-            <a:avLst/>
-          </a:prstGeom>
-          <a:noFill/>
-        </p:spPr>
-        <p:txBody>
-          <a:bodyPr wrap="square" anchor="t" lIns="0" rIns="0" tIns="0" bIns="0">
-            <a:spAutoFit/>
-          </a:bodyPr>
-          <a:lstStyle/>
-          <a:p>
-            <a:pPr algn="l">
-              <a:spcAft>
-                <a:spcPts val="945"/>
-              </a:spcAft>
-            </a:pPr>
-            <a:r>
-              <a:rPr sz="2100" b="1" i="0">
-                <a:solidFill>
-                  <a:srgbClr val="1C1B19"/>
-                </a:solidFill>
-                <a:latin typeface="Source Serif 4"/>
-              </a:rPr>
-              <a:t>Myth.</a:t>
-            </a:r>
-          </a:p>
-          <a:p>
-            <a:pPr algn="l">
-              <a:spcAft>
-                <a:spcPts val="945"/>
-              </a:spcAft>
-            </a:pPr>
-            <a:r>
-              <a:rPr sz="1600" b="0" i="0">
-                <a:solidFill>
-                  <a:srgbClr val="5D5A54"/>
-                </a:solidFill>
-                <a:latin typeface="Source Serif 4"/>
-              </a:rPr>
-              <a:t>A clear boundary gives the friendship a chance to work.</a:t>
+              <a:t>Jealous of other friends, tracks you, holds screenshots.</a:t>
             </a:r>
           </a:p>
         </p:txBody>
@@ -10439,7 +10559,7 @@
                 </a:solidFill>
                 <a:latin typeface="Inter Tight"/>
               </a:rPr>
-              <a:t>THE GOOD-NEWS TEST</a:t>
+              <a:t>PRIVATE FLAG CHECK</a:t>
             </a:r>
           </a:p>
         </p:txBody>
@@ -10517,7 +10637,7 @@
                 </a:solidFill>
                 <a:latin typeface="Source Serif 4"/>
               </a:rPr>
-              <a:t>You share good news. What happens next?</a:t>
+              <a:t>Think of one friend over the last few months.</a:t>
             </a:r>
           </a:p>
         </p:txBody>
@@ -10602,7 +10722,7 @@
                 </a:solidFill>
                 <a:latin typeface="Inter Tight"/>
               </a:rPr>
-              <a:t>LANDS</a:t>
+              <a:t>GREEN FLAGS</a:t>
             </a:r>
           </a:p>
         </p:txBody>
@@ -10641,7 +10761,7 @@
                 </a:solidFill>
                 <a:latin typeface="Source Serif 4"/>
               </a:rPr>
-              <a:t>"Wait, tell me everything."</a:t>
+              <a:t>I can be myself with them</a:t>
             </a:r>
           </a:p>
           <a:p>
@@ -10657,7 +10777,7 @@
                 </a:solidFill>
                 <a:latin typeface="Source Serif 4"/>
               </a:rPr>
-              <a:t>Asks a follow-up question</a:t>
+              <a:t>Glad for my good news, and they ask</a:t>
             </a:r>
           </a:p>
           <a:p>
@@ -10673,7 +10793,7 @@
                 </a:solidFill>
                 <a:latin typeface="Source Serif 4"/>
               </a:rPr>
-              <a:t>Glad for you, no competing</a:t>
+              <a:t>We disagree and are fine the next day</a:t>
             </a:r>
           </a:p>
           <a:p>
@@ -10689,7 +10809,7 @@
                 </a:solidFill>
                 <a:latin typeface="Source Serif 4"/>
               </a:rPr>
-              <a:t>Brings it up again later</a:t>
+              <a:t>When they mess up, something changes</a:t>
             </a:r>
           </a:p>
         </p:txBody>
@@ -10774,7 +10894,7 @@
                 </a:solidFill>
                 <a:latin typeface="Inter Tight"/>
               </a:rPr>
-              <a:t>MISSES</a:t>
+              <a:t>RED FLAGS</a:t>
             </a:r>
           </a:p>
         </p:txBody>
@@ -10813,7 +10933,7 @@
                 </a:solidFill>
                 <a:latin typeface="Source Serif 4"/>
               </a:rPr>
-              <a:t>A shrug, or "cool"</a:t>
+              <a:t>I feel worse about myself after</a:t>
             </a:r>
           </a:p>
           <a:p>
@@ -10829,7 +10949,7 @@
                 </a:solidFill>
                 <a:latin typeface="Source Serif 4"/>
               </a:rPr>
-              <a:t>Pokes holes in it</a:t>
+              <a:t>I edit what I say so they won't get mad</a:t>
             </a:r>
           </a:p>
           <a:p>
@@ -10845,7 +10965,7 @@
                 </a:solidFill>
                 <a:latin typeface="Source Serif 4"/>
               </a:rPr>
-              <a:t>Turns it into their story</a:t>
+              <a:t>Cold when I'm with other friends</a:t>
             </a:r>
           </a:p>
           <a:p>
@@ -10861,7 +10981,7 @@
                 </a:solidFill>
                 <a:latin typeface="Source Serif 4"/>
               </a:rPr>
-              <a:t>Changes the subject</a:t>
+              <a:t>I do things I wouldn't choose alone</a:t>
             </a:r>
           </a:p>
         </p:txBody>
@@ -10970,7 +11090,7 @@
                 </a:solidFill>
                 <a:latin typeface="Inter Tight"/>
               </a:rPr>
-              <a:t>PAIR PRACTICE</a:t>
+              <a:t>GREEN, RED, OR GRAY?</a:t>
             </a:r>
           </a:p>
         </p:txBody>
@@ -11016,23 +11136,64 @@
       </p:sp>
       <p:sp>
         <p:nvSpPr>
-          <p:cNvPr id="5" name="Rectangle 4"/>
+          <p:cNvPr id="5" name="TextBox 4"/>
+          <p:cNvSpPr txBox="1"/>
+          <p:nvPr/>
+        </p:nvSpPr>
+        <p:spPr>
+          <a:xfrm>
+            <a:off x="822960" y="1005840"/>
+            <a:ext cx="10515600" cy="914400"/>
+          </a:xfrm>
+          <a:prstGeom prst="rect">
+            <a:avLst/>
+          </a:prstGeom>
+          <a:noFill/>
+        </p:spPr>
+        <p:txBody>
+          <a:bodyPr wrap="square" anchor="t" lIns="0" rIns="0" tIns="0" bIns="0">
+            <a:spAutoFit/>
+          </a:bodyPr>
+          <a:lstStyle/>
+          <a:p>
+            <a:pPr algn="l">
+              <a:spcAft>
+                <a:spcPts val="1530"/>
+              </a:spcAft>
+            </a:pPr>
+            <a:r>
+              <a:rPr sz="3400" b="1" i="0">
+                <a:solidFill>
+                  <a:srgbClr val="1C1B19"/>
+                </a:solidFill>
+                <a:latin typeface="Source Serif 4"/>
+              </a:rPr>
+              <a:t>What do you think? What would you do?</a:t>
+            </a:r>
+          </a:p>
+        </p:txBody>
+      </p:sp>
+      <p:sp>
+        <p:nvSpPr>
+          <p:cNvPr id="6" name="Rectangle 5"/>
           <p:cNvSpPr/>
           <p:nvPr/>
         </p:nvSpPr>
         <p:spPr>
           <a:xfrm>
-            <a:off x="822960" y="1371600"/>
-            <a:ext cx="73152" cy="3566160"/>
+            <a:off x="822960" y="2103120"/>
+            <a:ext cx="3322320" cy="3840480"/>
           </a:xfrm>
           <a:prstGeom prst="rect">
             <a:avLst/>
           </a:prstGeom>
           <a:solidFill>
-            <a:srgbClr val="F47B20"/>
+            <a:srgbClr val="FFFFFF"/>
           </a:solidFill>
-          <a:ln>
-            <a:noFill/>
+          <a:ln w="15875">
+            <a:solidFill>
+              <a:srgbClr val="D8D2C6"/>
+            </a:solidFill>
           </a:ln>
           <a:effectLst/>
         </p:spPr>
@@ -11060,53 +11221,14 @@
       </p:sp>
       <p:sp>
         <p:nvSpPr>
-          <p:cNvPr id="6" name="TextBox 5"/>
-          <p:cNvSpPr txBox="1"/>
-          <p:nvPr/>
-        </p:nvSpPr>
-        <p:spPr>
-          <a:xfrm>
-            <a:off x="1188720" y="1371600"/>
-            <a:ext cx="10058400" cy="3566160"/>
-          </a:xfrm>
-          <a:prstGeom prst="rect">
-            <a:avLst/>
-          </a:prstGeom>
-          <a:noFill/>
-        </p:spPr>
-        <p:txBody>
-          <a:bodyPr wrap="square" anchor="ctr" lIns="0" rIns="0" tIns="0" bIns="0">
-            <a:spAutoFit/>
-          </a:bodyPr>
-          <a:lstStyle/>
-          <a:p>
-            <a:pPr algn="l">
-              <a:spcAft>
-                <a:spcPts val="1800"/>
-              </a:spcAft>
-            </a:pPr>
-            <a:r>
-              <a:rPr sz="4000" b="0" i="1">
-                <a:solidFill>
-                  <a:srgbClr val="1C1B19"/>
-                </a:solidFill>
-                <a:latin typeface="Source Serif 4"/>
-              </a:rPr>
-              <a:t>Tell your partner a small piece of good news.</a:t>
-            </a:r>
-          </a:p>
-        </p:txBody>
-      </p:sp>
-      <p:sp>
-        <p:nvSpPr>
           <p:cNvPr id="7" name="TextBox 6"/>
           <p:cNvSpPr txBox="1"/>
           <p:nvPr/>
         </p:nvSpPr>
         <p:spPr>
           <a:xfrm>
-            <a:off x="1188720" y="5120640"/>
-            <a:ext cx="10058400" cy="914400"/>
+            <a:off x="1051560" y="2286000"/>
+            <a:ext cx="2865120" cy="365760"/>
           </a:xfrm>
           <a:prstGeom prst="rect">
             <a:avLst/>
@@ -11121,17 +11243,304 @@
           <a:p>
             <a:pPr algn="l">
               <a:spcAft>
+                <a:spcPts val="585"/>
+              </a:spcAft>
+            </a:pPr>
+            <a:r>
+              <a:rPr sz="1300" b="1" i="0">
+                <a:solidFill>
+                  <a:srgbClr val="0B2D5B"/>
+                </a:solidFill>
+                <a:latin typeface="Inter Tight"/>
+              </a:rPr>
+              <a:t>DEV</a:t>
+            </a:r>
+          </a:p>
+        </p:txBody>
+      </p:sp>
+      <p:sp>
+        <p:nvSpPr>
+          <p:cNvPr id="8" name="TextBox 7"/>
+          <p:cNvSpPr txBox="1"/>
+          <p:nvPr/>
+        </p:nvSpPr>
+        <p:spPr>
+          <a:xfrm>
+            <a:off x="1051560" y="2743200"/>
+            <a:ext cx="2865120" cy="3017520"/>
+          </a:xfrm>
+          <a:prstGeom prst="rect">
+            <a:avLst/>
+          </a:prstGeom>
+          <a:noFill/>
+        </p:spPr>
+        <p:txBody>
+          <a:bodyPr wrap="square" anchor="t" lIns="0" rIns="0" tIns="0" bIns="0">
+            <a:spAutoFit/>
+          </a:bodyPr>
+          <a:lstStyle/>
+          <a:p>
+            <a:pPr algn="l">
+              <a:spcAft>
                 <a:spcPts val="810"/>
               </a:spcAft>
             </a:pPr>
             <a:r>
               <a:rPr sz="1800" b="0" i="0">
                 <a:solidFill>
-                  <a:srgbClr val="5D5A54"/>
+                  <a:srgbClr val="1C1B19"/>
+                </a:solidFill>
+                <a:latin typeface="Source Serif 4"/>
+              </a:rPr>
+              <a:t>Wants your location shared all the time "so I know you're safe," and is upset for a day whenever you turn it off.</a:t>
+            </a:r>
+          </a:p>
+        </p:txBody>
+      </p:sp>
+      <p:sp>
+        <p:nvSpPr>
+          <p:cNvPr id="9" name="Rectangle 8"/>
+          <p:cNvSpPr/>
+          <p:nvPr/>
+        </p:nvSpPr>
+        <p:spPr>
+          <a:xfrm>
+            <a:off x="4419600" y="2103120"/>
+            <a:ext cx="3322320" cy="3840480"/>
+          </a:xfrm>
+          <a:prstGeom prst="rect">
+            <a:avLst/>
+          </a:prstGeom>
+          <a:solidFill>
+            <a:srgbClr val="FFFFFF"/>
+          </a:solidFill>
+          <a:ln w="15875">
+            <a:solidFill>
+              <a:srgbClr val="D8D2C6"/>
+            </a:solidFill>
+          </a:ln>
+          <a:effectLst/>
+        </p:spPr>
+        <p:style>
+          <a:lnRef idx="1">
+            <a:schemeClr val="accent1"/>
+          </a:lnRef>
+          <a:fillRef idx="3">
+            <a:schemeClr val="accent1"/>
+          </a:fillRef>
+          <a:effectRef idx="2">
+            <a:schemeClr val="accent1"/>
+          </a:effectRef>
+          <a:fontRef idx="minor">
+            <a:schemeClr val="lt1"/>
+          </a:fontRef>
+        </p:style>
+        <p:txBody>
+          <a:bodyPr rtlCol="0" anchor="ctr"/>
+          <a:lstStyle/>
+          <a:p>
+            <a:pPr algn="ctr"/>
+          </a:p>
+        </p:txBody>
+      </p:sp>
+      <p:sp>
+        <p:nvSpPr>
+          <p:cNvPr id="10" name="TextBox 9"/>
+          <p:cNvSpPr txBox="1"/>
+          <p:nvPr/>
+        </p:nvSpPr>
+        <p:spPr>
+          <a:xfrm>
+            <a:off x="4648200" y="2286000"/>
+            <a:ext cx="2865120" cy="365760"/>
+          </a:xfrm>
+          <a:prstGeom prst="rect">
+            <a:avLst/>
+          </a:prstGeom>
+          <a:noFill/>
+        </p:spPr>
+        <p:txBody>
+          <a:bodyPr wrap="square" anchor="t" lIns="0" rIns="0" tIns="0" bIns="0">
+            <a:spAutoFit/>
+          </a:bodyPr>
+          <a:lstStyle/>
+          <a:p>
+            <a:pPr algn="l">
+              <a:spcAft>
+                <a:spcPts val="585"/>
+              </a:spcAft>
+            </a:pPr>
+            <a:r>
+              <a:rPr sz="1300" b="1" i="0">
+                <a:solidFill>
+                  <a:srgbClr val="0B2D5B"/>
                 </a:solidFill>
                 <a:latin typeface="Inter Tight"/>
               </a:rPr>
-              <a:t>Your partner answers the "Lands" way: interest, then a question. Then switch.</a:t>
+              <a:t>IMANI</a:t>
+            </a:r>
+          </a:p>
+        </p:txBody>
+      </p:sp>
+      <p:sp>
+        <p:nvSpPr>
+          <p:cNvPr id="11" name="TextBox 10"/>
+          <p:cNvSpPr txBox="1"/>
+          <p:nvPr/>
+        </p:nvSpPr>
+        <p:spPr>
+          <a:xfrm>
+            <a:off x="4648200" y="2743200"/>
+            <a:ext cx="2865120" cy="3017520"/>
+          </a:xfrm>
+          <a:prstGeom prst="rect">
+            <a:avLst/>
+          </a:prstGeom>
+          <a:noFill/>
+        </p:spPr>
+        <p:txBody>
+          <a:bodyPr wrap="square" anchor="t" lIns="0" rIns="0" tIns="0" bIns="0">
+            <a:spAutoFit/>
+          </a:bodyPr>
+          <a:lstStyle/>
+          <a:p>
+            <a:pPr algn="l">
+              <a:spcAft>
+                <a:spcPts val="810"/>
+              </a:spcAft>
+            </a:pPr>
+            <a:r>
+              <a:rPr sz="1800" b="0" i="0">
+                <a:solidFill>
+                  <a:srgbClr val="1C1B19"/>
+                </a:solidFill>
+                <a:latin typeface="Source Serif 4"/>
+              </a:rPr>
+              <a:t>Tells you privately that your joke in the group chat about a classmate's accent came across as mean.</a:t>
+            </a:r>
+          </a:p>
+        </p:txBody>
+      </p:sp>
+      <p:sp>
+        <p:nvSpPr>
+          <p:cNvPr id="12" name="Rectangle 11"/>
+          <p:cNvSpPr/>
+          <p:nvPr/>
+        </p:nvSpPr>
+        <p:spPr>
+          <a:xfrm>
+            <a:off x="8016239" y="2103120"/>
+            <a:ext cx="3322320" cy="3840480"/>
+          </a:xfrm>
+          <a:prstGeom prst="rect">
+            <a:avLst/>
+          </a:prstGeom>
+          <a:solidFill>
+            <a:srgbClr val="FFFFFF"/>
+          </a:solidFill>
+          <a:ln w="15875">
+            <a:solidFill>
+              <a:srgbClr val="D8D2C6"/>
+            </a:solidFill>
+          </a:ln>
+          <a:effectLst/>
+        </p:spPr>
+        <p:style>
+          <a:lnRef idx="1">
+            <a:schemeClr val="accent1"/>
+          </a:lnRef>
+          <a:fillRef idx="3">
+            <a:schemeClr val="accent1"/>
+          </a:fillRef>
+          <a:effectRef idx="2">
+            <a:schemeClr val="accent1"/>
+          </a:effectRef>
+          <a:fontRef idx="minor">
+            <a:schemeClr val="lt1"/>
+          </a:fontRef>
+        </p:style>
+        <p:txBody>
+          <a:bodyPr rtlCol="0" anchor="ctr"/>
+          <a:lstStyle/>
+          <a:p>
+            <a:pPr algn="ctr"/>
+          </a:p>
+        </p:txBody>
+      </p:sp>
+      <p:sp>
+        <p:nvSpPr>
+          <p:cNvPr id="13" name="TextBox 12"/>
+          <p:cNvSpPr txBox="1"/>
+          <p:nvPr/>
+        </p:nvSpPr>
+        <p:spPr>
+          <a:xfrm>
+            <a:off x="8244839" y="2286000"/>
+            <a:ext cx="2865120" cy="365760"/>
+          </a:xfrm>
+          <a:prstGeom prst="rect">
+            <a:avLst/>
+          </a:prstGeom>
+          <a:noFill/>
+        </p:spPr>
+        <p:txBody>
+          <a:bodyPr wrap="square" anchor="t" lIns="0" rIns="0" tIns="0" bIns="0">
+            <a:spAutoFit/>
+          </a:bodyPr>
+          <a:lstStyle/>
+          <a:p>
+            <a:pPr algn="l">
+              <a:spcAft>
+                <a:spcPts val="585"/>
+              </a:spcAft>
+            </a:pPr>
+            <a:r>
+              <a:rPr sz="1300" b="1" i="0">
+                <a:solidFill>
+                  <a:srgbClr val="0B2D5B"/>
+                </a:solidFill>
+                <a:latin typeface="Inter Tight"/>
+              </a:rPr>
+              <a:t>LUIS</a:t>
+            </a:r>
+          </a:p>
+        </p:txBody>
+      </p:sp>
+      <p:sp>
+        <p:nvSpPr>
+          <p:cNvPr id="14" name="TextBox 13"/>
+          <p:cNvSpPr txBox="1"/>
+          <p:nvPr/>
+        </p:nvSpPr>
+        <p:spPr>
+          <a:xfrm>
+            <a:off x="8244839" y="2743200"/>
+            <a:ext cx="2865120" cy="3017520"/>
+          </a:xfrm>
+          <a:prstGeom prst="rect">
+            <a:avLst/>
+          </a:prstGeom>
+          <a:noFill/>
+        </p:spPr>
+        <p:txBody>
+          <a:bodyPr wrap="square" anchor="t" lIns="0" rIns="0" tIns="0" bIns="0">
+            <a:spAutoFit/>
+          </a:bodyPr>
+          <a:lstStyle/>
+          <a:p>
+            <a:pPr algn="l">
+              <a:spcAft>
+                <a:spcPts val="810"/>
+              </a:spcAft>
+            </a:pPr>
+            <a:r>
+              <a:rPr sz="1800" b="0" i="0">
+                <a:solidFill>
+                  <a:srgbClr val="1C1B19"/>
+                </a:solidFill>
+                <a:latin typeface="Source Serif 4"/>
+              </a:rPr>
+              <a:t>A junior on your team drives you home from practice and takes the back roads way too fast. Everyone cheers. So do you.</a:t>
             </a:r>
           </a:p>
         </p:txBody>

--- a/decks/is-this-a-good-friend-lesson-v2.pptx
+++ b/decks/is-this-a-good-friend-lesson-v2.pptx
@@ -7853,6 +7853,45 @@
                 <a:latin typeface="Inter Tight"/>
               </a:rPr>
               <a:t>Beaver Upper School · Counseling</a:t>
+            </a:r>
+          </a:p>
+        </p:txBody>
+      </p:sp>
+      <p:sp>
+        <p:nvSpPr>
+          <p:cNvPr id="8" name="TextBox 7"/>
+          <p:cNvSpPr txBox="1"/>
+          <p:nvPr/>
+        </p:nvSpPr>
+        <p:spPr>
+          <a:xfrm>
+            <a:off x="6766560" y="5897880"/>
+            <a:ext cx="4846320" cy="640080"/>
+          </a:xfrm>
+          <a:prstGeom prst="rect">
+            <a:avLst/>
+          </a:prstGeom>
+          <a:noFill/>
+        </p:spPr>
+        <p:txBody>
+          <a:bodyPr wrap="square" anchor="t" lIns="0" rIns="0" tIns="0" bIns="0">
+            <a:spAutoFit/>
+          </a:bodyPr>
+          <a:lstStyle/>
+          <a:p>
+            <a:pPr algn="r">
+              <a:spcAft>
+                <a:spcPts val="495"/>
+              </a:spcAft>
+            </a:pPr>
+            <a:r>
+              <a:rPr sz="1100" b="0" i="0">
+                <a:solidFill>
+                  <a:srgbClr val="E8E4DA"/>
+                </a:solidFill>
+                <a:latin typeface="Inter Tight"/>
+              </a:rPr>
+              <a:t>Written by Dr. Rick Wilson, with AI-assisted drafting. Every lesson is reviewed and edited by Dr. Wilson.</a:t>
             </a:r>
           </a:p>
         </p:txBody>
